--- a/outputs/presentations/ivf-phd-faculty-presentation.pptx
+++ b/outputs/presentations/ivf-phd-faculty-presentation.pptx
@@ -2,29 +2,33 @@
 <file path=ppt/presentation.xml><?xml version="1.0" encoding="utf-8"?>
 <p:presentation xmlns:p="http://schemas.openxmlformats.org/presentationml/2006/main">
   <p:sldMasterIdLst>
-    <p:sldMasterId xmlns:r="http://schemas.openxmlformats.org/officeDocument/2006/relationships" id="2147483648" r:id="Rf76bb72f65bd42d4"/>
+    <p:sldMasterId xmlns:r="http://schemas.openxmlformats.org/officeDocument/2006/relationships" id="2147483648" r:id="R6a05c9c430ec409e"/>
   </p:sldMasterIdLst>
   <p:notesMasterIdLst>
-    <p:notesMasterId xmlns:r="http://schemas.openxmlformats.org/officeDocument/2006/relationships" r:id="Rc51c5c5a6381473c"/>
+    <p:notesMasterId xmlns:r="http://schemas.openxmlformats.org/officeDocument/2006/relationships" r:id="R0d9cbdaa235247d5"/>
   </p:notesMasterIdLst>
   <p:sldIdLst>
-    <p:sldId xmlns:r="http://schemas.openxmlformats.org/officeDocument/2006/relationships" id="256" r:id="Ra8b3e1d0501b40b6"/>
-    <p:sldId xmlns:r="http://schemas.openxmlformats.org/officeDocument/2006/relationships" id="257" r:id="R71ebd96b14d949e2"/>
-    <p:sldId xmlns:r="http://schemas.openxmlformats.org/officeDocument/2006/relationships" id="258" r:id="Rbdb1b2e2e3ac4705"/>
-    <p:sldId xmlns:r="http://schemas.openxmlformats.org/officeDocument/2006/relationships" id="259" r:id="R487b6b1d73234180"/>
-    <p:sldId xmlns:r="http://schemas.openxmlformats.org/officeDocument/2006/relationships" id="260" r:id="R8268c197d0a64c87"/>
-    <p:sldId xmlns:r="http://schemas.openxmlformats.org/officeDocument/2006/relationships" id="261" r:id="Rf7e497e2a78640a8"/>
-    <p:sldId xmlns:r="http://schemas.openxmlformats.org/officeDocument/2006/relationships" id="262" r:id="R7483ce8a7d93493b"/>
-    <p:sldId xmlns:r="http://schemas.openxmlformats.org/officeDocument/2006/relationships" id="263" r:id="Rd8f174fdcdbb41a5"/>
-    <p:sldId xmlns:r="http://schemas.openxmlformats.org/officeDocument/2006/relationships" id="264" r:id="R5c7b572f8f834c3d"/>
-    <p:sldId xmlns:r="http://schemas.openxmlformats.org/officeDocument/2006/relationships" id="265" r:id="Rebe8e40b50d6469a"/>
-    <p:sldId xmlns:r="http://schemas.openxmlformats.org/officeDocument/2006/relationships" id="266" r:id="Rdb701947bdb144a7"/>
-    <p:sldId xmlns:r="http://schemas.openxmlformats.org/officeDocument/2006/relationships" id="267" r:id="Rde401269c859489c"/>
-    <p:sldId xmlns:r="http://schemas.openxmlformats.org/officeDocument/2006/relationships" id="268" r:id="R7d930156784a41a5"/>
-    <p:sldId xmlns:r="http://schemas.openxmlformats.org/officeDocument/2006/relationships" id="269" r:id="R279d649479fe43db"/>
-    <p:sldId xmlns:r="http://schemas.openxmlformats.org/officeDocument/2006/relationships" id="270" r:id="R06c79502a0324955"/>
-    <p:sldId xmlns:r="http://schemas.openxmlformats.org/officeDocument/2006/relationships" id="271" r:id="R50bf306376644132"/>
-    <p:sldId xmlns:r="http://schemas.openxmlformats.org/officeDocument/2006/relationships" id="272" r:id="R26f0eea41d6c4e54"/>
+    <p:sldId xmlns:r="http://schemas.openxmlformats.org/officeDocument/2006/relationships" id="256" r:id="Rb65a20945d484da5"/>
+    <p:sldId xmlns:r="http://schemas.openxmlformats.org/officeDocument/2006/relationships" id="257" r:id="R7d00182623444439"/>
+    <p:sldId xmlns:r="http://schemas.openxmlformats.org/officeDocument/2006/relationships" id="258" r:id="R3016457a98af43a8"/>
+    <p:sldId xmlns:r="http://schemas.openxmlformats.org/officeDocument/2006/relationships" id="259" r:id="Rbb97c9bbf1614036"/>
+    <p:sldId xmlns:r="http://schemas.openxmlformats.org/officeDocument/2006/relationships" id="260" r:id="R5a991001fb304aeb"/>
+    <p:sldId xmlns:r="http://schemas.openxmlformats.org/officeDocument/2006/relationships" id="261" r:id="R36bde064e01c48d4"/>
+    <p:sldId xmlns:r="http://schemas.openxmlformats.org/officeDocument/2006/relationships" id="262" r:id="R5fb6712417f74837"/>
+    <p:sldId xmlns:r="http://schemas.openxmlformats.org/officeDocument/2006/relationships" id="263" r:id="R753a3727a05c4197"/>
+    <p:sldId xmlns:r="http://schemas.openxmlformats.org/officeDocument/2006/relationships" id="264" r:id="Re24c2a64aa584d50"/>
+    <p:sldId xmlns:r="http://schemas.openxmlformats.org/officeDocument/2006/relationships" id="265" r:id="R6ed7de3ecd544385"/>
+    <p:sldId xmlns:r="http://schemas.openxmlformats.org/officeDocument/2006/relationships" id="266" r:id="R9d07ef856bcf47e8"/>
+    <p:sldId xmlns:r="http://schemas.openxmlformats.org/officeDocument/2006/relationships" id="267" r:id="R870b429e6d694755"/>
+    <p:sldId xmlns:r="http://schemas.openxmlformats.org/officeDocument/2006/relationships" id="268" r:id="R9ad7d087dbee4ecf"/>
+    <p:sldId xmlns:r="http://schemas.openxmlformats.org/officeDocument/2006/relationships" id="269" r:id="R24e0bcbb6c6d419b"/>
+    <p:sldId xmlns:r="http://schemas.openxmlformats.org/officeDocument/2006/relationships" id="270" r:id="Rab336a7af44549a6"/>
+    <p:sldId xmlns:r="http://schemas.openxmlformats.org/officeDocument/2006/relationships" id="271" r:id="R6cff803b6eb2400d"/>
+    <p:sldId xmlns:r="http://schemas.openxmlformats.org/officeDocument/2006/relationships" id="272" r:id="R751e594da6564875"/>
+    <p:sldId xmlns:r="http://schemas.openxmlformats.org/officeDocument/2006/relationships" id="273" r:id="R8196ce4702c44672"/>
+    <p:sldId xmlns:r="http://schemas.openxmlformats.org/officeDocument/2006/relationships" id="274" r:id="Rd92f46c398364411"/>
+    <p:sldId xmlns:r="http://schemas.openxmlformats.org/officeDocument/2006/relationships" id="275" r:id="R60f172e5204d44f0"/>
+    <p:sldId xmlns:r="http://schemas.openxmlformats.org/officeDocument/2006/relationships" id="276" r:id="R2ca681f6bdb44b1e"/>
   </p:sldIdLst>
   <p:sldSz cx="12192000" cy="6858000"/>
   <p:notesSz cx="6858000" cy="9144000"/>
@@ -1233,6 +1237,138 @@
 </p:notes>
 </file>
 
+<file path=ppt/notesSlides/notesSlide18.xml><?xml version="1.0" encoding="utf-8"?>
+<p:notes xmlns:p="http://schemas.openxmlformats.org/presentationml/2006/main">
+  <p:cSld>
+    <p:spTree>
+      <p:nvGrpSpPr>
+        <p:cNvPr id="1" name=""/>
+        <p:cNvGrpSpPr/>
+        <p:nvPr/>
+      </p:nvGrpSpPr>
+      <p:grpSpPr>
+        <a:xfrm xmlns:a="http://schemas.openxmlformats.org/drawingml/2006/main"/>
+      </p:grpSpPr>
+      <p:sp>
+        <p:nvSpPr>
+          <p:cNvPr id="2" name="Slide Image Placeholder 1"/>
+          <p:cNvSpPr>
+            <a:spLocks xmlns:a="http://schemas.openxmlformats.org/drawingml/2006/main" noGrp="1"/>
+          </p:cNvSpPr>
+          <p:nvPr>
+            <p:ph type="sldImg" idx="0"/>
+          </p:nvPr>
+        </p:nvSpPr>
+        <p:spPr/>
+      </p:sp>
+      <p:sp>
+        <p:nvSpPr>
+          <p:cNvPr id="3" name="Notes Placeholder 2"/>
+          <p:cNvSpPr>
+            <a:spLocks xmlns:a="http://schemas.openxmlformats.org/drawingml/2006/main" noGrp="1"/>
+          </p:cNvSpPr>
+          <p:nvPr>
+            <p:ph type="body" idx="1"/>
+          </p:nvPr>
+        </p:nvSpPr>
+        <p:spPr/>
+        <p:txBody>
+          <a:bodyPr xmlns:a="http://schemas.openxmlformats.org/drawingml/2006/main"/>
+          <a:lstStyle xmlns:a="http://schemas.openxmlformats.org/drawingml/2006/main"/>
+          <a:p xmlns:a="http://schemas.openxmlformats.org/drawingml/2006/main"/>
+        </p:txBody>
+      </p:sp>
+      <p:sp>
+        <p:nvSpPr>
+          <p:cNvPr id="4" name="Slide Number Placeholder 3"/>
+          <p:cNvSpPr>
+            <a:spLocks xmlns:a="http://schemas.openxmlformats.org/drawingml/2006/main" noGrp="1"/>
+          </p:cNvSpPr>
+          <p:nvPr>
+            <p:ph type="sldNum" idx="5"/>
+          </p:nvPr>
+        </p:nvSpPr>
+        <p:spPr/>
+        <p:txBody>
+          <a:bodyPr xmlns:a="http://schemas.openxmlformats.org/drawingml/2006/main"/>
+          <a:lstStyle xmlns:a="http://schemas.openxmlformats.org/drawingml/2006/main"/>
+          <a:p xmlns:a="http://schemas.openxmlformats.org/drawingml/2006/main"/>
+        </p:txBody>
+      </p:sp>
+    </p:spTree>
+  </p:cSld>
+  <p:clrMapOvr>
+    <a:masterClrMapping xmlns:a="http://schemas.openxmlformats.org/drawingml/2006/main"/>
+  </p:clrMapOvr>
+</p:notes>
+</file>
+
+<file path=ppt/notesSlides/notesSlide19.xml><?xml version="1.0" encoding="utf-8"?>
+<p:notes xmlns:p="http://schemas.openxmlformats.org/presentationml/2006/main">
+  <p:cSld>
+    <p:spTree>
+      <p:nvGrpSpPr>
+        <p:cNvPr id="1" name=""/>
+        <p:cNvGrpSpPr/>
+        <p:nvPr/>
+      </p:nvGrpSpPr>
+      <p:grpSpPr>
+        <a:xfrm xmlns:a="http://schemas.openxmlformats.org/drawingml/2006/main"/>
+      </p:grpSpPr>
+      <p:sp>
+        <p:nvSpPr>
+          <p:cNvPr id="2" name="Slide Image Placeholder 1"/>
+          <p:cNvSpPr>
+            <a:spLocks xmlns:a="http://schemas.openxmlformats.org/drawingml/2006/main" noGrp="1"/>
+          </p:cNvSpPr>
+          <p:nvPr>
+            <p:ph type="sldImg" idx="0"/>
+          </p:nvPr>
+        </p:nvSpPr>
+        <p:spPr/>
+      </p:sp>
+      <p:sp>
+        <p:nvSpPr>
+          <p:cNvPr id="3" name="Notes Placeholder 2"/>
+          <p:cNvSpPr>
+            <a:spLocks xmlns:a="http://schemas.openxmlformats.org/drawingml/2006/main" noGrp="1"/>
+          </p:cNvSpPr>
+          <p:nvPr>
+            <p:ph type="body" idx="1"/>
+          </p:nvPr>
+        </p:nvSpPr>
+        <p:spPr/>
+        <p:txBody>
+          <a:bodyPr xmlns:a="http://schemas.openxmlformats.org/drawingml/2006/main"/>
+          <a:lstStyle xmlns:a="http://schemas.openxmlformats.org/drawingml/2006/main"/>
+          <a:p xmlns:a="http://schemas.openxmlformats.org/drawingml/2006/main"/>
+        </p:txBody>
+      </p:sp>
+      <p:sp>
+        <p:nvSpPr>
+          <p:cNvPr id="4" name="Slide Number Placeholder 3"/>
+          <p:cNvSpPr>
+            <a:spLocks xmlns:a="http://schemas.openxmlformats.org/drawingml/2006/main" noGrp="1"/>
+          </p:cNvSpPr>
+          <p:nvPr>
+            <p:ph type="sldNum" idx="5"/>
+          </p:nvPr>
+        </p:nvSpPr>
+        <p:spPr/>
+        <p:txBody>
+          <a:bodyPr xmlns:a="http://schemas.openxmlformats.org/drawingml/2006/main"/>
+          <a:lstStyle xmlns:a="http://schemas.openxmlformats.org/drawingml/2006/main"/>
+          <a:p xmlns:a="http://schemas.openxmlformats.org/drawingml/2006/main"/>
+        </p:txBody>
+      </p:sp>
+    </p:spTree>
+  </p:cSld>
+  <p:clrMapOvr>
+    <a:masterClrMapping xmlns:a="http://schemas.openxmlformats.org/drawingml/2006/main"/>
+  </p:clrMapOvr>
+</p:notes>
+</file>
+
 <file path=ppt/notesSlides/notesSlide2.xml><?xml version="1.0" encoding="utf-8"?>
 <p:notes xmlns:p="http://schemas.openxmlformats.org/presentationml/2006/main">
   <p:cSld>
@@ -1286,6 +1422,138 @@
               <a:t>Do not imply that the 5% UK rate represents India.</a:t>
             </a:r>
           </a:p>
+        </p:txBody>
+      </p:sp>
+      <p:sp>
+        <p:nvSpPr>
+          <p:cNvPr id="4" name="Slide Number Placeholder 3"/>
+          <p:cNvSpPr>
+            <a:spLocks xmlns:a="http://schemas.openxmlformats.org/drawingml/2006/main" noGrp="1"/>
+          </p:cNvSpPr>
+          <p:nvPr>
+            <p:ph type="sldNum" idx="5"/>
+          </p:nvPr>
+        </p:nvSpPr>
+        <p:spPr/>
+        <p:txBody>
+          <a:bodyPr xmlns:a="http://schemas.openxmlformats.org/drawingml/2006/main"/>
+          <a:lstStyle xmlns:a="http://schemas.openxmlformats.org/drawingml/2006/main"/>
+          <a:p xmlns:a="http://schemas.openxmlformats.org/drawingml/2006/main"/>
+        </p:txBody>
+      </p:sp>
+    </p:spTree>
+  </p:cSld>
+  <p:clrMapOvr>
+    <a:masterClrMapping xmlns:a="http://schemas.openxmlformats.org/drawingml/2006/main"/>
+  </p:clrMapOvr>
+</p:notes>
+</file>
+
+<file path=ppt/notesSlides/notesSlide20.xml><?xml version="1.0" encoding="utf-8"?>
+<p:notes xmlns:p="http://schemas.openxmlformats.org/presentationml/2006/main">
+  <p:cSld>
+    <p:spTree>
+      <p:nvGrpSpPr>
+        <p:cNvPr id="1" name=""/>
+        <p:cNvGrpSpPr/>
+        <p:nvPr/>
+      </p:nvGrpSpPr>
+      <p:grpSpPr>
+        <a:xfrm xmlns:a="http://schemas.openxmlformats.org/drawingml/2006/main"/>
+      </p:grpSpPr>
+      <p:sp>
+        <p:nvSpPr>
+          <p:cNvPr id="2" name="Slide Image Placeholder 1"/>
+          <p:cNvSpPr>
+            <a:spLocks xmlns:a="http://schemas.openxmlformats.org/drawingml/2006/main" noGrp="1"/>
+          </p:cNvSpPr>
+          <p:nvPr>
+            <p:ph type="sldImg" idx="0"/>
+          </p:nvPr>
+        </p:nvSpPr>
+        <p:spPr/>
+      </p:sp>
+      <p:sp>
+        <p:nvSpPr>
+          <p:cNvPr id="3" name="Notes Placeholder 2"/>
+          <p:cNvSpPr>
+            <a:spLocks xmlns:a="http://schemas.openxmlformats.org/drawingml/2006/main" noGrp="1"/>
+          </p:cNvSpPr>
+          <p:nvPr>
+            <p:ph type="body" idx="1"/>
+          </p:nvPr>
+        </p:nvSpPr>
+        <p:spPr/>
+        <p:txBody>
+          <a:bodyPr xmlns:a="http://schemas.openxmlformats.org/drawingml/2006/main"/>
+          <a:lstStyle xmlns:a="http://schemas.openxmlformats.org/drawingml/2006/main"/>
+          <a:p xmlns:a="http://schemas.openxmlformats.org/drawingml/2006/main"/>
+        </p:txBody>
+      </p:sp>
+      <p:sp>
+        <p:nvSpPr>
+          <p:cNvPr id="4" name="Slide Number Placeholder 3"/>
+          <p:cNvSpPr>
+            <a:spLocks xmlns:a="http://schemas.openxmlformats.org/drawingml/2006/main" noGrp="1"/>
+          </p:cNvSpPr>
+          <p:nvPr>
+            <p:ph type="sldNum" idx="5"/>
+          </p:nvPr>
+        </p:nvSpPr>
+        <p:spPr/>
+        <p:txBody>
+          <a:bodyPr xmlns:a="http://schemas.openxmlformats.org/drawingml/2006/main"/>
+          <a:lstStyle xmlns:a="http://schemas.openxmlformats.org/drawingml/2006/main"/>
+          <a:p xmlns:a="http://schemas.openxmlformats.org/drawingml/2006/main"/>
+        </p:txBody>
+      </p:sp>
+    </p:spTree>
+  </p:cSld>
+  <p:clrMapOvr>
+    <a:masterClrMapping xmlns:a="http://schemas.openxmlformats.org/drawingml/2006/main"/>
+  </p:clrMapOvr>
+</p:notes>
+</file>
+
+<file path=ppt/notesSlides/notesSlide21.xml><?xml version="1.0" encoding="utf-8"?>
+<p:notes xmlns:p="http://schemas.openxmlformats.org/presentationml/2006/main">
+  <p:cSld>
+    <p:spTree>
+      <p:nvGrpSpPr>
+        <p:cNvPr id="1" name=""/>
+        <p:cNvGrpSpPr/>
+        <p:nvPr/>
+      </p:nvGrpSpPr>
+      <p:grpSpPr>
+        <a:xfrm xmlns:a="http://schemas.openxmlformats.org/drawingml/2006/main"/>
+      </p:grpSpPr>
+      <p:sp>
+        <p:nvSpPr>
+          <p:cNvPr id="2" name="Slide Image Placeholder 1"/>
+          <p:cNvSpPr>
+            <a:spLocks xmlns:a="http://schemas.openxmlformats.org/drawingml/2006/main" noGrp="1"/>
+          </p:cNvSpPr>
+          <p:nvPr>
+            <p:ph type="sldImg" idx="0"/>
+          </p:nvPr>
+        </p:nvSpPr>
+        <p:spPr/>
+      </p:sp>
+      <p:sp>
+        <p:nvSpPr>
+          <p:cNvPr id="3" name="Notes Placeholder 2"/>
+          <p:cNvSpPr>
+            <a:spLocks xmlns:a="http://schemas.openxmlformats.org/drawingml/2006/main" noGrp="1"/>
+          </p:cNvSpPr>
+          <p:nvPr>
+            <p:ph type="body" idx="1"/>
+          </p:nvPr>
+        </p:nvSpPr>
+        <p:spPr/>
+        <p:txBody>
+          <a:bodyPr xmlns:a="http://schemas.openxmlformats.org/drawingml/2006/main"/>
+          <a:lstStyle xmlns:a="http://schemas.openxmlformats.org/drawingml/2006/main"/>
+          <a:p xmlns:a="http://schemas.openxmlformats.org/drawingml/2006/main"/>
         </p:txBody>
       </p:sp>
       <p:sp>
@@ -1911,7 +2179,7 @@
   </p:cSld>
   <p:clrMap bg1="lt1" tx1="dk1" bg2="lt2" tx2="dk2" accent1="accent1" accent2="accent2" accent3="accent3" accent4="accent4" accent5="accent5" accent6="accent6" hlink="hlink" folHlink="folHlink"/>
   <p:sldLayoutIdLst>
-    <p:sldLayoutId xmlns:r="http://schemas.openxmlformats.org/officeDocument/2006/relationships" id="2147483649" r:id="R8b65b3a2981f473a"/>
+    <p:sldLayoutId xmlns:r="http://schemas.openxmlformats.org/officeDocument/2006/relationships" id="2147483649" r:id="Rd763a887f525487c"/>
   </p:sldLayoutIdLst>
   <p:txStyles>
     <p:titleStyle>
@@ -2632,11 +2900,6 @@
         <c:crosses val="autoZero"/>
         <c:crossBetween val="between"/>
       </c:valAx>
-      <c:spPr>
-        <a:solidFill xmlns:a="http://schemas.openxmlformats.org/drawingml/2006/main">
-          <a:srgbClr val="FFFFFF"/>
-        </a:solidFill>
-      </c:spPr>
     </c:plotArea>
     <c:plotVisOnly val="1"/>
   </c:chart>
@@ -2735,6 +2998,7 @@
           <a:lstStyle xmlns:a="http://schemas.openxmlformats.org/drawingml/2006/main"/>
           <a:p xmlns:a="http://schemas.openxmlformats.org/drawingml/2006/main">
             <a:pPr algn="l">
+              <a:buNone/>
               <a:defRPr sz="1200" b="1">
                 <a:solidFill>
                   <a:srgbClr val="555555"/>
@@ -2785,6 +3049,7 @@
           <a:lstStyle xmlns:a="http://schemas.openxmlformats.org/drawingml/2006/main"/>
           <a:p xmlns:a="http://schemas.openxmlformats.org/drawingml/2006/main">
             <a:pPr algn="l">
+              <a:buNone/>
               <a:defRPr sz="4350" b="1">
                 <a:solidFill>
                   <a:srgbClr val="111111"/>
@@ -2835,6 +3100,7 @@
           <a:lstStyle xmlns:a="http://schemas.openxmlformats.org/drawingml/2006/main"/>
           <a:p xmlns:a="http://schemas.openxmlformats.org/drawingml/2006/main">
             <a:pPr algn="l">
+              <a:buNone/>
               <a:defRPr sz="2025" b="0">
                 <a:solidFill>
                   <a:srgbClr val="555555"/>
@@ -2916,6 +3182,7 @@
           <a:lstStyle xmlns:a="http://schemas.openxmlformats.org/drawingml/2006/main"/>
           <a:p xmlns:a="http://schemas.openxmlformats.org/drawingml/2006/main">
             <a:pPr algn="l">
+              <a:buNone/>
               <a:defRPr sz="1050" b="1">
                 <a:solidFill>
                   <a:srgbClr val="555555"/>
@@ -2966,6 +3233,7 @@
           <a:lstStyle xmlns:a="http://schemas.openxmlformats.org/drawingml/2006/main"/>
           <a:p xmlns:a="http://schemas.openxmlformats.org/drawingml/2006/main">
             <a:pPr algn="l">
+              <a:buNone/>
               <a:defRPr sz="4350" b="1">
                 <a:solidFill>
                   <a:srgbClr val="111111"/>
@@ -3016,6 +3284,7 @@
           <a:lstStyle xmlns:a="http://schemas.openxmlformats.org/drawingml/2006/main"/>
           <a:p xmlns:a="http://schemas.openxmlformats.org/drawingml/2006/main">
             <a:pPr algn="l">
+              <a:buNone/>
               <a:defRPr sz="1575" b="0">
                 <a:solidFill>
                   <a:srgbClr val="111111"/>
@@ -3033,6 +3302,7 @@
           </a:p>
           <a:p xmlns:a="http://schemas.openxmlformats.org/drawingml/2006/main">
             <a:pPr algn="l">
+              <a:buNone/>
               <a:defRPr sz="1575" b="0">
                 <a:solidFill>
                   <a:srgbClr val="111111"/>
@@ -3050,6 +3320,7 @@
           </a:p>
           <a:p xmlns:a="http://schemas.openxmlformats.org/drawingml/2006/main">
             <a:pPr algn="l">
+              <a:buNone/>
               <a:defRPr sz="1575" b="0">
                 <a:solidFill>
                   <a:srgbClr val="111111"/>
@@ -3067,6 +3338,7 @@
           </a:p>
           <a:p xmlns:a="http://schemas.openxmlformats.org/drawingml/2006/main">
             <a:pPr algn="l">
+              <a:buNone/>
               <a:defRPr sz="1575" b="0">
                 <a:solidFill>
                   <a:srgbClr val="111111"/>
@@ -3117,6 +3389,7 @@
           <a:lstStyle xmlns:a="http://schemas.openxmlformats.org/drawingml/2006/main"/>
           <a:p xmlns:a="http://schemas.openxmlformats.org/drawingml/2006/main">
             <a:pPr algn="l">
+              <a:buNone/>
               <a:defRPr sz="1350" b="0">
                 <a:solidFill>
                   <a:srgbClr val="555555"/>
@@ -3189,6 +3462,7 @@
           <a:lstStyle xmlns:a="http://schemas.openxmlformats.org/drawingml/2006/main"/>
           <a:p xmlns:a="http://schemas.openxmlformats.org/drawingml/2006/main">
             <a:pPr algn="l">
+              <a:buNone/>
               <a:defRPr sz="1050" b="1">
                 <a:solidFill>
                   <a:srgbClr val="555555"/>
@@ -3239,6 +3513,7 @@
           <a:lstStyle xmlns:a="http://schemas.openxmlformats.org/drawingml/2006/main"/>
           <a:p xmlns:a="http://schemas.openxmlformats.org/drawingml/2006/main">
             <a:pPr algn="r">
+              <a:buNone/>
               <a:defRPr sz="1050" b="1">
                 <a:solidFill>
                   <a:srgbClr val="555555"/>
@@ -3289,6 +3564,7 @@
           <a:lstStyle xmlns:a="http://schemas.openxmlformats.org/drawingml/2006/main"/>
           <a:p xmlns:a="http://schemas.openxmlformats.org/drawingml/2006/main">
             <a:pPr algn="l">
+              <a:buNone/>
               <a:defRPr sz="2850" b="1">
                 <a:solidFill>
                   <a:srgbClr val="111111"/>
@@ -3401,6 +3677,7 @@
           <a:lstStyle xmlns:a="http://schemas.openxmlformats.org/drawingml/2006/main"/>
           <a:p xmlns:a="http://schemas.openxmlformats.org/drawingml/2006/main">
             <a:pPr algn="ctr">
+              <a:buNone/>
               <a:defRPr sz="2550" b="1">
                 <a:solidFill>
                   <a:srgbClr val="FFFFFF"/>
@@ -3451,6 +3728,7 @@
           <a:lstStyle xmlns:a="http://schemas.openxmlformats.org/drawingml/2006/main"/>
           <a:p xmlns:a="http://schemas.openxmlformats.org/drawingml/2006/main">
             <a:pPr algn="l">
+              <a:buNone/>
               <a:defRPr sz="1800" b="1">
                 <a:solidFill>
                   <a:srgbClr val="E95D2A"/>
@@ -3532,6 +3810,7 @@
           <a:lstStyle xmlns:a="http://schemas.openxmlformats.org/drawingml/2006/main"/>
           <a:p xmlns:a="http://schemas.openxmlformats.org/drawingml/2006/main">
             <a:pPr algn="l">
+              <a:buNone/>
               <a:defRPr sz="1500" b="0">
                 <a:solidFill>
                   <a:srgbClr val="111111"/>
@@ -3613,6 +3892,7 @@
           <a:lstStyle xmlns:a="http://schemas.openxmlformats.org/drawingml/2006/main"/>
           <a:p xmlns:a="http://schemas.openxmlformats.org/drawingml/2006/main">
             <a:pPr algn="l">
+              <a:buNone/>
               <a:defRPr sz="1500" b="0">
                 <a:solidFill>
                   <a:srgbClr val="111111"/>
@@ -3694,6 +3974,7 @@
           <a:lstStyle xmlns:a="http://schemas.openxmlformats.org/drawingml/2006/main"/>
           <a:p xmlns:a="http://schemas.openxmlformats.org/drawingml/2006/main">
             <a:pPr algn="l">
+              <a:buNone/>
               <a:defRPr sz="1500" b="0">
                 <a:solidFill>
                   <a:srgbClr val="111111"/>
@@ -3775,6 +4056,7 @@
           <a:lstStyle xmlns:a="http://schemas.openxmlformats.org/drawingml/2006/main"/>
           <a:p xmlns:a="http://schemas.openxmlformats.org/drawingml/2006/main">
             <a:pPr algn="l">
+              <a:buNone/>
               <a:defRPr sz="1500" b="0">
                 <a:solidFill>
                   <a:srgbClr val="111111"/>
@@ -3847,6 +4129,7 @@
           <a:lstStyle xmlns:a="http://schemas.openxmlformats.org/drawingml/2006/main"/>
           <a:p xmlns:a="http://schemas.openxmlformats.org/drawingml/2006/main">
             <a:pPr algn="l">
+              <a:buNone/>
               <a:defRPr sz="1050" b="1">
                 <a:solidFill>
                   <a:srgbClr val="555555"/>
@@ -3897,6 +4180,7 @@
           <a:lstStyle xmlns:a="http://schemas.openxmlformats.org/drawingml/2006/main"/>
           <a:p xmlns:a="http://schemas.openxmlformats.org/drawingml/2006/main">
             <a:pPr algn="r">
+              <a:buNone/>
               <a:defRPr sz="1050" b="1">
                 <a:solidFill>
                   <a:srgbClr val="555555"/>
@@ -3947,6 +4231,7 @@
           <a:lstStyle xmlns:a="http://schemas.openxmlformats.org/drawingml/2006/main"/>
           <a:p xmlns:a="http://schemas.openxmlformats.org/drawingml/2006/main">
             <a:pPr algn="l">
+              <a:buNone/>
               <a:defRPr sz="2850" b="1">
                 <a:solidFill>
                   <a:srgbClr val="111111"/>
@@ -4028,6 +4313,7 @@
           <a:lstStyle xmlns:a="http://schemas.openxmlformats.org/drawingml/2006/main"/>
           <a:p xmlns:a="http://schemas.openxmlformats.org/drawingml/2006/main">
             <a:pPr algn="l">
+              <a:buNone/>
               <a:defRPr sz="1350" b="1">
                 <a:solidFill>
                   <a:srgbClr val="E95D2A"/>
@@ -4078,6 +4364,7 @@
           <a:lstStyle xmlns:a="http://schemas.openxmlformats.org/drawingml/2006/main"/>
           <a:p xmlns:a="http://schemas.openxmlformats.org/drawingml/2006/main">
             <a:pPr algn="l">
+              <a:buNone/>
               <a:defRPr sz="1800" b="0">
                 <a:solidFill>
                   <a:srgbClr val="111111"/>
@@ -4159,6 +4446,7 @@
           <a:lstStyle xmlns:a="http://schemas.openxmlformats.org/drawingml/2006/main"/>
           <a:p xmlns:a="http://schemas.openxmlformats.org/drawingml/2006/main">
             <a:pPr algn="l">
+              <a:buNone/>
               <a:defRPr sz="1350" b="1">
                 <a:solidFill>
                   <a:srgbClr val="E95D2A"/>
@@ -4209,6 +4497,7 @@
           <a:lstStyle xmlns:a="http://schemas.openxmlformats.org/drawingml/2006/main"/>
           <a:p xmlns:a="http://schemas.openxmlformats.org/drawingml/2006/main">
             <a:pPr algn="l">
+              <a:buNone/>
               <a:defRPr sz="1800" b="0">
                 <a:solidFill>
                   <a:srgbClr val="111111"/>
@@ -4290,6 +4579,7 @@
           <a:lstStyle xmlns:a="http://schemas.openxmlformats.org/drawingml/2006/main"/>
           <a:p xmlns:a="http://schemas.openxmlformats.org/drawingml/2006/main">
             <a:pPr algn="l">
+              <a:buNone/>
               <a:defRPr sz="1350" b="1">
                 <a:solidFill>
                   <a:srgbClr val="E95D2A"/>
@@ -4340,6 +4630,7 @@
           <a:lstStyle xmlns:a="http://schemas.openxmlformats.org/drawingml/2006/main"/>
           <a:p xmlns:a="http://schemas.openxmlformats.org/drawingml/2006/main">
             <a:pPr algn="l">
+              <a:buNone/>
               <a:defRPr sz="1800" b="0">
                 <a:solidFill>
                   <a:srgbClr val="111111"/>
@@ -4421,6 +4712,7 @@
           <a:lstStyle xmlns:a="http://schemas.openxmlformats.org/drawingml/2006/main"/>
           <a:p xmlns:a="http://schemas.openxmlformats.org/drawingml/2006/main">
             <a:pPr algn="l">
+              <a:buNone/>
               <a:defRPr sz="1350" b="1">
                 <a:solidFill>
                   <a:srgbClr val="E95D2A"/>
@@ -4471,6 +4763,7 @@
           <a:lstStyle xmlns:a="http://schemas.openxmlformats.org/drawingml/2006/main"/>
           <a:p xmlns:a="http://schemas.openxmlformats.org/drawingml/2006/main">
             <a:pPr algn="l">
+              <a:buNone/>
               <a:defRPr sz="1800" b="1">
                 <a:solidFill>
                   <a:srgbClr val="111111"/>
@@ -4552,6 +4845,7 @@
           <a:lstStyle xmlns:a="http://schemas.openxmlformats.org/drawingml/2006/main"/>
           <a:p xmlns:a="http://schemas.openxmlformats.org/drawingml/2006/main">
             <a:pPr algn="l">
+              <a:buNone/>
               <a:defRPr sz="1350" b="1">
                 <a:solidFill>
                   <a:srgbClr val="E95D2A"/>
@@ -4602,6 +4896,7 @@
           <a:lstStyle xmlns:a="http://schemas.openxmlformats.org/drawingml/2006/main"/>
           <a:p xmlns:a="http://schemas.openxmlformats.org/drawingml/2006/main">
             <a:pPr algn="l">
+              <a:buNone/>
               <a:defRPr sz="1800" b="0">
                 <a:solidFill>
                   <a:srgbClr val="111111"/>
@@ -4674,6 +4969,7 @@
           <a:lstStyle xmlns:a="http://schemas.openxmlformats.org/drawingml/2006/main"/>
           <a:p xmlns:a="http://schemas.openxmlformats.org/drawingml/2006/main">
             <a:pPr algn="l">
+              <a:buNone/>
               <a:defRPr sz="1050" b="1">
                 <a:solidFill>
                   <a:srgbClr val="555555"/>
@@ -4724,6 +5020,7 @@
           <a:lstStyle xmlns:a="http://schemas.openxmlformats.org/drawingml/2006/main"/>
           <a:p xmlns:a="http://schemas.openxmlformats.org/drawingml/2006/main">
             <a:pPr algn="r">
+              <a:buNone/>
               <a:defRPr sz="1050" b="1">
                 <a:solidFill>
                   <a:srgbClr val="555555"/>
@@ -4774,6 +5071,7 @@
           <a:lstStyle xmlns:a="http://schemas.openxmlformats.org/drawingml/2006/main"/>
           <a:p xmlns:a="http://schemas.openxmlformats.org/drawingml/2006/main">
             <a:pPr algn="l">
+              <a:buNone/>
               <a:defRPr sz="2850" b="1">
                 <a:solidFill>
                   <a:srgbClr val="111111"/>
@@ -4979,6 +5277,7 @@
           <a:lstStyle xmlns:a="http://schemas.openxmlformats.org/drawingml/2006/main"/>
           <a:p xmlns:a="http://schemas.openxmlformats.org/drawingml/2006/main">
             <a:pPr algn="ctr">
+              <a:buNone/>
               <a:defRPr sz="1350" b="1">
                 <a:solidFill>
                   <a:srgbClr val="111111"/>
@@ -5060,6 +5359,7 @@
           <a:lstStyle xmlns:a="http://schemas.openxmlformats.org/drawingml/2006/main"/>
           <a:p xmlns:a="http://schemas.openxmlformats.org/drawingml/2006/main">
             <a:pPr algn="ctr">
+              <a:buNone/>
               <a:defRPr sz="1350" b="1">
                 <a:solidFill>
                   <a:srgbClr val="111111"/>
@@ -5141,6 +5441,7 @@
           <a:lstStyle xmlns:a="http://schemas.openxmlformats.org/drawingml/2006/main"/>
           <a:p xmlns:a="http://schemas.openxmlformats.org/drawingml/2006/main">
             <a:pPr algn="ctr">
+              <a:buNone/>
               <a:defRPr sz="1350" b="1">
                 <a:solidFill>
                   <a:srgbClr val="111111"/>
@@ -5222,6 +5523,7 @@
           <a:lstStyle xmlns:a="http://schemas.openxmlformats.org/drawingml/2006/main"/>
           <a:p xmlns:a="http://schemas.openxmlformats.org/drawingml/2006/main">
             <a:pPr algn="ctr">
+              <a:buNone/>
               <a:defRPr sz="1350" b="1">
                 <a:solidFill>
                   <a:srgbClr val="111111"/>
@@ -5303,6 +5605,7 @@
           <a:lstStyle xmlns:a="http://schemas.openxmlformats.org/drawingml/2006/main"/>
           <a:p xmlns:a="http://schemas.openxmlformats.org/drawingml/2006/main">
             <a:pPr algn="ctr">
+              <a:buNone/>
               <a:defRPr sz="1350" b="1">
                 <a:solidFill>
                   <a:srgbClr val="FFFFFF"/>
@@ -5384,6 +5687,7 @@
           <a:lstStyle xmlns:a="http://schemas.openxmlformats.org/drawingml/2006/main"/>
           <a:p xmlns:a="http://schemas.openxmlformats.org/drawingml/2006/main">
             <a:pPr algn="ctr">
+              <a:buNone/>
               <a:defRPr sz="1350" b="1">
                 <a:solidFill>
                   <a:srgbClr val="111111"/>
@@ -5434,6 +5738,7 @@
           <a:lstStyle xmlns:a="http://schemas.openxmlformats.org/drawingml/2006/main"/>
           <a:p xmlns:a="http://schemas.openxmlformats.org/drawingml/2006/main">
             <a:pPr algn="ctr">
+              <a:buNone/>
               <a:defRPr sz="1125" b="0">
                 <a:solidFill>
                   <a:srgbClr val="555555"/>
@@ -5484,6 +5789,7 @@
           <a:lstStyle xmlns:a="http://schemas.openxmlformats.org/drawingml/2006/main"/>
           <a:p xmlns:a="http://schemas.openxmlformats.org/drawingml/2006/main">
             <a:pPr algn="ctr">
+              <a:buNone/>
               <a:defRPr sz="1500" b="0">
                 <a:solidFill>
                   <a:srgbClr val="555555"/>
@@ -5534,6 +5840,7 @@
           <a:lstStyle xmlns:a="http://schemas.openxmlformats.org/drawingml/2006/main"/>
           <a:p xmlns:a="http://schemas.openxmlformats.org/drawingml/2006/main">
             <a:pPr algn="l">
+              <a:buNone/>
               <a:defRPr sz="1275" b="0">
                 <a:solidFill>
                   <a:srgbClr val="555555"/>
@@ -5606,6 +5913,7 @@
           <a:lstStyle xmlns:a="http://schemas.openxmlformats.org/drawingml/2006/main"/>
           <a:p xmlns:a="http://schemas.openxmlformats.org/drawingml/2006/main">
             <a:pPr algn="l">
+              <a:buNone/>
               <a:defRPr sz="1050" b="1">
                 <a:solidFill>
                   <a:srgbClr val="555555"/>
@@ -5656,6 +5964,7 @@
           <a:lstStyle xmlns:a="http://schemas.openxmlformats.org/drawingml/2006/main"/>
           <a:p xmlns:a="http://schemas.openxmlformats.org/drawingml/2006/main">
             <a:pPr algn="r">
+              <a:buNone/>
               <a:defRPr sz="1050" b="1">
                 <a:solidFill>
                   <a:srgbClr val="555555"/>
@@ -5706,6 +6015,7 @@
           <a:lstStyle xmlns:a="http://schemas.openxmlformats.org/drawingml/2006/main"/>
           <a:p xmlns:a="http://schemas.openxmlformats.org/drawingml/2006/main">
             <a:pPr algn="l">
+              <a:buNone/>
               <a:defRPr sz="2850" b="1">
                 <a:solidFill>
                   <a:srgbClr val="111111"/>
@@ -5818,6 +6128,7 @@
           <a:lstStyle xmlns:a="http://schemas.openxmlformats.org/drawingml/2006/main"/>
           <a:p xmlns:a="http://schemas.openxmlformats.org/drawingml/2006/main">
             <a:pPr algn="l">
+              <a:buNone/>
               <a:defRPr sz="2025" b="1">
                 <a:solidFill>
                   <a:srgbClr val="E95D2A"/>
@@ -5868,6 +6179,7 @@
           <a:lstStyle xmlns:a="http://schemas.openxmlformats.org/drawingml/2006/main"/>
           <a:p xmlns:a="http://schemas.openxmlformats.org/drawingml/2006/main">
             <a:pPr algn="l">
+              <a:buNone/>
               <a:defRPr sz="1575" b="0">
                 <a:solidFill>
                   <a:srgbClr val="111111"/>
@@ -5949,6 +6261,7 @@
           <a:lstStyle xmlns:a="http://schemas.openxmlformats.org/drawingml/2006/main"/>
           <a:p xmlns:a="http://schemas.openxmlformats.org/drawingml/2006/main">
             <a:pPr algn="l">
+              <a:buNone/>
               <a:defRPr sz="2025" b="1">
                 <a:solidFill>
                   <a:srgbClr val="111111"/>
@@ -5999,6 +6312,7 @@
           <a:lstStyle xmlns:a="http://schemas.openxmlformats.org/drawingml/2006/main"/>
           <a:p xmlns:a="http://schemas.openxmlformats.org/drawingml/2006/main">
             <a:pPr algn="l">
+              <a:buNone/>
               <a:defRPr sz="1575" b="0">
                 <a:solidFill>
                   <a:srgbClr val="111111"/>
@@ -6080,6 +6394,7 @@
           <a:lstStyle xmlns:a="http://schemas.openxmlformats.org/drawingml/2006/main"/>
           <a:p xmlns:a="http://schemas.openxmlformats.org/drawingml/2006/main">
             <a:pPr algn="l">
+              <a:buNone/>
               <a:defRPr sz="2025" b="1">
                 <a:solidFill>
                   <a:srgbClr val="111111"/>
@@ -6130,6 +6445,7 @@
           <a:lstStyle xmlns:a="http://schemas.openxmlformats.org/drawingml/2006/main"/>
           <a:p xmlns:a="http://schemas.openxmlformats.org/drawingml/2006/main">
             <a:pPr algn="l">
+              <a:buNone/>
               <a:defRPr sz="1575" b="0">
                 <a:solidFill>
                   <a:srgbClr val="111111"/>
@@ -6180,6 +6496,7 @@
           <a:lstStyle xmlns:a="http://schemas.openxmlformats.org/drawingml/2006/main"/>
           <a:p xmlns:a="http://schemas.openxmlformats.org/drawingml/2006/main">
             <a:pPr algn="l">
+              <a:buNone/>
               <a:defRPr sz="1800" b="1">
                 <a:solidFill>
                   <a:srgbClr val="111111"/>
@@ -6230,6 +6547,7 @@
           <a:lstStyle xmlns:a="http://schemas.openxmlformats.org/drawingml/2006/main"/>
           <a:p xmlns:a="http://schemas.openxmlformats.org/drawingml/2006/main">
             <a:pPr algn="l">
+              <a:buNone/>
               <a:defRPr sz="1500" b="0">
                 <a:solidFill>
                   <a:srgbClr val="555555"/>
@@ -6302,6 +6620,7 @@
           <a:lstStyle xmlns:a="http://schemas.openxmlformats.org/drawingml/2006/main"/>
           <a:p xmlns:a="http://schemas.openxmlformats.org/drawingml/2006/main">
             <a:pPr algn="l">
+              <a:buNone/>
               <a:defRPr sz="1050" b="1">
                 <a:solidFill>
                   <a:srgbClr val="555555"/>
@@ -6352,6 +6671,7 @@
           <a:lstStyle xmlns:a="http://schemas.openxmlformats.org/drawingml/2006/main"/>
           <a:p xmlns:a="http://schemas.openxmlformats.org/drawingml/2006/main">
             <a:pPr algn="r">
+              <a:buNone/>
               <a:defRPr sz="1050" b="1">
                 <a:solidFill>
                   <a:srgbClr val="555555"/>
@@ -6402,6 +6722,7 @@
           <a:lstStyle xmlns:a="http://schemas.openxmlformats.org/drawingml/2006/main"/>
           <a:p xmlns:a="http://schemas.openxmlformats.org/drawingml/2006/main">
             <a:pPr algn="l">
+              <a:buNone/>
               <a:defRPr sz="2850" b="1">
                 <a:solidFill>
                   <a:srgbClr val="111111"/>
@@ -6514,6 +6835,7 @@
           <a:lstStyle xmlns:a="http://schemas.openxmlformats.org/drawingml/2006/main"/>
           <a:p xmlns:a="http://schemas.openxmlformats.org/drawingml/2006/main">
             <a:pPr algn="l">
+              <a:buNone/>
               <a:defRPr sz="1650" b="1">
                 <a:solidFill>
                   <a:srgbClr val="FFFFFF"/>
@@ -6564,6 +6886,7 @@
           <a:lstStyle xmlns:a="http://schemas.openxmlformats.org/drawingml/2006/main"/>
           <a:p xmlns:a="http://schemas.openxmlformats.org/drawingml/2006/main">
             <a:pPr algn="l">
+              <a:buNone/>
               <a:defRPr sz="1575" b="1">
                 <a:solidFill>
                   <a:srgbClr val="FFFFFF"/>
@@ -6645,6 +6968,7 @@
           <a:lstStyle xmlns:a="http://schemas.openxmlformats.org/drawingml/2006/main"/>
           <a:p xmlns:a="http://schemas.openxmlformats.org/drawingml/2006/main">
             <a:pPr algn="l">
+              <a:buNone/>
               <a:defRPr sz="1650" b="1">
                 <a:solidFill>
                   <a:srgbClr val="E95D2A"/>
@@ -6695,6 +7019,7 @@
           <a:lstStyle xmlns:a="http://schemas.openxmlformats.org/drawingml/2006/main"/>
           <a:p xmlns:a="http://schemas.openxmlformats.org/drawingml/2006/main">
             <a:pPr algn="l">
+              <a:buNone/>
               <a:defRPr sz="1575" b="1">
                 <a:solidFill>
                   <a:srgbClr val="111111"/>
@@ -6776,6 +7101,7 @@
           <a:lstStyle xmlns:a="http://schemas.openxmlformats.org/drawingml/2006/main"/>
           <a:p xmlns:a="http://schemas.openxmlformats.org/drawingml/2006/main">
             <a:pPr algn="l">
+              <a:buNone/>
               <a:defRPr sz="1650" b="1">
                 <a:solidFill>
                   <a:srgbClr val="E95D2A"/>
@@ -6826,6 +7152,7 @@
           <a:lstStyle xmlns:a="http://schemas.openxmlformats.org/drawingml/2006/main"/>
           <a:p xmlns:a="http://schemas.openxmlformats.org/drawingml/2006/main">
             <a:pPr algn="l">
+              <a:buNone/>
               <a:defRPr sz="1575" b="1">
                 <a:solidFill>
                   <a:srgbClr val="111111"/>
@@ -6907,6 +7234,7 @@
           <a:lstStyle xmlns:a="http://schemas.openxmlformats.org/drawingml/2006/main"/>
           <a:p xmlns:a="http://schemas.openxmlformats.org/drawingml/2006/main">
             <a:pPr algn="l">
+              <a:buNone/>
               <a:defRPr sz="1650" b="1">
                 <a:solidFill>
                   <a:srgbClr val="E95D2A"/>
@@ -6957,6 +7285,7 @@
           <a:lstStyle xmlns:a="http://schemas.openxmlformats.org/drawingml/2006/main"/>
           <a:p xmlns:a="http://schemas.openxmlformats.org/drawingml/2006/main">
             <a:pPr algn="l">
+              <a:buNone/>
               <a:defRPr sz="1575" b="1">
                 <a:solidFill>
                   <a:srgbClr val="111111"/>
@@ -7038,6 +7367,7 @@
           <a:lstStyle xmlns:a="http://schemas.openxmlformats.org/drawingml/2006/main"/>
           <a:p xmlns:a="http://schemas.openxmlformats.org/drawingml/2006/main">
             <a:pPr algn="l">
+              <a:buNone/>
               <a:defRPr sz="1650" b="1">
                 <a:solidFill>
                   <a:srgbClr val="E95D2A"/>
@@ -7088,6 +7418,7 @@
           <a:lstStyle xmlns:a="http://schemas.openxmlformats.org/drawingml/2006/main"/>
           <a:p xmlns:a="http://schemas.openxmlformats.org/drawingml/2006/main">
             <a:pPr algn="l">
+              <a:buNone/>
               <a:defRPr sz="1575" b="1">
                 <a:solidFill>
                   <a:srgbClr val="111111"/>
@@ -7160,6 +7491,7 @@
           <a:lstStyle xmlns:a="http://schemas.openxmlformats.org/drawingml/2006/main"/>
           <a:p xmlns:a="http://schemas.openxmlformats.org/drawingml/2006/main">
             <a:pPr algn="l">
+              <a:buNone/>
               <a:defRPr sz="1050" b="1">
                 <a:solidFill>
                   <a:srgbClr val="555555"/>
@@ -7210,6 +7542,7 @@
           <a:lstStyle xmlns:a="http://schemas.openxmlformats.org/drawingml/2006/main"/>
           <a:p xmlns:a="http://schemas.openxmlformats.org/drawingml/2006/main">
             <a:pPr algn="r">
+              <a:buNone/>
               <a:defRPr sz="1050" b="1">
                 <a:solidFill>
                   <a:srgbClr val="555555"/>
@@ -7260,6 +7593,7 @@
           <a:lstStyle xmlns:a="http://schemas.openxmlformats.org/drawingml/2006/main"/>
           <a:p xmlns:a="http://schemas.openxmlformats.org/drawingml/2006/main">
             <a:pPr algn="l">
+              <a:buNone/>
               <a:defRPr sz="2850" b="1">
                 <a:solidFill>
                   <a:srgbClr val="111111"/>
@@ -7372,6 +7706,7 @@
           <a:lstStyle xmlns:a="http://schemas.openxmlformats.org/drawingml/2006/main"/>
           <a:p xmlns:a="http://schemas.openxmlformats.org/drawingml/2006/main">
             <a:pPr algn="ctr">
+              <a:buNone/>
               <a:defRPr sz="1350" b="1">
                 <a:solidFill>
                   <a:srgbClr val="111111"/>
@@ -7484,6 +7819,7 @@
           <a:lstStyle xmlns:a="http://schemas.openxmlformats.org/drawingml/2006/main"/>
           <a:p xmlns:a="http://schemas.openxmlformats.org/drawingml/2006/main">
             <a:pPr algn="ctr">
+              <a:buNone/>
               <a:defRPr sz="1350" b="1">
                 <a:solidFill>
                   <a:srgbClr val="111111"/>
@@ -7596,6 +7932,7 @@
           <a:lstStyle xmlns:a="http://schemas.openxmlformats.org/drawingml/2006/main"/>
           <a:p xmlns:a="http://schemas.openxmlformats.org/drawingml/2006/main">
             <a:pPr algn="ctr">
+              <a:buNone/>
               <a:defRPr sz="1350" b="1">
                 <a:solidFill>
                   <a:srgbClr val="111111"/>
@@ -7708,6 +8045,7 @@
           <a:lstStyle xmlns:a="http://schemas.openxmlformats.org/drawingml/2006/main"/>
           <a:p xmlns:a="http://schemas.openxmlformats.org/drawingml/2006/main">
             <a:pPr algn="ctr">
+              <a:buNone/>
               <a:defRPr sz="1350" b="1">
                 <a:solidFill>
                   <a:srgbClr val="111111"/>
@@ -7820,6 +8158,7 @@
           <a:lstStyle xmlns:a="http://schemas.openxmlformats.org/drawingml/2006/main"/>
           <a:p xmlns:a="http://schemas.openxmlformats.org/drawingml/2006/main">
             <a:pPr algn="ctr">
+              <a:buNone/>
               <a:defRPr sz="1350" b="1">
                 <a:solidFill>
                   <a:srgbClr val="111111"/>
@@ -7932,6 +8271,7 @@
           <a:lstStyle xmlns:a="http://schemas.openxmlformats.org/drawingml/2006/main"/>
           <a:p xmlns:a="http://schemas.openxmlformats.org/drawingml/2006/main">
             <a:pPr algn="ctr">
+              <a:buNone/>
               <a:defRPr sz="1350" b="1">
                 <a:solidFill>
                   <a:srgbClr val="111111"/>
@@ -8044,6 +8384,7 @@
           <a:lstStyle xmlns:a="http://schemas.openxmlformats.org/drawingml/2006/main"/>
           <a:p xmlns:a="http://schemas.openxmlformats.org/drawingml/2006/main">
             <a:pPr algn="ctr">
+              <a:buNone/>
               <a:defRPr sz="1350" b="1">
                 <a:solidFill>
                   <a:srgbClr val="FFFFFF"/>
@@ -8156,6 +8497,7 @@
           <a:lstStyle xmlns:a="http://schemas.openxmlformats.org/drawingml/2006/main"/>
           <a:p xmlns:a="http://schemas.openxmlformats.org/drawingml/2006/main">
             <a:pPr algn="ctr">
+              <a:buNone/>
               <a:defRPr sz="1350" b="1">
                 <a:solidFill>
                   <a:srgbClr val="111111"/>
@@ -8268,6 +8610,7 @@
           <a:lstStyle xmlns:a="http://schemas.openxmlformats.org/drawingml/2006/main"/>
           <a:p xmlns:a="http://schemas.openxmlformats.org/drawingml/2006/main">
             <a:pPr algn="ctr">
+              <a:buNone/>
               <a:defRPr sz="1350" b="1">
                 <a:solidFill>
                   <a:srgbClr val="111111"/>
@@ -8318,6 +8661,7 @@
           <a:lstStyle xmlns:a="http://schemas.openxmlformats.org/drawingml/2006/main"/>
           <a:p xmlns:a="http://schemas.openxmlformats.org/drawingml/2006/main">
             <a:pPr algn="l">
+              <a:buNone/>
               <a:defRPr sz="1800" b="1">
                 <a:solidFill>
                   <a:srgbClr val="111111"/>
@@ -8368,6 +8712,7 @@
           <a:lstStyle xmlns:a="http://schemas.openxmlformats.org/drawingml/2006/main"/>
           <a:p xmlns:a="http://schemas.openxmlformats.org/drawingml/2006/main">
             <a:pPr algn="l">
+              <a:buNone/>
               <a:defRPr sz="1650" b="0">
                 <a:solidFill>
                   <a:srgbClr val="111111"/>
@@ -8418,6 +8763,7 @@
           <a:lstStyle xmlns:a="http://schemas.openxmlformats.org/drawingml/2006/main"/>
           <a:p xmlns:a="http://schemas.openxmlformats.org/drawingml/2006/main">
             <a:pPr algn="l">
+              <a:buNone/>
               <a:defRPr sz="1800" b="1">
                 <a:solidFill>
                   <a:srgbClr val="111111"/>
@@ -8468,6 +8814,7 @@
           <a:lstStyle xmlns:a="http://schemas.openxmlformats.org/drawingml/2006/main"/>
           <a:p xmlns:a="http://schemas.openxmlformats.org/drawingml/2006/main">
             <a:pPr algn="l">
+              <a:buNone/>
               <a:defRPr sz="1650" b="0">
                 <a:solidFill>
                   <a:srgbClr val="111111"/>
@@ -8518,6 +8865,7 @@
           <a:lstStyle xmlns:a="http://schemas.openxmlformats.org/drawingml/2006/main"/>
           <a:p xmlns:a="http://schemas.openxmlformats.org/drawingml/2006/main">
             <a:pPr algn="l">
+              <a:buNone/>
               <a:defRPr sz="1200" b="0">
                 <a:solidFill>
                   <a:srgbClr val="555555"/>
@@ -8590,6 +8938,7 @@
           <a:lstStyle xmlns:a="http://schemas.openxmlformats.org/drawingml/2006/main"/>
           <a:p xmlns:a="http://schemas.openxmlformats.org/drawingml/2006/main">
             <a:pPr algn="l">
+              <a:buNone/>
               <a:defRPr sz="1050" b="1">
                 <a:solidFill>
                   <a:srgbClr val="555555"/>
@@ -8640,6 +8989,7 @@
           <a:lstStyle xmlns:a="http://schemas.openxmlformats.org/drawingml/2006/main"/>
           <a:p xmlns:a="http://schemas.openxmlformats.org/drawingml/2006/main">
             <a:pPr algn="r">
+              <a:buNone/>
               <a:defRPr sz="1050" b="1">
                 <a:solidFill>
                   <a:srgbClr val="555555"/>
@@ -8690,6 +9040,7 @@
           <a:lstStyle xmlns:a="http://schemas.openxmlformats.org/drawingml/2006/main"/>
           <a:p xmlns:a="http://schemas.openxmlformats.org/drawingml/2006/main">
             <a:pPr algn="l">
+              <a:buNone/>
               <a:defRPr sz="2850" b="1">
                 <a:solidFill>
                   <a:srgbClr val="111111"/>
@@ -8771,6 +9122,7 @@
           <a:lstStyle xmlns:a="http://schemas.openxmlformats.org/drawingml/2006/main"/>
           <a:p xmlns:a="http://schemas.openxmlformats.org/drawingml/2006/main">
             <a:pPr algn="l">
+              <a:buNone/>
               <a:defRPr sz="1650" b="1">
                 <a:solidFill>
                   <a:srgbClr val="111111"/>
@@ -8852,6 +9204,7 @@
           <a:lstStyle xmlns:a="http://schemas.openxmlformats.org/drawingml/2006/main"/>
           <a:p xmlns:a="http://schemas.openxmlformats.org/drawingml/2006/main">
             <a:pPr algn="l">
+              <a:buNone/>
               <a:defRPr sz="1875" b="0">
                 <a:solidFill>
                   <a:srgbClr val="111111"/>
@@ -8902,6 +9255,7 @@
           <a:lstStyle xmlns:a="http://schemas.openxmlformats.org/drawingml/2006/main"/>
           <a:p xmlns:a="http://schemas.openxmlformats.org/drawingml/2006/main">
             <a:pPr algn="l">
+              <a:buNone/>
               <a:defRPr sz="1650" b="1">
                 <a:solidFill>
                   <a:srgbClr val="111111"/>
@@ -8983,6 +9337,7 @@
           <a:lstStyle xmlns:a="http://schemas.openxmlformats.org/drawingml/2006/main"/>
           <a:p xmlns:a="http://schemas.openxmlformats.org/drawingml/2006/main">
             <a:pPr algn="l">
+              <a:buNone/>
               <a:defRPr sz="1875" b="0">
                 <a:solidFill>
                   <a:srgbClr val="111111"/>
@@ -9033,6 +9388,7 @@
           <a:lstStyle xmlns:a="http://schemas.openxmlformats.org/drawingml/2006/main"/>
           <a:p xmlns:a="http://schemas.openxmlformats.org/drawingml/2006/main">
             <a:pPr algn="l">
+              <a:buNone/>
               <a:defRPr sz="1650" b="1">
                 <a:solidFill>
                   <a:srgbClr val="E95D2A"/>
@@ -9114,6 +9470,7 @@
           <a:lstStyle xmlns:a="http://schemas.openxmlformats.org/drawingml/2006/main"/>
           <a:p xmlns:a="http://schemas.openxmlformats.org/drawingml/2006/main">
             <a:pPr algn="l">
+              <a:buNone/>
               <a:defRPr sz="1875" b="0">
                 <a:solidFill>
                   <a:srgbClr val="111111"/>
@@ -9164,6 +9521,7 @@
           <a:lstStyle xmlns:a="http://schemas.openxmlformats.org/drawingml/2006/main"/>
           <a:p xmlns:a="http://schemas.openxmlformats.org/drawingml/2006/main">
             <a:pPr algn="l">
+              <a:buNone/>
               <a:defRPr sz="1650" b="1">
                 <a:solidFill>
                   <a:srgbClr val="111111"/>
@@ -9245,6 +9603,7 @@
           <a:lstStyle xmlns:a="http://schemas.openxmlformats.org/drawingml/2006/main"/>
           <a:p xmlns:a="http://schemas.openxmlformats.org/drawingml/2006/main">
             <a:pPr algn="l">
+              <a:buNone/>
               <a:defRPr sz="1875" b="0">
                 <a:solidFill>
                   <a:srgbClr val="111111"/>
@@ -9326,6 +9685,7 @@
           <a:lstStyle xmlns:a="http://schemas.openxmlformats.org/drawingml/2006/main"/>
           <a:p xmlns:a="http://schemas.openxmlformats.org/drawingml/2006/main">
             <a:pPr algn="ctr">
+              <a:buNone/>
               <a:defRPr sz="1275" b="1">
                 <a:solidFill>
                   <a:srgbClr val="E95D2A"/>
@@ -9398,6 +9758,7 @@
           <a:lstStyle xmlns:a="http://schemas.openxmlformats.org/drawingml/2006/main"/>
           <a:p xmlns:a="http://schemas.openxmlformats.org/drawingml/2006/main">
             <a:pPr algn="l">
+              <a:buNone/>
               <a:defRPr sz="1050" b="1">
                 <a:solidFill>
                   <a:srgbClr val="555555"/>
@@ -9448,6 +9809,7 @@
           <a:lstStyle xmlns:a="http://schemas.openxmlformats.org/drawingml/2006/main"/>
           <a:p xmlns:a="http://schemas.openxmlformats.org/drawingml/2006/main">
             <a:pPr algn="r">
+              <a:buNone/>
               <a:defRPr sz="1050" b="1">
                 <a:solidFill>
                   <a:srgbClr val="555555"/>
@@ -9498,6 +9860,7 @@
           <a:lstStyle xmlns:a="http://schemas.openxmlformats.org/drawingml/2006/main"/>
           <a:p xmlns:a="http://schemas.openxmlformats.org/drawingml/2006/main">
             <a:pPr algn="l">
+              <a:buNone/>
               <a:defRPr sz="2850" b="1">
                 <a:solidFill>
                   <a:srgbClr val="111111"/>
@@ -9579,6 +9942,7 @@
           <a:lstStyle xmlns:a="http://schemas.openxmlformats.org/drawingml/2006/main"/>
           <a:p xmlns:a="http://schemas.openxmlformats.org/drawingml/2006/main">
             <a:pPr algn="l">
+              <a:buNone/>
               <a:defRPr sz="4125" b="1">
                 <a:solidFill>
                   <a:srgbClr val="111111"/>
@@ -9660,6 +10024,7 @@
           <a:lstStyle xmlns:a="http://schemas.openxmlformats.org/drawingml/2006/main"/>
           <a:p xmlns:a="http://schemas.openxmlformats.org/drawingml/2006/main">
             <a:pPr algn="l">
+              <a:buNone/>
               <a:defRPr sz="1800" b="1">
                 <a:solidFill>
                   <a:srgbClr val="111111"/>
@@ -9710,6 +10075,7 @@
           <a:lstStyle xmlns:a="http://schemas.openxmlformats.org/drawingml/2006/main"/>
           <a:p xmlns:a="http://schemas.openxmlformats.org/drawingml/2006/main">
             <a:pPr algn="l">
+              <a:buNone/>
               <a:defRPr sz="1425" b="0">
                 <a:solidFill>
                   <a:srgbClr val="555555"/>
@@ -9760,6 +10126,7 @@
           <a:lstStyle xmlns:a="http://schemas.openxmlformats.org/drawingml/2006/main"/>
           <a:p xmlns:a="http://schemas.openxmlformats.org/drawingml/2006/main">
             <a:pPr algn="l">
+              <a:buNone/>
               <a:defRPr sz="4125" b="1">
                 <a:solidFill>
                   <a:srgbClr val="E95D2A"/>
@@ -9841,6 +10208,7 @@
           <a:lstStyle xmlns:a="http://schemas.openxmlformats.org/drawingml/2006/main"/>
           <a:p xmlns:a="http://schemas.openxmlformats.org/drawingml/2006/main">
             <a:pPr algn="l">
+              <a:buNone/>
               <a:defRPr sz="1800" b="1">
                 <a:solidFill>
                   <a:srgbClr val="111111"/>
@@ -9891,6 +10259,7 @@
           <a:lstStyle xmlns:a="http://schemas.openxmlformats.org/drawingml/2006/main"/>
           <a:p xmlns:a="http://schemas.openxmlformats.org/drawingml/2006/main">
             <a:pPr algn="l">
+              <a:buNone/>
               <a:defRPr sz="1425" b="0">
                 <a:solidFill>
                   <a:srgbClr val="555555"/>
@@ -9941,6 +10310,7 @@
           <a:lstStyle xmlns:a="http://schemas.openxmlformats.org/drawingml/2006/main"/>
           <a:p xmlns:a="http://schemas.openxmlformats.org/drawingml/2006/main">
             <a:pPr algn="l">
+              <a:buNone/>
               <a:defRPr sz="4125" b="1">
                 <a:solidFill>
                   <a:srgbClr val="111111"/>
@@ -10022,6 +10392,7 @@
           <a:lstStyle xmlns:a="http://schemas.openxmlformats.org/drawingml/2006/main"/>
           <a:p xmlns:a="http://schemas.openxmlformats.org/drawingml/2006/main">
             <a:pPr algn="l">
+              <a:buNone/>
               <a:defRPr sz="1800" b="1">
                 <a:solidFill>
                   <a:srgbClr val="111111"/>
@@ -10072,6 +10443,7 @@
           <a:lstStyle xmlns:a="http://schemas.openxmlformats.org/drawingml/2006/main"/>
           <a:p xmlns:a="http://schemas.openxmlformats.org/drawingml/2006/main">
             <a:pPr algn="l">
+              <a:buNone/>
               <a:defRPr sz="1425" b="0">
                 <a:solidFill>
                   <a:srgbClr val="555555"/>
@@ -10122,6 +10494,7 @@
           <a:lstStyle xmlns:a="http://schemas.openxmlformats.org/drawingml/2006/main"/>
           <a:p xmlns:a="http://schemas.openxmlformats.org/drawingml/2006/main">
             <a:pPr algn="l">
+              <a:buNone/>
               <a:defRPr sz="4125" b="1">
                 <a:solidFill>
                   <a:srgbClr val="111111"/>
@@ -10203,6 +10576,7 @@
           <a:lstStyle xmlns:a="http://schemas.openxmlformats.org/drawingml/2006/main"/>
           <a:p xmlns:a="http://schemas.openxmlformats.org/drawingml/2006/main">
             <a:pPr algn="l">
+              <a:buNone/>
               <a:defRPr sz="1800" b="1">
                 <a:solidFill>
                   <a:srgbClr val="111111"/>
@@ -10253,6 +10627,7 @@
           <a:lstStyle xmlns:a="http://schemas.openxmlformats.org/drawingml/2006/main"/>
           <a:p xmlns:a="http://schemas.openxmlformats.org/drawingml/2006/main">
             <a:pPr algn="l">
+              <a:buNone/>
               <a:defRPr sz="1425" b="0">
                 <a:solidFill>
                   <a:srgbClr val="555555"/>
@@ -10303,6 +10678,7 @@
           <a:lstStyle xmlns:a="http://schemas.openxmlformats.org/drawingml/2006/main"/>
           <a:p xmlns:a="http://schemas.openxmlformats.org/drawingml/2006/main">
             <a:pPr algn="ctr">
+              <a:buNone/>
               <a:defRPr sz="2025" b="1">
                 <a:solidFill>
                   <a:srgbClr val="111111"/>
@@ -10324,6 +10700,3064 @@
     <p:extLst>
       <p:ext uri="{BB962C8B-B14F-4D97-AF65-F5344CB8AC3E}">
         <p14:creationId xmlns:p14="http://schemas.microsoft.com/office/powerpoint/2010/main" val="1621777217"/>
+      </p:ext>
+    </p:extLst>
+  </p:cSld>
+</p:sld>
+</file>
+
+<file path=ppt/slides/slide18.xml><?xml version="1.0" encoding="utf-8"?>
+<p:sld xmlns:p="http://schemas.openxmlformats.org/presentationml/2006/main">
+  <p:cSld>
+    <p:bg>
+      <p:bgPr>
+        <a:solidFill xmlns:a="http://schemas.openxmlformats.org/drawingml/2006/main">
+          <a:srgbClr val="F8FAFC"/>
+        </a:solidFill>
+      </p:bgPr>
+    </p:bg>
+    <p:spTree>
+      <p:nvGrpSpPr>
+        <p:cNvPr id="1" name=""/>
+        <p:cNvGrpSpPr/>
+        <p:nvPr/>
+      </p:nvGrpSpPr>
+      <p:grpSpPr>
+        <a:xfrm xmlns:a="http://schemas.openxmlformats.org/drawingml/2006/main"/>
+      </p:grpSpPr>
+      <p:sp>
+        <p:nvSpPr>
+          <p:cNvPr id="1" name="">
+            <a:extLst xmlns:a="http://schemas.openxmlformats.org/drawingml/2006/main">
+              <a:ext uri="{FF2B5EF4-FFF2-40B4-BE49-F238E27FC236}">
+                <a16:creationId xmlns:a16="http://schemas.microsoft.com/office/drawing/2014/main" id="{1515EBC3-DD51-4314-969D-B72A59710471}"/>
+              </a:ext>
+            </a:extLst>
+          </p:cNvPr>
+          <p:cNvSpPr>
+            <a:spLocks xmlns:a="http://schemas.openxmlformats.org/drawingml/2006/main" noGrp="1"/>
+          </p:cNvSpPr>
+          <p:nvPr/>
+        </p:nvSpPr>
+        <p:spPr>
+          <a:xfrm xmlns:a="http://schemas.openxmlformats.org/drawingml/2006/main">
+            <a:off x="685800" y="419100"/>
+            <a:ext cx="1714500" cy="228600"/>
+          </a:xfrm>
+          <a:prstGeom xmlns:a="http://schemas.openxmlformats.org/drawingml/2006/main" prst="rect">
+            <a:avLst/>
+          </a:prstGeom>
+          <a:noFill xmlns:a="http://schemas.openxmlformats.org/drawingml/2006/main"/>
+          <a:ln xmlns:a="http://schemas.openxmlformats.org/drawingml/2006/main" w="0">
+            <a:noFill/>
+            <a:prstDash val="solid"/>
+          </a:ln>
+        </p:spPr>
+        <p:txBody>
+          <a:bodyPr xmlns:a="http://schemas.openxmlformats.org/drawingml/2006/main"/>
+          <a:lstStyle xmlns:a="http://schemas.openxmlformats.org/drawingml/2006/main"/>
+          <a:p xmlns:a="http://schemas.openxmlformats.org/drawingml/2006/main">
+            <a:pPr algn="l">
+              <a:defRPr sz="975" b="1">
+                <a:solidFill>
+                  <a:srgbClr val="00786F"/>
+                </a:solidFill>
+              </a:defRPr>
+            </a:pPr>
+            <a:r>
+              <a:rPr sz="975" b="1">
+                <a:solidFill>
+                  <a:srgbClr val="00786F"/>
+                </a:solidFill>
+              </a:rPr>
+              <a:t>APPENDIX</a:t>
+            </a:r>
+          </a:p>
+        </p:txBody>
+      </p:sp>
+      <p:sp>
+        <p:nvSpPr>
+          <p:cNvPr id="2" name="">
+            <a:extLst xmlns:a="http://schemas.openxmlformats.org/drawingml/2006/main">
+              <a:ext uri="{FF2B5EF4-FFF2-40B4-BE49-F238E27FC236}">
+                <a16:creationId xmlns:a16="http://schemas.microsoft.com/office/drawing/2014/main" id="{AF1A54F6-6B17-43C5-B217-EDBE7029D316}"/>
+              </a:ext>
+            </a:extLst>
+          </p:cNvPr>
+          <p:cNvSpPr>
+            <a:spLocks xmlns:a="http://schemas.openxmlformats.org/drawingml/2006/main" noGrp="1"/>
+          </p:cNvSpPr>
+          <p:nvPr/>
+        </p:nvSpPr>
+        <p:spPr>
+          <a:xfrm xmlns:a="http://schemas.openxmlformats.org/drawingml/2006/main">
+            <a:off x="685800" y="742950"/>
+            <a:ext cx="8572500" cy="514350"/>
+          </a:xfrm>
+          <a:prstGeom xmlns:a="http://schemas.openxmlformats.org/drawingml/2006/main" prst="rect">
+            <a:avLst/>
+          </a:prstGeom>
+          <a:noFill xmlns:a="http://schemas.openxmlformats.org/drawingml/2006/main"/>
+          <a:ln xmlns:a="http://schemas.openxmlformats.org/drawingml/2006/main" w="0">
+            <a:noFill/>
+            <a:prstDash val="solid"/>
+          </a:ln>
+        </p:spPr>
+        <p:txBody>
+          <a:bodyPr xmlns:a="http://schemas.openxmlformats.org/drawingml/2006/main"/>
+          <a:lstStyle xmlns:a="http://schemas.openxmlformats.org/drawingml/2006/main"/>
+          <a:p xmlns:a="http://schemas.openxmlformats.org/drawingml/2006/main">
+            <a:pPr algn="l">
+              <a:defRPr sz="2550" b="1">
+                <a:solidFill>
+                  <a:srgbClr val="020618"/>
+                </a:solidFill>
+              </a:defRPr>
+            </a:pPr>
+            <a:r>
+              <a:rPr sz="2550" b="1">
+                <a:solidFill>
+                  <a:srgbClr val="020618"/>
+                </a:solidFill>
+              </a:rPr>
+              <a:t>Panel backup: safe statistics</a:t>
+            </a:r>
+          </a:p>
+        </p:txBody>
+      </p:sp>
+      <p:sp>
+        <p:nvSpPr>
+          <p:cNvPr id="3" name="">
+            <a:extLst xmlns:a="http://schemas.openxmlformats.org/drawingml/2006/main">
+              <a:ext uri="{FF2B5EF4-FFF2-40B4-BE49-F238E27FC236}">
+                <a16:creationId xmlns:a16="http://schemas.microsoft.com/office/drawing/2014/main" id="{E024E760-672C-47A7-8BBA-9323C9B3B028}"/>
+              </a:ext>
+            </a:extLst>
+          </p:cNvPr>
+          <p:cNvSpPr>
+            <a:spLocks xmlns:a="http://schemas.openxmlformats.org/drawingml/2006/main" noGrp="1"/>
+          </p:cNvSpPr>
+          <p:nvPr/>
+        </p:nvSpPr>
+        <p:spPr>
+          <a:xfrm xmlns:a="http://schemas.openxmlformats.org/drawingml/2006/main">
+            <a:off x="685800" y="1238250"/>
+            <a:ext cx="9048750" cy="400050"/>
+          </a:xfrm>
+          <a:prstGeom xmlns:a="http://schemas.openxmlformats.org/drawingml/2006/main" prst="rect">
+            <a:avLst/>
+          </a:prstGeom>
+          <a:noFill xmlns:a="http://schemas.openxmlformats.org/drawingml/2006/main"/>
+          <a:ln xmlns:a="http://schemas.openxmlformats.org/drawingml/2006/main" w="0">
+            <a:noFill/>
+            <a:prstDash val="solid"/>
+          </a:ln>
+        </p:spPr>
+        <p:txBody>
+          <a:bodyPr xmlns:a="http://schemas.openxmlformats.org/drawingml/2006/main"/>
+          <a:lstStyle xmlns:a="http://schemas.openxmlformats.org/drawingml/2006/main"/>
+          <a:p xmlns:a="http://schemas.openxmlformats.org/drawingml/2006/main">
+            <a:pPr algn="l">
+              <a:defRPr sz="1350" b="0">
+                <a:solidFill>
+                  <a:srgbClr val="45556C"/>
+                </a:solidFill>
+              </a:defRPr>
+            </a:pPr>
+            <a:r>
+              <a:rPr sz="1350" b="0">
+                <a:solidFill>
+                  <a:srgbClr val="45556C"/>
+                </a:solidFill>
+              </a:rPr>
+              <a:t>Use these only with the definition and source. Do not mix denominators.</a:t>
+            </a:r>
+          </a:p>
+        </p:txBody>
+      </p:sp>
+      <p:sp>
+        <p:nvSpPr>
+          <p:cNvPr id="4" name="">
+            <a:extLst xmlns:a="http://schemas.openxmlformats.org/drawingml/2006/main">
+              <a:ext uri="{FF2B5EF4-FFF2-40B4-BE49-F238E27FC236}">
+                <a16:creationId xmlns:a16="http://schemas.microsoft.com/office/drawing/2014/main" id="{67655174-F02D-4943-8766-F3DF070E6F68}"/>
+              </a:ext>
+            </a:extLst>
+          </p:cNvPr>
+          <p:cNvSpPr>
+            <a:spLocks xmlns:a="http://schemas.openxmlformats.org/drawingml/2006/main" noGrp="1"/>
+          </p:cNvSpPr>
+          <p:nvPr/>
+        </p:nvSpPr>
+        <p:spPr>
+          <a:xfrm xmlns:a="http://schemas.openxmlformats.org/drawingml/2006/main">
+            <a:off x="685800" y="1809750"/>
+            <a:ext cx="3429000" cy="381000"/>
+          </a:xfrm>
+          <a:prstGeom xmlns:a="http://schemas.openxmlformats.org/drawingml/2006/main" prst="roundRect">
+            <a:avLst>
+              <a:gd name="adj" fmla="val 20000"/>
+            </a:avLst>
+          </a:prstGeom>
+          <a:solidFill xmlns:a="http://schemas.openxmlformats.org/drawingml/2006/main">
+            <a:srgbClr val="00786F"/>
+          </a:solidFill>
+          <a:ln xmlns:a="http://schemas.openxmlformats.org/drawingml/2006/main" w="9525">
+            <a:solidFill>
+              <a:srgbClr val="00786F"/>
+            </a:solidFill>
+            <a:prstDash val="solid"/>
+          </a:ln>
+        </p:spPr>
+      </p:sp>
+      <p:sp>
+        <p:nvSpPr>
+          <p:cNvPr id="5" name="">
+            <a:extLst xmlns:a="http://schemas.openxmlformats.org/drawingml/2006/main">
+              <a:ext uri="{FF2B5EF4-FFF2-40B4-BE49-F238E27FC236}">
+                <a16:creationId xmlns:a16="http://schemas.microsoft.com/office/drawing/2014/main" id="{37E965FC-39E7-4985-B1AF-0A6DE0DEACE8}"/>
+              </a:ext>
+            </a:extLst>
+          </p:cNvPr>
+          <p:cNvSpPr>
+            <a:spLocks xmlns:a="http://schemas.openxmlformats.org/drawingml/2006/main" noGrp="1"/>
+          </p:cNvSpPr>
+          <p:nvPr/>
+        </p:nvSpPr>
+        <p:spPr>
+          <a:xfrm xmlns:a="http://schemas.openxmlformats.org/drawingml/2006/main">
+            <a:off x="781050" y="1885950"/>
+            <a:ext cx="3238500" cy="228600"/>
+          </a:xfrm>
+          <a:prstGeom xmlns:a="http://schemas.openxmlformats.org/drawingml/2006/main" prst="rect">
+            <a:avLst/>
+          </a:prstGeom>
+          <a:noFill xmlns:a="http://schemas.openxmlformats.org/drawingml/2006/main"/>
+          <a:ln xmlns:a="http://schemas.openxmlformats.org/drawingml/2006/main" w="0">
+            <a:noFill/>
+            <a:prstDash val="solid"/>
+          </a:ln>
+        </p:spPr>
+        <p:txBody>
+          <a:bodyPr xmlns:a="http://schemas.openxmlformats.org/drawingml/2006/main"/>
+          <a:lstStyle xmlns:a="http://schemas.openxmlformats.org/drawingml/2006/main"/>
+          <a:p xmlns:a="http://schemas.openxmlformats.org/drawingml/2006/main">
+            <a:pPr algn="l">
+              <a:defRPr sz="1050" b="1">
+                <a:solidFill>
+                  <a:srgbClr val="FFFFFF"/>
+                </a:solidFill>
+              </a:defRPr>
+            </a:pPr>
+            <a:r>
+              <a:rPr sz="1050" b="1">
+                <a:solidFill>
+                  <a:srgbClr val="FFFFFF"/>
+                </a:solidFill>
+              </a:rPr>
+              <a:t>Statistic</a:t>
+            </a:r>
+          </a:p>
+        </p:txBody>
+      </p:sp>
+      <p:sp>
+        <p:nvSpPr>
+          <p:cNvPr id="6" name="">
+            <a:extLst xmlns:a="http://schemas.openxmlformats.org/drawingml/2006/main">
+              <a:ext uri="{FF2B5EF4-FFF2-40B4-BE49-F238E27FC236}">
+                <a16:creationId xmlns:a16="http://schemas.microsoft.com/office/drawing/2014/main" id="{94185404-B4CA-4315-B3B2-3C0EA71A1658}"/>
+              </a:ext>
+            </a:extLst>
+          </p:cNvPr>
+          <p:cNvSpPr>
+            <a:spLocks xmlns:a="http://schemas.openxmlformats.org/drawingml/2006/main" noGrp="1"/>
+          </p:cNvSpPr>
+          <p:nvPr/>
+        </p:nvSpPr>
+        <p:spPr>
+          <a:xfrm xmlns:a="http://schemas.openxmlformats.org/drawingml/2006/main">
+            <a:off x="4114800" y="1809750"/>
+            <a:ext cx="2857500" cy="381000"/>
+          </a:xfrm>
+          <a:prstGeom xmlns:a="http://schemas.openxmlformats.org/drawingml/2006/main" prst="roundRect">
+            <a:avLst>
+              <a:gd name="adj" fmla="val 20000"/>
+            </a:avLst>
+          </a:prstGeom>
+          <a:solidFill xmlns:a="http://schemas.openxmlformats.org/drawingml/2006/main">
+            <a:srgbClr val="00786F"/>
+          </a:solidFill>
+          <a:ln xmlns:a="http://schemas.openxmlformats.org/drawingml/2006/main" w="9525">
+            <a:solidFill>
+              <a:srgbClr val="00786F"/>
+            </a:solidFill>
+            <a:prstDash val="solid"/>
+          </a:ln>
+        </p:spPr>
+      </p:sp>
+      <p:sp>
+        <p:nvSpPr>
+          <p:cNvPr id="7" name="">
+            <a:extLst xmlns:a="http://schemas.openxmlformats.org/drawingml/2006/main">
+              <a:ext uri="{FF2B5EF4-FFF2-40B4-BE49-F238E27FC236}">
+                <a16:creationId xmlns:a16="http://schemas.microsoft.com/office/drawing/2014/main" id="{89E84D7B-6BC4-4679-8E59-84D811B93009}"/>
+              </a:ext>
+            </a:extLst>
+          </p:cNvPr>
+          <p:cNvSpPr>
+            <a:spLocks xmlns:a="http://schemas.openxmlformats.org/drawingml/2006/main" noGrp="1"/>
+          </p:cNvSpPr>
+          <p:nvPr/>
+        </p:nvSpPr>
+        <p:spPr>
+          <a:xfrm xmlns:a="http://schemas.openxmlformats.org/drawingml/2006/main">
+            <a:off x="4210050" y="1885950"/>
+            <a:ext cx="2667000" cy="228600"/>
+          </a:xfrm>
+          <a:prstGeom xmlns:a="http://schemas.openxmlformats.org/drawingml/2006/main" prst="rect">
+            <a:avLst/>
+          </a:prstGeom>
+          <a:noFill xmlns:a="http://schemas.openxmlformats.org/drawingml/2006/main"/>
+          <a:ln xmlns:a="http://schemas.openxmlformats.org/drawingml/2006/main" w="0">
+            <a:noFill/>
+            <a:prstDash val="solid"/>
+          </a:ln>
+        </p:spPr>
+        <p:txBody>
+          <a:bodyPr xmlns:a="http://schemas.openxmlformats.org/drawingml/2006/main"/>
+          <a:lstStyle xmlns:a="http://schemas.openxmlformats.org/drawingml/2006/main"/>
+          <a:p xmlns:a="http://schemas.openxmlformats.org/drawingml/2006/main">
+            <a:pPr algn="l">
+              <a:defRPr sz="1050" b="1">
+                <a:solidFill>
+                  <a:srgbClr val="FFFFFF"/>
+                </a:solidFill>
+              </a:defRPr>
+            </a:pPr>
+            <a:r>
+              <a:rPr sz="1050" b="1">
+                <a:solidFill>
+                  <a:srgbClr val="FFFFFF"/>
+                </a:solidFill>
+              </a:rPr>
+              <a:t>Value</a:t>
+            </a:r>
+          </a:p>
+        </p:txBody>
+      </p:sp>
+      <p:sp>
+        <p:nvSpPr>
+          <p:cNvPr id="8" name="">
+            <a:extLst xmlns:a="http://schemas.openxmlformats.org/drawingml/2006/main">
+              <a:ext uri="{FF2B5EF4-FFF2-40B4-BE49-F238E27FC236}">
+                <a16:creationId xmlns:a16="http://schemas.microsoft.com/office/drawing/2014/main" id="{963ED684-0086-473C-B5B6-3A81E9E5C821}"/>
+              </a:ext>
+            </a:extLst>
+          </p:cNvPr>
+          <p:cNvSpPr>
+            <a:spLocks xmlns:a="http://schemas.openxmlformats.org/drawingml/2006/main" noGrp="1"/>
+          </p:cNvSpPr>
+          <p:nvPr/>
+        </p:nvSpPr>
+        <p:spPr>
+          <a:xfrm xmlns:a="http://schemas.openxmlformats.org/drawingml/2006/main">
+            <a:off x="6972300" y="1809750"/>
+            <a:ext cx="4533900" cy="381000"/>
+          </a:xfrm>
+          <a:prstGeom xmlns:a="http://schemas.openxmlformats.org/drawingml/2006/main" prst="roundRect">
+            <a:avLst>
+              <a:gd name="adj" fmla="val 20000"/>
+            </a:avLst>
+          </a:prstGeom>
+          <a:solidFill xmlns:a="http://schemas.openxmlformats.org/drawingml/2006/main">
+            <a:srgbClr val="00786F"/>
+          </a:solidFill>
+          <a:ln xmlns:a="http://schemas.openxmlformats.org/drawingml/2006/main" w="9525">
+            <a:solidFill>
+              <a:srgbClr val="00786F"/>
+            </a:solidFill>
+            <a:prstDash val="solid"/>
+          </a:ln>
+        </p:spPr>
+      </p:sp>
+      <p:sp>
+        <p:nvSpPr>
+          <p:cNvPr id="9" name="">
+            <a:extLst xmlns:a="http://schemas.openxmlformats.org/drawingml/2006/main">
+              <a:ext uri="{FF2B5EF4-FFF2-40B4-BE49-F238E27FC236}">
+                <a16:creationId xmlns:a16="http://schemas.microsoft.com/office/drawing/2014/main" id="{F221D51A-FE88-4809-80BB-0060AECE630A}"/>
+              </a:ext>
+            </a:extLst>
+          </p:cNvPr>
+          <p:cNvSpPr>
+            <a:spLocks xmlns:a="http://schemas.openxmlformats.org/drawingml/2006/main" noGrp="1"/>
+          </p:cNvSpPr>
+          <p:nvPr/>
+        </p:nvSpPr>
+        <p:spPr>
+          <a:xfrm xmlns:a="http://schemas.openxmlformats.org/drawingml/2006/main">
+            <a:off x="7067550" y="1885950"/>
+            <a:ext cx="4343400" cy="228600"/>
+          </a:xfrm>
+          <a:prstGeom xmlns:a="http://schemas.openxmlformats.org/drawingml/2006/main" prst="rect">
+            <a:avLst/>
+          </a:prstGeom>
+          <a:noFill xmlns:a="http://schemas.openxmlformats.org/drawingml/2006/main"/>
+          <a:ln xmlns:a="http://schemas.openxmlformats.org/drawingml/2006/main" w="0">
+            <a:noFill/>
+            <a:prstDash val="solid"/>
+          </a:ln>
+        </p:spPr>
+        <p:txBody>
+          <a:bodyPr xmlns:a="http://schemas.openxmlformats.org/drawingml/2006/main"/>
+          <a:lstStyle xmlns:a="http://schemas.openxmlformats.org/drawingml/2006/main"/>
+          <a:p xmlns:a="http://schemas.openxmlformats.org/drawingml/2006/main">
+            <a:pPr algn="l">
+              <a:defRPr sz="1050" b="1">
+                <a:solidFill>
+                  <a:srgbClr val="FFFFFF"/>
+                </a:solidFill>
+              </a:defRPr>
+            </a:pPr>
+            <a:r>
+              <a:rPr sz="1050" b="1">
+                <a:solidFill>
+                  <a:srgbClr val="FFFFFF"/>
+                </a:solidFill>
+              </a:rPr>
+              <a:t>Use</a:t>
+            </a:r>
+          </a:p>
+        </p:txBody>
+      </p:sp>
+      <p:sp>
+        <p:nvSpPr>
+          <p:cNvPr id="10" name="">
+            <a:extLst xmlns:a="http://schemas.openxmlformats.org/drawingml/2006/main">
+              <a:ext uri="{FF2B5EF4-FFF2-40B4-BE49-F238E27FC236}">
+                <a16:creationId xmlns:a16="http://schemas.microsoft.com/office/drawing/2014/main" id="{C8697151-269E-40D6-92DC-3172CAE1CB80}"/>
+              </a:ext>
+            </a:extLst>
+          </p:cNvPr>
+          <p:cNvSpPr>
+            <a:spLocks xmlns:a="http://schemas.openxmlformats.org/drawingml/2006/main" noGrp="1"/>
+          </p:cNvSpPr>
+          <p:nvPr/>
+        </p:nvSpPr>
+        <p:spPr>
+          <a:xfrm xmlns:a="http://schemas.openxmlformats.org/drawingml/2006/main">
+            <a:off x="685800" y="2190750"/>
+            <a:ext cx="3429000" cy="438150"/>
+          </a:xfrm>
+          <a:prstGeom xmlns:a="http://schemas.openxmlformats.org/drawingml/2006/main" prst="roundRect">
+            <a:avLst>
+              <a:gd name="adj" fmla="val 17391"/>
+            </a:avLst>
+          </a:prstGeom>
+          <a:solidFill xmlns:a="http://schemas.openxmlformats.org/drawingml/2006/main">
+            <a:srgbClr val="F1F5F9"/>
+          </a:solidFill>
+          <a:ln xmlns:a="http://schemas.openxmlformats.org/drawingml/2006/main" w="9525">
+            <a:solidFill>
+              <a:srgbClr val="E2E8F0"/>
+            </a:solidFill>
+            <a:prstDash val="solid"/>
+          </a:ln>
+        </p:spPr>
+      </p:sp>
+      <p:sp>
+        <p:nvSpPr>
+          <p:cNvPr id="11" name="">
+            <a:extLst xmlns:a="http://schemas.openxmlformats.org/drawingml/2006/main">
+              <a:ext uri="{FF2B5EF4-FFF2-40B4-BE49-F238E27FC236}">
+                <a16:creationId xmlns:a16="http://schemas.microsoft.com/office/drawing/2014/main" id="{B27307EC-E9DA-4DCA-BE67-D496064E6D75}"/>
+              </a:ext>
+            </a:extLst>
+          </p:cNvPr>
+          <p:cNvSpPr>
+            <a:spLocks xmlns:a="http://schemas.openxmlformats.org/drawingml/2006/main" noGrp="1"/>
+          </p:cNvSpPr>
+          <p:nvPr/>
+        </p:nvSpPr>
+        <p:spPr>
+          <a:xfrm xmlns:a="http://schemas.openxmlformats.org/drawingml/2006/main">
+            <a:off x="781050" y="2266950"/>
+            <a:ext cx="3238500" cy="304800"/>
+          </a:xfrm>
+          <a:prstGeom xmlns:a="http://schemas.openxmlformats.org/drawingml/2006/main" prst="rect">
+            <a:avLst/>
+          </a:prstGeom>
+          <a:noFill xmlns:a="http://schemas.openxmlformats.org/drawingml/2006/main"/>
+          <a:ln xmlns:a="http://schemas.openxmlformats.org/drawingml/2006/main" w="0">
+            <a:noFill/>
+            <a:prstDash val="solid"/>
+          </a:ln>
+        </p:spPr>
+        <p:txBody>
+          <a:bodyPr xmlns:a="http://schemas.openxmlformats.org/drawingml/2006/main"/>
+          <a:lstStyle xmlns:a="http://schemas.openxmlformats.org/drawingml/2006/main"/>
+          <a:p xmlns:a="http://schemas.openxmlformats.org/drawingml/2006/main">
+            <a:pPr algn="l">
+              <a:defRPr sz="975" b="0">
+                <a:solidFill>
+                  <a:srgbClr val="314158"/>
+                </a:solidFill>
+              </a:defRPr>
+            </a:pPr>
+            <a:r>
+              <a:rPr sz="975" b="0">
+                <a:solidFill>
+                  <a:srgbClr val="314158"/>
+                </a:solidFill>
+              </a:rPr>
+              <a:t>Global infertility</a:t>
+            </a:r>
+          </a:p>
+        </p:txBody>
+      </p:sp>
+      <p:sp>
+        <p:nvSpPr>
+          <p:cNvPr id="12" name="">
+            <a:extLst xmlns:a="http://schemas.openxmlformats.org/drawingml/2006/main">
+              <a:ext uri="{FF2B5EF4-FFF2-40B4-BE49-F238E27FC236}">
+                <a16:creationId xmlns:a16="http://schemas.microsoft.com/office/drawing/2014/main" id="{6B604036-78AC-45FE-95EE-EE3B0420544E}"/>
+              </a:ext>
+            </a:extLst>
+          </p:cNvPr>
+          <p:cNvSpPr>
+            <a:spLocks xmlns:a="http://schemas.openxmlformats.org/drawingml/2006/main" noGrp="1"/>
+          </p:cNvSpPr>
+          <p:nvPr/>
+        </p:nvSpPr>
+        <p:spPr>
+          <a:xfrm xmlns:a="http://schemas.openxmlformats.org/drawingml/2006/main">
+            <a:off x="4114800" y="2190750"/>
+            <a:ext cx="2857500" cy="438150"/>
+          </a:xfrm>
+          <a:prstGeom xmlns:a="http://schemas.openxmlformats.org/drawingml/2006/main" prst="roundRect">
+            <a:avLst>
+              <a:gd name="adj" fmla="val 17391"/>
+            </a:avLst>
+          </a:prstGeom>
+          <a:solidFill xmlns:a="http://schemas.openxmlformats.org/drawingml/2006/main">
+            <a:srgbClr val="F1F5F9"/>
+          </a:solidFill>
+          <a:ln xmlns:a="http://schemas.openxmlformats.org/drawingml/2006/main" w="9525">
+            <a:solidFill>
+              <a:srgbClr val="E2E8F0"/>
+            </a:solidFill>
+            <a:prstDash val="solid"/>
+          </a:ln>
+        </p:spPr>
+      </p:sp>
+      <p:sp>
+        <p:nvSpPr>
+          <p:cNvPr id="13" name="">
+            <a:extLst xmlns:a="http://schemas.openxmlformats.org/drawingml/2006/main">
+              <a:ext uri="{FF2B5EF4-FFF2-40B4-BE49-F238E27FC236}">
+                <a16:creationId xmlns:a16="http://schemas.microsoft.com/office/drawing/2014/main" id="{33496B5C-C9D8-4B09-AF69-F91733A5E345}"/>
+              </a:ext>
+            </a:extLst>
+          </p:cNvPr>
+          <p:cNvSpPr>
+            <a:spLocks xmlns:a="http://schemas.openxmlformats.org/drawingml/2006/main" noGrp="1"/>
+          </p:cNvSpPr>
+          <p:nvPr/>
+        </p:nvSpPr>
+        <p:spPr>
+          <a:xfrm xmlns:a="http://schemas.openxmlformats.org/drawingml/2006/main">
+            <a:off x="4210050" y="2266950"/>
+            <a:ext cx="2667000" cy="304800"/>
+          </a:xfrm>
+          <a:prstGeom xmlns:a="http://schemas.openxmlformats.org/drawingml/2006/main" prst="rect">
+            <a:avLst/>
+          </a:prstGeom>
+          <a:noFill xmlns:a="http://schemas.openxmlformats.org/drawingml/2006/main"/>
+          <a:ln xmlns:a="http://schemas.openxmlformats.org/drawingml/2006/main" w="0">
+            <a:noFill/>
+            <a:prstDash val="solid"/>
+          </a:ln>
+        </p:spPr>
+        <p:txBody>
+          <a:bodyPr xmlns:a="http://schemas.openxmlformats.org/drawingml/2006/main"/>
+          <a:lstStyle xmlns:a="http://schemas.openxmlformats.org/drawingml/2006/main"/>
+          <a:p xmlns:a="http://schemas.openxmlformats.org/drawingml/2006/main">
+            <a:pPr algn="l">
+              <a:defRPr sz="975" b="0">
+                <a:solidFill>
+                  <a:srgbClr val="314158"/>
+                </a:solidFill>
+              </a:defRPr>
+            </a:pPr>
+            <a:r>
+              <a:rPr sz="975" b="0">
+                <a:solidFill>
+                  <a:srgbClr val="314158"/>
+                </a:solidFill>
+              </a:rPr>
+              <a:t>1 in 6 adults</a:t>
+            </a:r>
+          </a:p>
+        </p:txBody>
+      </p:sp>
+      <p:sp>
+        <p:nvSpPr>
+          <p:cNvPr id="14" name="">
+            <a:extLst xmlns:a="http://schemas.openxmlformats.org/drawingml/2006/main">
+              <a:ext uri="{FF2B5EF4-FFF2-40B4-BE49-F238E27FC236}">
+                <a16:creationId xmlns:a16="http://schemas.microsoft.com/office/drawing/2014/main" id="{49FF5863-5277-4E78-A36A-C6CE794B2742}"/>
+              </a:ext>
+            </a:extLst>
+          </p:cNvPr>
+          <p:cNvSpPr>
+            <a:spLocks xmlns:a="http://schemas.openxmlformats.org/drawingml/2006/main" noGrp="1"/>
+          </p:cNvSpPr>
+          <p:nvPr/>
+        </p:nvSpPr>
+        <p:spPr>
+          <a:xfrm xmlns:a="http://schemas.openxmlformats.org/drawingml/2006/main">
+            <a:off x="6972300" y="2190750"/>
+            <a:ext cx="4533900" cy="438150"/>
+          </a:xfrm>
+          <a:prstGeom xmlns:a="http://schemas.openxmlformats.org/drawingml/2006/main" prst="roundRect">
+            <a:avLst>
+              <a:gd name="adj" fmla="val 17391"/>
+            </a:avLst>
+          </a:prstGeom>
+          <a:solidFill xmlns:a="http://schemas.openxmlformats.org/drawingml/2006/main">
+            <a:srgbClr val="F1F5F9"/>
+          </a:solidFill>
+          <a:ln xmlns:a="http://schemas.openxmlformats.org/drawingml/2006/main" w="9525">
+            <a:solidFill>
+              <a:srgbClr val="E2E8F0"/>
+            </a:solidFill>
+            <a:prstDash val="solid"/>
+          </a:ln>
+        </p:spPr>
+      </p:sp>
+      <p:sp>
+        <p:nvSpPr>
+          <p:cNvPr id="15" name="">
+            <a:extLst xmlns:a="http://schemas.openxmlformats.org/drawingml/2006/main">
+              <a:ext uri="{FF2B5EF4-FFF2-40B4-BE49-F238E27FC236}">
+                <a16:creationId xmlns:a16="http://schemas.microsoft.com/office/drawing/2014/main" id="{1BDD308D-850F-4883-A8A4-30382C1DC4F9}"/>
+              </a:ext>
+            </a:extLst>
+          </p:cNvPr>
+          <p:cNvSpPr>
+            <a:spLocks xmlns:a="http://schemas.openxmlformats.org/drawingml/2006/main" noGrp="1"/>
+          </p:cNvSpPr>
+          <p:nvPr/>
+        </p:nvSpPr>
+        <p:spPr>
+          <a:xfrm xmlns:a="http://schemas.openxmlformats.org/drawingml/2006/main">
+            <a:off x="7067550" y="2266950"/>
+            <a:ext cx="4343400" cy="304800"/>
+          </a:xfrm>
+          <a:prstGeom xmlns:a="http://schemas.openxmlformats.org/drawingml/2006/main" prst="rect">
+            <a:avLst/>
+          </a:prstGeom>
+          <a:noFill xmlns:a="http://schemas.openxmlformats.org/drawingml/2006/main"/>
+          <a:ln xmlns:a="http://schemas.openxmlformats.org/drawingml/2006/main" w="0">
+            <a:noFill/>
+            <a:prstDash val="solid"/>
+          </a:ln>
+        </p:spPr>
+        <p:txBody>
+          <a:bodyPr xmlns:a="http://schemas.openxmlformats.org/drawingml/2006/main"/>
+          <a:lstStyle xmlns:a="http://schemas.openxmlformats.org/drawingml/2006/main"/>
+          <a:p xmlns:a="http://schemas.openxmlformats.org/drawingml/2006/main">
+            <a:pPr algn="l">
+              <a:defRPr sz="975" b="0">
+                <a:solidFill>
+                  <a:srgbClr val="314158"/>
+                </a:solidFill>
+              </a:defRPr>
+            </a:pPr>
+            <a:r>
+              <a:rPr sz="975" b="0">
+                <a:solidFill>
+                  <a:srgbClr val="314158"/>
+                </a:solidFill>
+              </a:rPr>
+              <a:t>Why the area matters</a:t>
+            </a:r>
+          </a:p>
+        </p:txBody>
+      </p:sp>
+      <p:sp>
+        <p:nvSpPr>
+          <p:cNvPr id="16" name="">
+            <a:extLst xmlns:a="http://schemas.openxmlformats.org/drawingml/2006/main">
+              <a:ext uri="{FF2B5EF4-FFF2-40B4-BE49-F238E27FC236}">
+                <a16:creationId xmlns:a16="http://schemas.microsoft.com/office/drawing/2014/main" id="{D6C16D3E-9AF1-440A-8203-A17A8F189227}"/>
+              </a:ext>
+            </a:extLst>
+          </p:cNvPr>
+          <p:cNvSpPr>
+            <a:spLocks xmlns:a="http://schemas.openxmlformats.org/drawingml/2006/main" noGrp="1"/>
+          </p:cNvSpPr>
+          <p:nvPr/>
+        </p:nvSpPr>
+        <p:spPr>
+          <a:xfrm xmlns:a="http://schemas.openxmlformats.org/drawingml/2006/main">
+            <a:off x="685800" y="2628900"/>
+            <a:ext cx="3429000" cy="438150"/>
+          </a:xfrm>
+          <a:prstGeom xmlns:a="http://schemas.openxmlformats.org/drawingml/2006/main" prst="roundRect">
+            <a:avLst>
+              <a:gd name="adj" fmla="val 17391"/>
+            </a:avLst>
+          </a:prstGeom>
+          <a:solidFill xmlns:a="http://schemas.openxmlformats.org/drawingml/2006/main">
+            <a:srgbClr val="FFFFFF"/>
+          </a:solidFill>
+          <a:ln xmlns:a="http://schemas.openxmlformats.org/drawingml/2006/main" w="9525">
+            <a:solidFill>
+              <a:srgbClr val="E2E8F0"/>
+            </a:solidFill>
+            <a:prstDash val="solid"/>
+          </a:ln>
+        </p:spPr>
+      </p:sp>
+      <p:sp>
+        <p:nvSpPr>
+          <p:cNvPr id="17" name="">
+            <a:extLst xmlns:a="http://schemas.openxmlformats.org/drawingml/2006/main">
+              <a:ext uri="{FF2B5EF4-FFF2-40B4-BE49-F238E27FC236}">
+                <a16:creationId xmlns:a16="http://schemas.microsoft.com/office/drawing/2014/main" id="{0BE39247-7E63-47CD-8F74-A48696785D07}"/>
+              </a:ext>
+            </a:extLst>
+          </p:cNvPr>
+          <p:cNvSpPr>
+            <a:spLocks xmlns:a="http://schemas.openxmlformats.org/drawingml/2006/main" noGrp="1"/>
+          </p:cNvSpPr>
+          <p:nvPr/>
+        </p:nvSpPr>
+        <p:spPr>
+          <a:xfrm xmlns:a="http://schemas.openxmlformats.org/drawingml/2006/main">
+            <a:off x="781050" y="2705100"/>
+            <a:ext cx="3238500" cy="304800"/>
+          </a:xfrm>
+          <a:prstGeom xmlns:a="http://schemas.openxmlformats.org/drawingml/2006/main" prst="rect">
+            <a:avLst/>
+          </a:prstGeom>
+          <a:noFill xmlns:a="http://schemas.openxmlformats.org/drawingml/2006/main"/>
+          <a:ln xmlns:a="http://schemas.openxmlformats.org/drawingml/2006/main" w="0">
+            <a:noFill/>
+            <a:prstDash val="solid"/>
+          </a:ln>
+        </p:spPr>
+        <p:txBody>
+          <a:bodyPr xmlns:a="http://schemas.openxmlformats.org/drawingml/2006/main"/>
+          <a:lstStyle xmlns:a="http://schemas.openxmlformats.org/drawingml/2006/main"/>
+          <a:p xmlns:a="http://schemas.openxmlformats.org/drawingml/2006/main">
+            <a:pPr algn="l">
+              <a:defRPr sz="975" b="0">
+                <a:solidFill>
+                  <a:srgbClr val="314158"/>
+                </a:solidFill>
+              </a:defRPr>
+            </a:pPr>
+            <a:r>
+              <a:rPr sz="975" b="0">
+                <a:solidFill>
+                  <a:srgbClr val="314158"/>
+                </a:solidFill>
+              </a:rPr>
+              <a:t>India TFR</a:t>
+            </a:r>
+          </a:p>
+        </p:txBody>
+      </p:sp>
+      <p:sp>
+        <p:nvSpPr>
+          <p:cNvPr id="18" name="">
+            <a:extLst xmlns:a="http://schemas.openxmlformats.org/drawingml/2006/main">
+              <a:ext uri="{FF2B5EF4-FFF2-40B4-BE49-F238E27FC236}">
+                <a16:creationId xmlns:a16="http://schemas.microsoft.com/office/drawing/2014/main" id="{AA995D48-021A-4F66-A0AD-22C5FBEA5718}"/>
+              </a:ext>
+            </a:extLst>
+          </p:cNvPr>
+          <p:cNvSpPr>
+            <a:spLocks xmlns:a="http://schemas.openxmlformats.org/drawingml/2006/main" noGrp="1"/>
+          </p:cNvSpPr>
+          <p:nvPr/>
+        </p:nvSpPr>
+        <p:spPr>
+          <a:xfrm xmlns:a="http://schemas.openxmlformats.org/drawingml/2006/main">
+            <a:off x="4114800" y="2628900"/>
+            <a:ext cx="2857500" cy="438150"/>
+          </a:xfrm>
+          <a:prstGeom xmlns:a="http://schemas.openxmlformats.org/drawingml/2006/main" prst="roundRect">
+            <a:avLst>
+              <a:gd name="adj" fmla="val 17391"/>
+            </a:avLst>
+          </a:prstGeom>
+          <a:solidFill xmlns:a="http://schemas.openxmlformats.org/drawingml/2006/main">
+            <a:srgbClr val="FFFFFF"/>
+          </a:solidFill>
+          <a:ln xmlns:a="http://schemas.openxmlformats.org/drawingml/2006/main" w="9525">
+            <a:solidFill>
+              <a:srgbClr val="E2E8F0"/>
+            </a:solidFill>
+            <a:prstDash val="solid"/>
+          </a:ln>
+        </p:spPr>
+      </p:sp>
+      <p:sp>
+        <p:nvSpPr>
+          <p:cNvPr id="19" name="">
+            <a:extLst xmlns:a="http://schemas.openxmlformats.org/drawingml/2006/main">
+              <a:ext uri="{FF2B5EF4-FFF2-40B4-BE49-F238E27FC236}">
+                <a16:creationId xmlns:a16="http://schemas.microsoft.com/office/drawing/2014/main" id="{0ED4785B-19CF-4A5F-BF65-622822E6B1E4}"/>
+              </a:ext>
+            </a:extLst>
+          </p:cNvPr>
+          <p:cNvSpPr>
+            <a:spLocks xmlns:a="http://schemas.openxmlformats.org/drawingml/2006/main" noGrp="1"/>
+          </p:cNvSpPr>
+          <p:nvPr/>
+        </p:nvSpPr>
+        <p:spPr>
+          <a:xfrm xmlns:a="http://schemas.openxmlformats.org/drawingml/2006/main">
+            <a:off x="4210050" y="2705100"/>
+            <a:ext cx="2667000" cy="304800"/>
+          </a:xfrm>
+          <a:prstGeom xmlns:a="http://schemas.openxmlformats.org/drawingml/2006/main" prst="rect">
+            <a:avLst/>
+          </a:prstGeom>
+          <a:noFill xmlns:a="http://schemas.openxmlformats.org/drawingml/2006/main"/>
+          <a:ln xmlns:a="http://schemas.openxmlformats.org/drawingml/2006/main" w="0">
+            <a:noFill/>
+            <a:prstDash val="solid"/>
+          </a:ln>
+        </p:spPr>
+        <p:txBody>
+          <a:bodyPr xmlns:a="http://schemas.openxmlformats.org/drawingml/2006/main"/>
+          <a:lstStyle xmlns:a="http://schemas.openxmlformats.org/drawingml/2006/main"/>
+          <a:p xmlns:a="http://schemas.openxmlformats.org/drawingml/2006/main">
+            <a:pPr algn="l">
+              <a:defRPr sz="975" b="0">
+                <a:solidFill>
+                  <a:srgbClr val="314158"/>
+                </a:solidFill>
+              </a:defRPr>
+            </a:pPr>
+            <a:r>
+              <a:rPr sz="975" b="0">
+                <a:solidFill>
+                  <a:srgbClr val="314158"/>
+                </a:solidFill>
+              </a:rPr>
+              <a:t>2.0 in NFHS-5</a:t>
+            </a:r>
+          </a:p>
+        </p:txBody>
+      </p:sp>
+      <p:sp>
+        <p:nvSpPr>
+          <p:cNvPr id="20" name="">
+            <a:extLst xmlns:a="http://schemas.openxmlformats.org/drawingml/2006/main">
+              <a:ext uri="{FF2B5EF4-FFF2-40B4-BE49-F238E27FC236}">
+                <a16:creationId xmlns:a16="http://schemas.microsoft.com/office/drawing/2014/main" id="{921B4A00-06C7-4934-BC9D-7AF76CEED4F2}"/>
+              </a:ext>
+            </a:extLst>
+          </p:cNvPr>
+          <p:cNvSpPr>
+            <a:spLocks xmlns:a="http://schemas.openxmlformats.org/drawingml/2006/main" noGrp="1"/>
+          </p:cNvSpPr>
+          <p:nvPr/>
+        </p:nvSpPr>
+        <p:spPr>
+          <a:xfrm xmlns:a="http://schemas.openxmlformats.org/drawingml/2006/main">
+            <a:off x="6972300" y="2628900"/>
+            <a:ext cx="4533900" cy="438150"/>
+          </a:xfrm>
+          <a:prstGeom xmlns:a="http://schemas.openxmlformats.org/drawingml/2006/main" prst="roundRect">
+            <a:avLst>
+              <a:gd name="adj" fmla="val 17391"/>
+            </a:avLst>
+          </a:prstGeom>
+          <a:solidFill xmlns:a="http://schemas.openxmlformats.org/drawingml/2006/main">
+            <a:srgbClr val="FFFFFF"/>
+          </a:solidFill>
+          <a:ln xmlns:a="http://schemas.openxmlformats.org/drawingml/2006/main" w="9525">
+            <a:solidFill>
+              <a:srgbClr val="E2E8F0"/>
+            </a:solidFill>
+            <a:prstDash val="solid"/>
+          </a:ln>
+        </p:spPr>
+      </p:sp>
+      <p:sp>
+        <p:nvSpPr>
+          <p:cNvPr id="21" name="">
+            <a:extLst xmlns:a="http://schemas.openxmlformats.org/drawingml/2006/main">
+              <a:ext uri="{FF2B5EF4-FFF2-40B4-BE49-F238E27FC236}">
+                <a16:creationId xmlns:a16="http://schemas.microsoft.com/office/drawing/2014/main" id="{47164916-6CBD-4BF3-9FC7-B9CB3DDC073C}"/>
+              </a:ext>
+            </a:extLst>
+          </p:cNvPr>
+          <p:cNvSpPr>
+            <a:spLocks xmlns:a="http://schemas.openxmlformats.org/drawingml/2006/main" noGrp="1"/>
+          </p:cNvSpPr>
+          <p:nvPr/>
+        </p:nvSpPr>
+        <p:spPr>
+          <a:xfrm xmlns:a="http://schemas.openxmlformats.org/drawingml/2006/main">
+            <a:off x="7067550" y="2705100"/>
+            <a:ext cx="4343400" cy="304800"/>
+          </a:xfrm>
+          <a:prstGeom xmlns:a="http://schemas.openxmlformats.org/drawingml/2006/main" prst="rect">
+            <a:avLst/>
+          </a:prstGeom>
+          <a:noFill xmlns:a="http://schemas.openxmlformats.org/drawingml/2006/main"/>
+          <a:ln xmlns:a="http://schemas.openxmlformats.org/drawingml/2006/main" w="0">
+            <a:noFill/>
+            <a:prstDash val="solid"/>
+          </a:ln>
+        </p:spPr>
+        <p:txBody>
+          <a:bodyPr xmlns:a="http://schemas.openxmlformats.org/drawingml/2006/main"/>
+          <a:lstStyle xmlns:a="http://schemas.openxmlformats.org/drawingml/2006/main"/>
+          <a:p xmlns:a="http://schemas.openxmlformats.org/drawingml/2006/main">
+            <a:pPr algn="l">
+              <a:defRPr sz="975" b="0">
+                <a:solidFill>
+                  <a:srgbClr val="314158"/>
+                </a:solidFill>
+              </a:defRPr>
+            </a:pPr>
+            <a:r>
+              <a:rPr sz="975" b="0">
+                <a:solidFill>
+                  <a:srgbClr val="314158"/>
+                </a:solidFill>
+              </a:rPr>
+              <a:t>Fertility context</a:t>
+            </a:r>
+          </a:p>
+        </p:txBody>
+      </p:sp>
+      <p:sp>
+        <p:nvSpPr>
+          <p:cNvPr id="22" name="">
+            <a:extLst xmlns:a="http://schemas.openxmlformats.org/drawingml/2006/main">
+              <a:ext uri="{FF2B5EF4-FFF2-40B4-BE49-F238E27FC236}">
+                <a16:creationId xmlns:a16="http://schemas.microsoft.com/office/drawing/2014/main" id="{96A71FDA-B2D9-4A21-99F3-F5F8D515D587}"/>
+              </a:ext>
+            </a:extLst>
+          </p:cNvPr>
+          <p:cNvSpPr>
+            <a:spLocks xmlns:a="http://schemas.openxmlformats.org/drawingml/2006/main" noGrp="1"/>
+          </p:cNvSpPr>
+          <p:nvPr/>
+        </p:nvSpPr>
+        <p:spPr>
+          <a:xfrm xmlns:a="http://schemas.openxmlformats.org/drawingml/2006/main">
+            <a:off x="685800" y="3067050"/>
+            <a:ext cx="3429000" cy="438150"/>
+          </a:xfrm>
+          <a:prstGeom xmlns:a="http://schemas.openxmlformats.org/drawingml/2006/main" prst="roundRect">
+            <a:avLst>
+              <a:gd name="adj" fmla="val 17391"/>
+            </a:avLst>
+          </a:prstGeom>
+          <a:solidFill xmlns:a="http://schemas.openxmlformats.org/drawingml/2006/main">
+            <a:srgbClr val="F1F5F9"/>
+          </a:solidFill>
+          <a:ln xmlns:a="http://schemas.openxmlformats.org/drawingml/2006/main" w="9525">
+            <a:solidFill>
+              <a:srgbClr val="E2E8F0"/>
+            </a:solidFill>
+            <a:prstDash val="solid"/>
+          </a:ln>
+        </p:spPr>
+      </p:sp>
+      <p:sp>
+        <p:nvSpPr>
+          <p:cNvPr id="23" name="">
+            <a:extLst xmlns:a="http://schemas.openxmlformats.org/drawingml/2006/main">
+              <a:ext uri="{FF2B5EF4-FFF2-40B4-BE49-F238E27FC236}">
+                <a16:creationId xmlns:a16="http://schemas.microsoft.com/office/drawing/2014/main" id="{C80F0C4E-CF9B-43DB-A4F3-2D4735201150}"/>
+              </a:ext>
+            </a:extLst>
+          </p:cNvPr>
+          <p:cNvSpPr>
+            <a:spLocks xmlns:a="http://schemas.openxmlformats.org/drawingml/2006/main" noGrp="1"/>
+          </p:cNvSpPr>
+          <p:nvPr/>
+        </p:nvSpPr>
+        <p:spPr>
+          <a:xfrm xmlns:a="http://schemas.openxmlformats.org/drawingml/2006/main">
+            <a:off x="781050" y="3143250"/>
+            <a:ext cx="3238500" cy="304800"/>
+          </a:xfrm>
+          <a:prstGeom xmlns:a="http://schemas.openxmlformats.org/drawingml/2006/main" prst="rect">
+            <a:avLst/>
+          </a:prstGeom>
+          <a:noFill xmlns:a="http://schemas.openxmlformats.org/drawingml/2006/main"/>
+          <a:ln xmlns:a="http://schemas.openxmlformats.org/drawingml/2006/main" w="0">
+            <a:noFill/>
+            <a:prstDash val="solid"/>
+          </a:ln>
+        </p:spPr>
+        <p:txBody>
+          <a:bodyPr xmlns:a="http://schemas.openxmlformats.org/drawingml/2006/main"/>
+          <a:lstStyle xmlns:a="http://schemas.openxmlformats.org/drawingml/2006/main"/>
+          <a:p xmlns:a="http://schemas.openxmlformats.org/drawingml/2006/main">
+            <a:pPr algn="l">
+              <a:defRPr sz="975" b="0">
+                <a:solidFill>
+                  <a:srgbClr val="314158"/>
+                </a:solidFill>
+              </a:defRPr>
+            </a:pPr>
+            <a:r>
+              <a:rPr sz="975" b="0">
+                <a:solidFill>
+                  <a:srgbClr val="314158"/>
+                </a:solidFill>
+              </a:rPr>
+              <a:t>UK IVF birth by age</a:t>
+            </a:r>
+          </a:p>
+        </p:txBody>
+      </p:sp>
+      <p:sp>
+        <p:nvSpPr>
+          <p:cNvPr id="24" name="">
+            <a:extLst xmlns:a="http://schemas.openxmlformats.org/drawingml/2006/main">
+              <a:ext uri="{FF2B5EF4-FFF2-40B4-BE49-F238E27FC236}">
+                <a16:creationId xmlns:a16="http://schemas.microsoft.com/office/drawing/2014/main" id="{61AF0DCB-5007-424A-999F-FBD85ACDD818}"/>
+              </a:ext>
+            </a:extLst>
+          </p:cNvPr>
+          <p:cNvSpPr>
+            <a:spLocks xmlns:a="http://schemas.openxmlformats.org/drawingml/2006/main" noGrp="1"/>
+          </p:cNvSpPr>
+          <p:nvPr/>
+        </p:nvSpPr>
+        <p:spPr>
+          <a:xfrm xmlns:a="http://schemas.openxmlformats.org/drawingml/2006/main">
+            <a:off x="4114800" y="3067050"/>
+            <a:ext cx="2857500" cy="438150"/>
+          </a:xfrm>
+          <a:prstGeom xmlns:a="http://schemas.openxmlformats.org/drawingml/2006/main" prst="roundRect">
+            <a:avLst>
+              <a:gd name="adj" fmla="val 17391"/>
+            </a:avLst>
+          </a:prstGeom>
+          <a:solidFill xmlns:a="http://schemas.openxmlformats.org/drawingml/2006/main">
+            <a:srgbClr val="F1F5F9"/>
+          </a:solidFill>
+          <a:ln xmlns:a="http://schemas.openxmlformats.org/drawingml/2006/main" w="9525">
+            <a:solidFill>
+              <a:srgbClr val="E2E8F0"/>
+            </a:solidFill>
+            <a:prstDash val="solid"/>
+          </a:ln>
+        </p:spPr>
+      </p:sp>
+      <p:sp>
+        <p:nvSpPr>
+          <p:cNvPr id="25" name="">
+            <a:extLst xmlns:a="http://schemas.openxmlformats.org/drawingml/2006/main">
+              <a:ext uri="{FF2B5EF4-FFF2-40B4-BE49-F238E27FC236}">
+                <a16:creationId xmlns:a16="http://schemas.microsoft.com/office/drawing/2014/main" id="{15D397DE-22F5-4A4A-BD36-14E833B45419}"/>
+              </a:ext>
+            </a:extLst>
+          </p:cNvPr>
+          <p:cNvSpPr>
+            <a:spLocks xmlns:a="http://schemas.openxmlformats.org/drawingml/2006/main" noGrp="1"/>
+          </p:cNvSpPr>
+          <p:nvPr/>
+        </p:nvSpPr>
+        <p:spPr>
+          <a:xfrm xmlns:a="http://schemas.openxmlformats.org/drawingml/2006/main">
+            <a:off x="4210050" y="3143250"/>
+            <a:ext cx="2667000" cy="304800"/>
+          </a:xfrm>
+          <a:prstGeom xmlns:a="http://schemas.openxmlformats.org/drawingml/2006/main" prst="rect">
+            <a:avLst/>
+          </a:prstGeom>
+          <a:noFill xmlns:a="http://schemas.openxmlformats.org/drawingml/2006/main"/>
+          <a:ln xmlns:a="http://schemas.openxmlformats.org/drawingml/2006/main" w="0">
+            <a:noFill/>
+            <a:prstDash val="solid"/>
+          </a:ln>
+        </p:spPr>
+        <p:txBody>
+          <a:bodyPr xmlns:a="http://schemas.openxmlformats.org/drawingml/2006/main"/>
+          <a:lstStyle xmlns:a="http://schemas.openxmlformats.org/drawingml/2006/main"/>
+          <a:p xmlns:a="http://schemas.openxmlformats.org/drawingml/2006/main">
+            <a:pPr algn="l">
+              <a:defRPr sz="975" b="0">
+                <a:solidFill>
+                  <a:srgbClr val="314158"/>
+                </a:solidFill>
+              </a:defRPr>
+            </a:pPr>
+            <a:r>
+              <a:rPr sz="975" b="0">
+                <a:solidFill>
+                  <a:srgbClr val="314158"/>
+                </a:solidFill>
+              </a:rPr>
+              <a:t>35% age 18-34; 5% age 43-44</a:t>
+            </a:r>
+          </a:p>
+        </p:txBody>
+      </p:sp>
+      <p:sp>
+        <p:nvSpPr>
+          <p:cNvPr id="26" name="">
+            <a:extLst xmlns:a="http://schemas.openxmlformats.org/drawingml/2006/main">
+              <a:ext uri="{FF2B5EF4-FFF2-40B4-BE49-F238E27FC236}">
+                <a16:creationId xmlns:a16="http://schemas.microsoft.com/office/drawing/2014/main" id="{CB33D4F5-C4F9-45A3-AC0A-FAEE1AF206EC}"/>
+              </a:ext>
+            </a:extLst>
+          </p:cNvPr>
+          <p:cNvSpPr>
+            <a:spLocks xmlns:a="http://schemas.openxmlformats.org/drawingml/2006/main" noGrp="1"/>
+          </p:cNvSpPr>
+          <p:nvPr/>
+        </p:nvSpPr>
+        <p:spPr>
+          <a:xfrm xmlns:a="http://schemas.openxmlformats.org/drawingml/2006/main">
+            <a:off x="6972300" y="3067050"/>
+            <a:ext cx="4533900" cy="438150"/>
+          </a:xfrm>
+          <a:prstGeom xmlns:a="http://schemas.openxmlformats.org/drawingml/2006/main" prst="roundRect">
+            <a:avLst>
+              <a:gd name="adj" fmla="val 17391"/>
+            </a:avLst>
+          </a:prstGeom>
+          <a:solidFill xmlns:a="http://schemas.openxmlformats.org/drawingml/2006/main">
+            <a:srgbClr val="F1F5F9"/>
+          </a:solidFill>
+          <a:ln xmlns:a="http://schemas.openxmlformats.org/drawingml/2006/main" w="9525">
+            <a:solidFill>
+              <a:srgbClr val="E2E8F0"/>
+            </a:solidFill>
+            <a:prstDash val="solid"/>
+          </a:ln>
+        </p:spPr>
+      </p:sp>
+      <p:sp>
+        <p:nvSpPr>
+          <p:cNvPr id="27" name="">
+            <a:extLst xmlns:a="http://schemas.openxmlformats.org/drawingml/2006/main">
+              <a:ext uri="{FF2B5EF4-FFF2-40B4-BE49-F238E27FC236}">
+                <a16:creationId xmlns:a16="http://schemas.microsoft.com/office/drawing/2014/main" id="{2A0030F6-3CA6-4A92-B685-A7279BE0BAC8}"/>
+              </a:ext>
+            </a:extLst>
+          </p:cNvPr>
+          <p:cNvSpPr>
+            <a:spLocks xmlns:a="http://schemas.openxmlformats.org/drawingml/2006/main" noGrp="1"/>
+          </p:cNvSpPr>
+          <p:nvPr/>
+        </p:nvSpPr>
+        <p:spPr>
+          <a:xfrm xmlns:a="http://schemas.openxmlformats.org/drawingml/2006/main">
+            <a:off x="7067550" y="3143250"/>
+            <a:ext cx="4343400" cy="304800"/>
+          </a:xfrm>
+          <a:prstGeom xmlns:a="http://schemas.openxmlformats.org/drawingml/2006/main" prst="rect">
+            <a:avLst/>
+          </a:prstGeom>
+          <a:noFill xmlns:a="http://schemas.openxmlformats.org/drawingml/2006/main"/>
+          <a:ln xmlns:a="http://schemas.openxmlformats.org/drawingml/2006/main" w="0">
+            <a:noFill/>
+            <a:prstDash val="solid"/>
+          </a:ln>
+        </p:spPr>
+        <p:txBody>
+          <a:bodyPr xmlns:a="http://schemas.openxmlformats.org/drawingml/2006/main"/>
+          <a:lstStyle xmlns:a="http://schemas.openxmlformats.org/drawingml/2006/main"/>
+          <a:p xmlns:a="http://schemas.openxmlformats.org/drawingml/2006/main">
+            <a:pPr algn="l">
+              <a:defRPr sz="975" b="0">
+                <a:solidFill>
+                  <a:srgbClr val="314158"/>
+                </a:solidFill>
+              </a:defRPr>
+            </a:pPr>
+            <a:r>
+              <a:rPr sz="975" b="0">
+                <a:solidFill>
+                  <a:srgbClr val="314158"/>
+                </a:solidFill>
+              </a:rPr>
+              <a:t>Age effect</a:t>
+            </a:r>
+          </a:p>
+        </p:txBody>
+      </p:sp>
+      <p:sp>
+        <p:nvSpPr>
+          <p:cNvPr id="28" name="">
+            <a:extLst xmlns:a="http://schemas.openxmlformats.org/drawingml/2006/main">
+              <a:ext uri="{FF2B5EF4-FFF2-40B4-BE49-F238E27FC236}">
+                <a16:creationId xmlns:a16="http://schemas.microsoft.com/office/drawing/2014/main" id="{191FB9BD-2187-4C8F-8BF5-049F00D2526F}"/>
+              </a:ext>
+            </a:extLst>
+          </p:cNvPr>
+          <p:cNvSpPr>
+            <a:spLocks xmlns:a="http://schemas.openxmlformats.org/drawingml/2006/main" noGrp="1"/>
+          </p:cNvSpPr>
+          <p:nvPr/>
+        </p:nvSpPr>
+        <p:spPr>
+          <a:xfrm xmlns:a="http://schemas.openxmlformats.org/drawingml/2006/main">
+            <a:off x="685800" y="3505200"/>
+            <a:ext cx="3429000" cy="438150"/>
+          </a:xfrm>
+          <a:prstGeom xmlns:a="http://schemas.openxmlformats.org/drawingml/2006/main" prst="roundRect">
+            <a:avLst>
+              <a:gd name="adj" fmla="val 17391"/>
+            </a:avLst>
+          </a:prstGeom>
+          <a:solidFill xmlns:a="http://schemas.openxmlformats.org/drawingml/2006/main">
+            <a:srgbClr val="FFFFFF"/>
+          </a:solidFill>
+          <a:ln xmlns:a="http://schemas.openxmlformats.org/drawingml/2006/main" w="9525">
+            <a:solidFill>
+              <a:srgbClr val="E2E8F0"/>
+            </a:solidFill>
+            <a:prstDash val="solid"/>
+          </a:ln>
+        </p:spPr>
+      </p:sp>
+      <p:sp>
+        <p:nvSpPr>
+          <p:cNvPr id="29" name="">
+            <a:extLst xmlns:a="http://schemas.openxmlformats.org/drawingml/2006/main">
+              <a:ext uri="{FF2B5EF4-FFF2-40B4-BE49-F238E27FC236}">
+                <a16:creationId xmlns:a16="http://schemas.microsoft.com/office/drawing/2014/main" id="{2C4B62E5-FE05-4088-A082-E524CDDFF45D}"/>
+              </a:ext>
+            </a:extLst>
+          </p:cNvPr>
+          <p:cNvSpPr>
+            <a:spLocks xmlns:a="http://schemas.openxmlformats.org/drawingml/2006/main" noGrp="1"/>
+          </p:cNvSpPr>
+          <p:nvPr/>
+        </p:nvSpPr>
+        <p:spPr>
+          <a:xfrm xmlns:a="http://schemas.openxmlformats.org/drawingml/2006/main">
+            <a:off x="781050" y="3581400"/>
+            <a:ext cx="3238500" cy="304800"/>
+          </a:xfrm>
+          <a:prstGeom xmlns:a="http://schemas.openxmlformats.org/drawingml/2006/main" prst="rect">
+            <a:avLst/>
+          </a:prstGeom>
+          <a:noFill xmlns:a="http://schemas.openxmlformats.org/drawingml/2006/main"/>
+          <a:ln xmlns:a="http://schemas.openxmlformats.org/drawingml/2006/main" w="0">
+            <a:noFill/>
+            <a:prstDash val="solid"/>
+          </a:ln>
+        </p:spPr>
+        <p:txBody>
+          <a:bodyPr xmlns:a="http://schemas.openxmlformats.org/drawingml/2006/main"/>
+          <a:lstStyle xmlns:a="http://schemas.openxmlformats.org/drawingml/2006/main"/>
+          <a:p xmlns:a="http://schemas.openxmlformats.org/drawingml/2006/main">
+            <a:pPr algn="l">
+              <a:defRPr sz="975" b="0">
+                <a:solidFill>
+                  <a:srgbClr val="314158"/>
+                </a:solidFill>
+              </a:defRPr>
+            </a:pPr>
+            <a:r>
+              <a:rPr sz="975" b="0">
+                <a:solidFill>
+                  <a:srgbClr val="314158"/>
+                </a:solidFill>
+              </a:rPr>
+              <a:t>India IVF OOPE</a:t>
+            </a:r>
+          </a:p>
+        </p:txBody>
+      </p:sp>
+      <p:sp>
+        <p:nvSpPr>
+          <p:cNvPr id="30" name="">
+            <a:extLst xmlns:a="http://schemas.openxmlformats.org/drawingml/2006/main">
+              <a:ext uri="{FF2B5EF4-FFF2-40B4-BE49-F238E27FC236}">
+                <a16:creationId xmlns:a16="http://schemas.microsoft.com/office/drawing/2014/main" id="{5CD5A3F7-4668-429F-A443-CB4DF55CDC53}"/>
+              </a:ext>
+            </a:extLst>
+          </p:cNvPr>
+          <p:cNvSpPr>
+            <a:spLocks xmlns:a="http://schemas.openxmlformats.org/drawingml/2006/main" noGrp="1"/>
+          </p:cNvSpPr>
+          <p:nvPr/>
+        </p:nvSpPr>
+        <p:spPr>
+          <a:xfrm xmlns:a="http://schemas.openxmlformats.org/drawingml/2006/main">
+            <a:off x="4114800" y="3505200"/>
+            <a:ext cx="2857500" cy="438150"/>
+          </a:xfrm>
+          <a:prstGeom xmlns:a="http://schemas.openxmlformats.org/drawingml/2006/main" prst="roundRect">
+            <a:avLst>
+              <a:gd name="adj" fmla="val 17391"/>
+            </a:avLst>
+          </a:prstGeom>
+          <a:solidFill xmlns:a="http://schemas.openxmlformats.org/drawingml/2006/main">
+            <a:srgbClr val="FFFFFF"/>
+          </a:solidFill>
+          <a:ln xmlns:a="http://schemas.openxmlformats.org/drawingml/2006/main" w="9525">
+            <a:solidFill>
+              <a:srgbClr val="E2E8F0"/>
+            </a:solidFill>
+            <a:prstDash val="solid"/>
+          </a:ln>
+        </p:spPr>
+      </p:sp>
+      <p:sp>
+        <p:nvSpPr>
+          <p:cNvPr id="31" name="">
+            <a:extLst xmlns:a="http://schemas.openxmlformats.org/drawingml/2006/main">
+              <a:ext uri="{FF2B5EF4-FFF2-40B4-BE49-F238E27FC236}">
+                <a16:creationId xmlns:a16="http://schemas.microsoft.com/office/drawing/2014/main" id="{474D8AF6-47A0-46AB-9A5C-F3C4469F07A7}"/>
+              </a:ext>
+            </a:extLst>
+          </p:cNvPr>
+          <p:cNvSpPr>
+            <a:spLocks xmlns:a="http://schemas.openxmlformats.org/drawingml/2006/main" noGrp="1"/>
+          </p:cNvSpPr>
+          <p:nvPr/>
+        </p:nvSpPr>
+        <p:spPr>
+          <a:xfrm xmlns:a="http://schemas.openxmlformats.org/drawingml/2006/main">
+            <a:off x="4210050" y="3581400"/>
+            <a:ext cx="2667000" cy="304800"/>
+          </a:xfrm>
+          <a:prstGeom xmlns:a="http://schemas.openxmlformats.org/drawingml/2006/main" prst="rect">
+            <a:avLst/>
+          </a:prstGeom>
+          <a:noFill xmlns:a="http://schemas.openxmlformats.org/drawingml/2006/main"/>
+          <a:ln xmlns:a="http://schemas.openxmlformats.org/drawingml/2006/main" w="0">
+            <a:noFill/>
+            <a:prstDash val="solid"/>
+          </a:ln>
+        </p:spPr>
+        <p:txBody>
+          <a:bodyPr xmlns:a="http://schemas.openxmlformats.org/drawingml/2006/main"/>
+          <a:lstStyle xmlns:a="http://schemas.openxmlformats.org/drawingml/2006/main"/>
+          <a:p xmlns:a="http://schemas.openxmlformats.org/drawingml/2006/main">
+            <a:pPr algn="l">
+              <a:defRPr sz="975" b="0">
+                <a:solidFill>
+                  <a:srgbClr val="314158"/>
+                </a:solidFill>
+              </a:defRPr>
+            </a:pPr>
+            <a:r>
+              <a:rPr sz="975" b="0">
+                <a:solidFill>
+                  <a:srgbClr val="314158"/>
+                </a:solidFill>
+              </a:rPr>
+              <a:t>Rs. 1.10 lakh public; Rs. 2.38 lakh private</a:t>
+            </a:r>
+          </a:p>
+        </p:txBody>
+      </p:sp>
+      <p:sp>
+        <p:nvSpPr>
+          <p:cNvPr id="32" name="">
+            <a:extLst xmlns:a="http://schemas.openxmlformats.org/drawingml/2006/main">
+              <a:ext uri="{FF2B5EF4-FFF2-40B4-BE49-F238E27FC236}">
+                <a16:creationId xmlns:a16="http://schemas.microsoft.com/office/drawing/2014/main" id="{016023BF-68F4-483F-ADB8-8657EFF05FB0}"/>
+              </a:ext>
+            </a:extLst>
+          </p:cNvPr>
+          <p:cNvSpPr>
+            <a:spLocks xmlns:a="http://schemas.openxmlformats.org/drawingml/2006/main" noGrp="1"/>
+          </p:cNvSpPr>
+          <p:nvPr/>
+        </p:nvSpPr>
+        <p:spPr>
+          <a:xfrm xmlns:a="http://schemas.openxmlformats.org/drawingml/2006/main">
+            <a:off x="6972300" y="3505200"/>
+            <a:ext cx="4533900" cy="438150"/>
+          </a:xfrm>
+          <a:prstGeom xmlns:a="http://schemas.openxmlformats.org/drawingml/2006/main" prst="roundRect">
+            <a:avLst>
+              <a:gd name="adj" fmla="val 17391"/>
+            </a:avLst>
+          </a:prstGeom>
+          <a:solidFill xmlns:a="http://schemas.openxmlformats.org/drawingml/2006/main">
+            <a:srgbClr val="FFFFFF"/>
+          </a:solidFill>
+          <a:ln xmlns:a="http://schemas.openxmlformats.org/drawingml/2006/main" w="9525">
+            <a:solidFill>
+              <a:srgbClr val="E2E8F0"/>
+            </a:solidFill>
+            <a:prstDash val="solid"/>
+          </a:ln>
+        </p:spPr>
+      </p:sp>
+      <p:sp>
+        <p:nvSpPr>
+          <p:cNvPr id="33" name="">
+            <a:extLst xmlns:a="http://schemas.openxmlformats.org/drawingml/2006/main">
+              <a:ext uri="{FF2B5EF4-FFF2-40B4-BE49-F238E27FC236}">
+                <a16:creationId xmlns:a16="http://schemas.microsoft.com/office/drawing/2014/main" id="{E59702DC-78AB-484B-BCF1-E70748869185}"/>
+              </a:ext>
+            </a:extLst>
+          </p:cNvPr>
+          <p:cNvSpPr>
+            <a:spLocks xmlns:a="http://schemas.openxmlformats.org/drawingml/2006/main" noGrp="1"/>
+          </p:cNvSpPr>
+          <p:nvPr/>
+        </p:nvSpPr>
+        <p:spPr>
+          <a:xfrm xmlns:a="http://schemas.openxmlformats.org/drawingml/2006/main">
+            <a:off x="7067550" y="3581400"/>
+            <a:ext cx="4343400" cy="304800"/>
+          </a:xfrm>
+          <a:prstGeom xmlns:a="http://schemas.openxmlformats.org/drawingml/2006/main" prst="rect">
+            <a:avLst/>
+          </a:prstGeom>
+          <a:noFill xmlns:a="http://schemas.openxmlformats.org/drawingml/2006/main"/>
+          <a:ln xmlns:a="http://schemas.openxmlformats.org/drawingml/2006/main" w="0">
+            <a:noFill/>
+            <a:prstDash val="solid"/>
+          </a:ln>
+        </p:spPr>
+        <p:txBody>
+          <a:bodyPr xmlns:a="http://schemas.openxmlformats.org/drawingml/2006/main"/>
+          <a:lstStyle xmlns:a="http://schemas.openxmlformats.org/drawingml/2006/main"/>
+          <a:p xmlns:a="http://schemas.openxmlformats.org/drawingml/2006/main">
+            <a:pPr algn="l">
+              <a:defRPr sz="975" b="0">
+                <a:solidFill>
+                  <a:srgbClr val="314158"/>
+                </a:solidFill>
+              </a:defRPr>
+            </a:pPr>
+            <a:r>
+              <a:rPr sz="975" b="0">
+                <a:solidFill>
+                  <a:srgbClr val="314158"/>
+                </a:solidFill>
+              </a:rPr>
+              <a:t>Economic burden</a:t>
+            </a:r>
+          </a:p>
+        </p:txBody>
+      </p:sp>
+      <p:sp>
+        <p:nvSpPr>
+          <p:cNvPr id="34" name="">
+            <a:extLst xmlns:a="http://schemas.openxmlformats.org/drawingml/2006/main">
+              <a:ext uri="{FF2B5EF4-FFF2-40B4-BE49-F238E27FC236}">
+                <a16:creationId xmlns:a16="http://schemas.microsoft.com/office/drawing/2014/main" id="{84165757-8D80-4A93-846E-82099D503C34}"/>
+              </a:ext>
+            </a:extLst>
+          </p:cNvPr>
+          <p:cNvSpPr>
+            <a:spLocks xmlns:a="http://schemas.openxmlformats.org/drawingml/2006/main" noGrp="1"/>
+          </p:cNvSpPr>
+          <p:nvPr/>
+        </p:nvSpPr>
+        <p:spPr>
+          <a:xfrm xmlns:a="http://schemas.openxmlformats.org/drawingml/2006/main">
+            <a:off x="685800" y="3943350"/>
+            <a:ext cx="3429000" cy="438150"/>
+          </a:xfrm>
+          <a:prstGeom xmlns:a="http://schemas.openxmlformats.org/drawingml/2006/main" prst="roundRect">
+            <a:avLst>
+              <a:gd name="adj" fmla="val 17391"/>
+            </a:avLst>
+          </a:prstGeom>
+          <a:solidFill xmlns:a="http://schemas.openxmlformats.org/drawingml/2006/main">
+            <a:srgbClr val="F1F5F9"/>
+          </a:solidFill>
+          <a:ln xmlns:a="http://schemas.openxmlformats.org/drawingml/2006/main" w="9525">
+            <a:solidFill>
+              <a:srgbClr val="E2E8F0"/>
+            </a:solidFill>
+            <a:prstDash val="solid"/>
+          </a:ln>
+        </p:spPr>
+      </p:sp>
+      <p:sp>
+        <p:nvSpPr>
+          <p:cNvPr id="35" name="">
+            <a:extLst xmlns:a="http://schemas.openxmlformats.org/drawingml/2006/main">
+              <a:ext uri="{FF2B5EF4-FFF2-40B4-BE49-F238E27FC236}">
+                <a16:creationId xmlns:a16="http://schemas.microsoft.com/office/drawing/2014/main" id="{71138C89-9FBD-416B-90BB-9D33C3037C5A}"/>
+              </a:ext>
+            </a:extLst>
+          </p:cNvPr>
+          <p:cNvSpPr>
+            <a:spLocks xmlns:a="http://schemas.openxmlformats.org/drawingml/2006/main" noGrp="1"/>
+          </p:cNvSpPr>
+          <p:nvPr/>
+        </p:nvSpPr>
+        <p:spPr>
+          <a:xfrm xmlns:a="http://schemas.openxmlformats.org/drawingml/2006/main">
+            <a:off x="781050" y="4019550"/>
+            <a:ext cx="3238500" cy="304800"/>
+          </a:xfrm>
+          <a:prstGeom xmlns:a="http://schemas.openxmlformats.org/drawingml/2006/main" prst="rect">
+            <a:avLst/>
+          </a:prstGeom>
+          <a:noFill xmlns:a="http://schemas.openxmlformats.org/drawingml/2006/main"/>
+          <a:ln xmlns:a="http://schemas.openxmlformats.org/drawingml/2006/main" w="0">
+            <a:noFill/>
+            <a:prstDash val="solid"/>
+          </a:ln>
+        </p:spPr>
+        <p:txBody>
+          <a:bodyPr xmlns:a="http://schemas.openxmlformats.org/drawingml/2006/main"/>
+          <a:lstStyle xmlns:a="http://schemas.openxmlformats.org/drawingml/2006/main"/>
+          <a:p xmlns:a="http://schemas.openxmlformats.org/drawingml/2006/main">
+            <a:pPr algn="l">
+              <a:defRPr sz="975" b="0">
+                <a:solidFill>
+                  <a:srgbClr val="314158"/>
+                </a:solidFill>
+              </a:defRPr>
+            </a:pPr>
+            <a:r>
+              <a:rPr sz="975" b="0">
+                <a:solidFill>
+                  <a:srgbClr val="314158"/>
+                </a:solidFill>
+              </a:rPr>
+              <a:t>ART clinic count</a:t>
+            </a:r>
+          </a:p>
+        </p:txBody>
+      </p:sp>
+      <p:sp>
+        <p:nvSpPr>
+          <p:cNvPr id="36" name="">
+            <a:extLst xmlns:a="http://schemas.openxmlformats.org/drawingml/2006/main">
+              <a:ext uri="{FF2B5EF4-FFF2-40B4-BE49-F238E27FC236}">
+                <a16:creationId xmlns:a16="http://schemas.microsoft.com/office/drawing/2014/main" id="{36A907EE-A0B2-4567-B8AE-4C075AE469E2}"/>
+              </a:ext>
+            </a:extLst>
+          </p:cNvPr>
+          <p:cNvSpPr>
+            <a:spLocks xmlns:a="http://schemas.openxmlformats.org/drawingml/2006/main" noGrp="1"/>
+          </p:cNvSpPr>
+          <p:nvPr/>
+        </p:nvSpPr>
+        <p:spPr>
+          <a:xfrm xmlns:a="http://schemas.openxmlformats.org/drawingml/2006/main">
+            <a:off x="4114800" y="3943350"/>
+            <a:ext cx="2857500" cy="438150"/>
+          </a:xfrm>
+          <a:prstGeom xmlns:a="http://schemas.openxmlformats.org/drawingml/2006/main" prst="roundRect">
+            <a:avLst>
+              <a:gd name="adj" fmla="val 17391"/>
+            </a:avLst>
+          </a:prstGeom>
+          <a:solidFill xmlns:a="http://schemas.openxmlformats.org/drawingml/2006/main">
+            <a:srgbClr val="F1F5F9"/>
+          </a:solidFill>
+          <a:ln xmlns:a="http://schemas.openxmlformats.org/drawingml/2006/main" w="9525">
+            <a:solidFill>
+              <a:srgbClr val="E2E8F0"/>
+            </a:solidFill>
+            <a:prstDash val="solid"/>
+          </a:ln>
+        </p:spPr>
+      </p:sp>
+      <p:sp>
+        <p:nvSpPr>
+          <p:cNvPr id="37" name="">
+            <a:extLst xmlns:a="http://schemas.openxmlformats.org/drawingml/2006/main">
+              <a:ext uri="{FF2B5EF4-FFF2-40B4-BE49-F238E27FC236}">
+                <a16:creationId xmlns:a16="http://schemas.microsoft.com/office/drawing/2014/main" id="{C73FB9AF-3430-4CBB-B848-3F635F8167C8}"/>
+              </a:ext>
+            </a:extLst>
+          </p:cNvPr>
+          <p:cNvSpPr>
+            <a:spLocks xmlns:a="http://schemas.openxmlformats.org/drawingml/2006/main" noGrp="1"/>
+          </p:cNvSpPr>
+          <p:nvPr/>
+        </p:nvSpPr>
+        <p:spPr>
+          <a:xfrm xmlns:a="http://schemas.openxmlformats.org/drawingml/2006/main">
+            <a:off x="4210050" y="4019550"/>
+            <a:ext cx="2667000" cy="304800"/>
+          </a:xfrm>
+          <a:prstGeom xmlns:a="http://schemas.openxmlformats.org/drawingml/2006/main" prst="rect">
+            <a:avLst/>
+          </a:prstGeom>
+          <a:noFill xmlns:a="http://schemas.openxmlformats.org/drawingml/2006/main"/>
+          <a:ln xmlns:a="http://schemas.openxmlformats.org/drawingml/2006/main" w="0">
+            <a:noFill/>
+            <a:prstDash val="solid"/>
+          </a:ln>
+        </p:spPr>
+        <p:txBody>
+          <a:bodyPr xmlns:a="http://schemas.openxmlformats.org/drawingml/2006/main"/>
+          <a:lstStyle xmlns:a="http://schemas.openxmlformats.org/drawingml/2006/main"/>
+          <a:p xmlns:a="http://schemas.openxmlformats.org/drawingml/2006/main">
+            <a:pPr algn="l">
+              <a:defRPr sz="975" b="0">
+                <a:solidFill>
+                  <a:srgbClr val="314158"/>
+                </a:solidFill>
+              </a:defRPr>
+            </a:pPr>
+            <a:r>
+              <a:rPr sz="975" b="0">
+                <a:solidFill>
+                  <a:srgbClr val="314158"/>
+                </a:solidFill>
+              </a:rPr>
+              <a:t>308 ICMR-enrolled clinics in 2015</a:t>
+            </a:r>
+          </a:p>
+        </p:txBody>
+      </p:sp>
+      <p:sp>
+        <p:nvSpPr>
+          <p:cNvPr id="38" name="">
+            <a:extLst xmlns:a="http://schemas.openxmlformats.org/drawingml/2006/main">
+              <a:ext uri="{FF2B5EF4-FFF2-40B4-BE49-F238E27FC236}">
+                <a16:creationId xmlns:a16="http://schemas.microsoft.com/office/drawing/2014/main" id="{92D5CA2B-CB22-42EE-A2BB-22A7ACCCB8B8}"/>
+              </a:ext>
+            </a:extLst>
+          </p:cNvPr>
+          <p:cNvSpPr>
+            <a:spLocks xmlns:a="http://schemas.openxmlformats.org/drawingml/2006/main" noGrp="1"/>
+          </p:cNvSpPr>
+          <p:nvPr/>
+        </p:nvSpPr>
+        <p:spPr>
+          <a:xfrm xmlns:a="http://schemas.openxmlformats.org/drawingml/2006/main">
+            <a:off x="6972300" y="3943350"/>
+            <a:ext cx="4533900" cy="438150"/>
+          </a:xfrm>
+          <a:prstGeom xmlns:a="http://schemas.openxmlformats.org/drawingml/2006/main" prst="roundRect">
+            <a:avLst>
+              <a:gd name="adj" fmla="val 17391"/>
+            </a:avLst>
+          </a:prstGeom>
+          <a:solidFill xmlns:a="http://schemas.openxmlformats.org/drawingml/2006/main">
+            <a:srgbClr val="F1F5F9"/>
+          </a:solidFill>
+          <a:ln xmlns:a="http://schemas.openxmlformats.org/drawingml/2006/main" w="9525">
+            <a:solidFill>
+              <a:srgbClr val="E2E8F0"/>
+            </a:solidFill>
+            <a:prstDash val="solid"/>
+          </a:ln>
+        </p:spPr>
+      </p:sp>
+      <p:sp>
+        <p:nvSpPr>
+          <p:cNvPr id="39" name="">
+            <a:extLst xmlns:a="http://schemas.openxmlformats.org/drawingml/2006/main">
+              <a:ext uri="{FF2B5EF4-FFF2-40B4-BE49-F238E27FC236}">
+                <a16:creationId xmlns:a16="http://schemas.microsoft.com/office/drawing/2014/main" id="{0F21158C-7CE4-4B38-8A7A-72B26B10960D}"/>
+              </a:ext>
+            </a:extLst>
+          </p:cNvPr>
+          <p:cNvSpPr>
+            <a:spLocks xmlns:a="http://schemas.openxmlformats.org/drawingml/2006/main" noGrp="1"/>
+          </p:cNvSpPr>
+          <p:nvPr/>
+        </p:nvSpPr>
+        <p:spPr>
+          <a:xfrm xmlns:a="http://schemas.openxmlformats.org/drawingml/2006/main">
+            <a:off x="7067550" y="4019550"/>
+            <a:ext cx="4343400" cy="304800"/>
+          </a:xfrm>
+          <a:prstGeom xmlns:a="http://schemas.openxmlformats.org/drawingml/2006/main" prst="rect">
+            <a:avLst/>
+          </a:prstGeom>
+          <a:noFill xmlns:a="http://schemas.openxmlformats.org/drawingml/2006/main"/>
+          <a:ln xmlns:a="http://schemas.openxmlformats.org/drawingml/2006/main" w="0">
+            <a:noFill/>
+            <a:prstDash val="solid"/>
+          </a:ln>
+        </p:spPr>
+        <p:txBody>
+          <a:bodyPr xmlns:a="http://schemas.openxmlformats.org/drawingml/2006/main"/>
+          <a:lstStyle xmlns:a="http://schemas.openxmlformats.org/drawingml/2006/main"/>
+          <a:p xmlns:a="http://schemas.openxmlformats.org/drawingml/2006/main">
+            <a:pPr algn="l">
+              <a:defRPr sz="975" b="0">
+                <a:solidFill>
+                  <a:srgbClr val="314158"/>
+                </a:solidFill>
+              </a:defRPr>
+            </a:pPr>
+            <a:r>
+              <a:rPr sz="975" b="0">
+                <a:solidFill>
+                  <a:srgbClr val="314158"/>
+                </a:solidFill>
+              </a:rPr>
+              <a:t>Use as old context only</a:t>
+            </a:r>
+          </a:p>
+        </p:txBody>
+      </p:sp>
+      <p:sp>
+        <p:nvSpPr>
+          <p:cNvPr id="40" name="">
+            <a:extLst xmlns:a="http://schemas.openxmlformats.org/drawingml/2006/main">
+              <a:ext uri="{FF2B5EF4-FFF2-40B4-BE49-F238E27FC236}">
+                <a16:creationId xmlns:a16="http://schemas.microsoft.com/office/drawing/2014/main" id="{B375EAE7-82BA-4A3D-8DD7-8AF951E478AC}"/>
+              </a:ext>
+            </a:extLst>
+          </p:cNvPr>
+          <p:cNvSpPr>
+            <a:spLocks xmlns:a="http://schemas.openxmlformats.org/drawingml/2006/main" noGrp="1"/>
+          </p:cNvSpPr>
+          <p:nvPr/>
+        </p:nvSpPr>
+        <p:spPr>
+          <a:xfrm xmlns:a="http://schemas.openxmlformats.org/drawingml/2006/main">
+            <a:off x="876300" y="5619750"/>
+            <a:ext cx="9906000" cy="419100"/>
+          </a:xfrm>
+          <a:prstGeom xmlns:a="http://schemas.openxmlformats.org/drawingml/2006/main" prst="rect">
+            <a:avLst/>
+          </a:prstGeom>
+          <a:noFill xmlns:a="http://schemas.openxmlformats.org/drawingml/2006/main"/>
+          <a:ln xmlns:a="http://schemas.openxmlformats.org/drawingml/2006/main" w="0">
+            <a:noFill/>
+            <a:prstDash val="solid"/>
+          </a:ln>
+        </p:spPr>
+        <p:txBody>
+          <a:bodyPr xmlns:a="http://schemas.openxmlformats.org/drawingml/2006/main"/>
+          <a:lstStyle xmlns:a="http://schemas.openxmlformats.org/drawingml/2006/main"/>
+          <a:p xmlns:a="http://schemas.openxmlformats.org/drawingml/2006/main">
+            <a:pPr algn="l">
+              <a:defRPr sz="1350" b="1">
+                <a:solidFill>
+                  <a:srgbClr val="1D293D"/>
+                </a:solidFill>
+              </a:defRPr>
+            </a:pPr>
+            <a:r>
+              <a:rPr sz="1350" b="1">
+                <a:solidFill>
+                  <a:srgbClr val="1D293D"/>
+                </a:solidFill>
+              </a:rPr>
+              <a:t>Core rule: always say whether the outcome is per cycle, retrieval, embryo transfer or cumulative live birth.</a:t>
+            </a:r>
+          </a:p>
+        </p:txBody>
+      </p:sp>
+      <p:sp>
+        <p:nvSpPr>
+          <p:cNvPr id="41" name="">
+            <a:extLst xmlns:a="http://schemas.openxmlformats.org/drawingml/2006/main">
+              <a:ext uri="{FF2B5EF4-FFF2-40B4-BE49-F238E27FC236}">
+                <a16:creationId xmlns:a16="http://schemas.microsoft.com/office/drawing/2014/main" id="{783082AA-EF9C-4A93-A31F-0A1DA96F6901}"/>
+              </a:ext>
+            </a:extLst>
+          </p:cNvPr>
+          <p:cNvSpPr>
+            <a:spLocks xmlns:a="http://schemas.openxmlformats.org/drawingml/2006/main" noGrp="1"/>
+          </p:cNvSpPr>
+          <p:nvPr/>
+        </p:nvSpPr>
+        <p:spPr>
+          <a:xfrm xmlns:a="http://schemas.openxmlformats.org/drawingml/2006/main">
+            <a:off x="685800" y="6400800"/>
+            <a:ext cx="2857500" cy="190500"/>
+          </a:xfrm>
+          <a:prstGeom xmlns:a="http://schemas.openxmlformats.org/drawingml/2006/main" prst="rect">
+            <a:avLst/>
+          </a:prstGeom>
+          <a:noFill xmlns:a="http://schemas.openxmlformats.org/drawingml/2006/main"/>
+          <a:ln xmlns:a="http://schemas.openxmlformats.org/drawingml/2006/main" w="0">
+            <a:noFill/>
+            <a:prstDash val="solid"/>
+          </a:ln>
+        </p:spPr>
+        <p:txBody>
+          <a:bodyPr xmlns:a="http://schemas.openxmlformats.org/drawingml/2006/main"/>
+          <a:lstStyle xmlns:a="http://schemas.openxmlformats.org/drawingml/2006/main"/>
+          <a:p xmlns:a="http://schemas.openxmlformats.org/drawingml/2006/main">
+            <a:pPr algn="l">
+              <a:defRPr sz="825" b="0">
+                <a:solidFill>
+                  <a:srgbClr val="90A1B9"/>
+                </a:solidFill>
+              </a:defRPr>
+            </a:pPr>
+            <a:r>
+              <a:rPr sz="825" b="0">
+                <a:solidFill>
+                  <a:srgbClr val="90A1B9"/>
+                </a:solidFill>
+              </a:rPr>
+              <a:t>Faculty backup slide 1</a:t>
+            </a:r>
+          </a:p>
+        </p:txBody>
+      </p:sp>
+    </p:spTree>
+    <p:extLst>
+      <p:ext uri="{BB962C8B-B14F-4D97-AF65-F5344CB8AC3E}">
+        <p14:creationId xmlns:p14="http://schemas.microsoft.com/office/powerpoint/2010/main" val="1464993677"/>
+      </p:ext>
+    </p:extLst>
+  </p:cSld>
+</p:sld>
+</file>
+
+<file path=ppt/slides/slide19.xml><?xml version="1.0" encoding="utf-8"?>
+<p:sld xmlns:p="http://schemas.openxmlformats.org/presentationml/2006/main">
+  <p:cSld>
+    <p:bg>
+      <p:bgPr>
+        <a:solidFill xmlns:a="http://schemas.openxmlformats.org/drawingml/2006/main">
+          <a:srgbClr val="F8FAFC"/>
+        </a:solidFill>
+      </p:bgPr>
+    </p:bg>
+    <p:spTree>
+      <p:nvGrpSpPr>
+        <p:cNvPr id="1" name=""/>
+        <p:cNvGrpSpPr/>
+        <p:nvPr/>
+      </p:nvGrpSpPr>
+      <p:grpSpPr>
+        <a:xfrm xmlns:a="http://schemas.openxmlformats.org/drawingml/2006/main"/>
+      </p:grpSpPr>
+      <p:sp>
+        <p:nvSpPr>
+          <p:cNvPr id="1" name="">
+            <a:extLst xmlns:a="http://schemas.openxmlformats.org/drawingml/2006/main">
+              <a:ext uri="{FF2B5EF4-FFF2-40B4-BE49-F238E27FC236}">
+                <a16:creationId xmlns:a16="http://schemas.microsoft.com/office/drawing/2014/main" id="{CB99BF55-17EC-4DBD-92F5-EF313309AB41}"/>
+              </a:ext>
+            </a:extLst>
+          </p:cNvPr>
+          <p:cNvSpPr>
+            <a:spLocks xmlns:a="http://schemas.openxmlformats.org/drawingml/2006/main" noGrp="1"/>
+          </p:cNvSpPr>
+          <p:nvPr/>
+        </p:nvSpPr>
+        <p:spPr>
+          <a:xfrm xmlns:a="http://schemas.openxmlformats.org/drawingml/2006/main">
+            <a:off x="685800" y="419100"/>
+            <a:ext cx="1714500" cy="228600"/>
+          </a:xfrm>
+          <a:prstGeom xmlns:a="http://schemas.openxmlformats.org/drawingml/2006/main" prst="rect">
+            <a:avLst/>
+          </a:prstGeom>
+          <a:noFill xmlns:a="http://schemas.openxmlformats.org/drawingml/2006/main"/>
+          <a:ln xmlns:a="http://schemas.openxmlformats.org/drawingml/2006/main" w="0">
+            <a:noFill/>
+            <a:prstDash val="solid"/>
+          </a:ln>
+        </p:spPr>
+        <p:txBody>
+          <a:bodyPr xmlns:a="http://schemas.openxmlformats.org/drawingml/2006/main"/>
+          <a:lstStyle xmlns:a="http://schemas.openxmlformats.org/drawingml/2006/main"/>
+          <a:p xmlns:a="http://schemas.openxmlformats.org/drawingml/2006/main">
+            <a:pPr algn="l">
+              <a:defRPr sz="975" b="1">
+                <a:solidFill>
+                  <a:srgbClr val="00786F"/>
+                </a:solidFill>
+              </a:defRPr>
+            </a:pPr>
+            <a:r>
+              <a:rPr sz="975" b="1">
+                <a:solidFill>
+                  <a:srgbClr val="00786F"/>
+                </a:solidFill>
+              </a:rPr>
+              <a:t>APPENDIX</a:t>
+            </a:r>
+          </a:p>
+        </p:txBody>
+      </p:sp>
+      <p:sp>
+        <p:nvSpPr>
+          <p:cNvPr id="2" name="">
+            <a:extLst xmlns:a="http://schemas.openxmlformats.org/drawingml/2006/main">
+              <a:ext uri="{FF2B5EF4-FFF2-40B4-BE49-F238E27FC236}">
+                <a16:creationId xmlns:a16="http://schemas.microsoft.com/office/drawing/2014/main" id="{A702E05E-E585-46E3-9FEE-D1956D90E919}"/>
+              </a:ext>
+            </a:extLst>
+          </p:cNvPr>
+          <p:cNvSpPr>
+            <a:spLocks xmlns:a="http://schemas.openxmlformats.org/drawingml/2006/main" noGrp="1"/>
+          </p:cNvSpPr>
+          <p:nvPr/>
+        </p:nvSpPr>
+        <p:spPr>
+          <a:xfrm xmlns:a="http://schemas.openxmlformats.org/drawingml/2006/main">
+            <a:off x="685800" y="742950"/>
+            <a:ext cx="8572500" cy="514350"/>
+          </a:xfrm>
+          <a:prstGeom xmlns:a="http://schemas.openxmlformats.org/drawingml/2006/main" prst="rect">
+            <a:avLst/>
+          </a:prstGeom>
+          <a:noFill xmlns:a="http://schemas.openxmlformats.org/drawingml/2006/main"/>
+          <a:ln xmlns:a="http://schemas.openxmlformats.org/drawingml/2006/main" w="0">
+            <a:noFill/>
+            <a:prstDash val="solid"/>
+          </a:ln>
+        </p:spPr>
+        <p:txBody>
+          <a:bodyPr xmlns:a="http://schemas.openxmlformats.org/drawingml/2006/main"/>
+          <a:lstStyle xmlns:a="http://schemas.openxmlformats.org/drawingml/2006/main"/>
+          <a:p xmlns:a="http://schemas.openxmlformats.org/drawingml/2006/main">
+            <a:pPr algn="l">
+              <a:defRPr sz="2550" b="1">
+                <a:solidFill>
+                  <a:srgbClr val="020618"/>
+                </a:solidFill>
+              </a:defRPr>
+            </a:pPr>
+            <a:r>
+              <a:rPr sz="2550" b="1">
+                <a:solidFill>
+                  <a:srgbClr val="020618"/>
+                </a:solidFill>
+              </a:rPr>
+              <a:t>Panel backup: difficult questions</a:t>
+            </a:r>
+          </a:p>
+        </p:txBody>
+      </p:sp>
+      <p:sp>
+        <p:nvSpPr>
+          <p:cNvPr id="3" name="">
+            <a:extLst xmlns:a="http://schemas.openxmlformats.org/drawingml/2006/main">
+              <a:ext uri="{FF2B5EF4-FFF2-40B4-BE49-F238E27FC236}">
+                <a16:creationId xmlns:a16="http://schemas.microsoft.com/office/drawing/2014/main" id="{E39E5707-28CA-4102-9EBF-9852A7236860}"/>
+              </a:ext>
+            </a:extLst>
+          </p:cNvPr>
+          <p:cNvSpPr>
+            <a:spLocks xmlns:a="http://schemas.openxmlformats.org/drawingml/2006/main" noGrp="1"/>
+          </p:cNvSpPr>
+          <p:nvPr/>
+        </p:nvSpPr>
+        <p:spPr>
+          <a:xfrm xmlns:a="http://schemas.openxmlformats.org/drawingml/2006/main">
+            <a:off x="685800" y="1238250"/>
+            <a:ext cx="9048750" cy="400050"/>
+          </a:xfrm>
+          <a:prstGeom xmlns:a="http://schemas.openxmlformats.org/drawingml/2006/main" prst="rect">
+            <a:avLst/>
+          </a:prstGeom>
+          <a:noFill xmlns:a="http://schemas.openxmlformats.org/drawingml/2006/main"/>
+          <a:ln xmlns:a="http://schemas.openxmlformats.org/drawingml/2006/main" w="0">
+            <a:noFill/>
+            <a:prstDash val="solid"/>
+          </a:ln>
+        </p:spPr>
+        <p:txBody>
+          <a:bodyPr xmlns:a="http://schemas.openxmlformats.org/drawingml/2006/main"/>
+          <a:lstStyle xmlns:a="http://schemas.openxmlformats.org/drawingml/2006/main"/>
+          <a:p xmlns:a="http://schemas.openxmlformats.org/drawingml/2006/main">
+            <a:pPr algn="l">
+              <a:defRPr sz="1350" b="0">
+                <a:solidFill>
+                  <a:srgbClr val="45556C"/>
+                </a:solidFill>
+              </a:defRPr>
+            </a:pPr>
+            <a:r>
+              <a:rPr sz="1350" b="0">
+                <a:solidFill>
+                  <a:srgbClr val="45556C"/>
+                </a:solidFill>
+              </a:rPr>
+              <a:t>Short answers that keep the research position scientifically safe.</a:t>
+            </a:r>
+          </a:p>
+        </p:txBody>
+      </p:sp>
+      <p:sp>
+        <p:nvSpPr>
+          <p:cNvPr id="4" name="">
+            <a:extLst xmlns:a="http://schemas.openxmlformats.org/drawingml/2006/main">
+              <a:ext uri="{FF2B5EF4-FFF2-40B4-BE49-F238E27FC236}">
+                <a16:creationId xmlns:a16="http://schemas.microsoft.com/office/drawing/2014/main" id="{CAE56255-3823-415F-BA62-939E982CA826}"/>
+              </a:ext>
+            </a:extLst>
+          </p:cNvPr>
+          <p:cNvSpPr>
+            <a:spLocks xmlns:a="http://schemas.openxmlformats.org/drawingml/2006/main" noGrp="1"/>
+          </p:cNvSpPr>
+          <p:nvPr/>
+        </p:nvSpPr>
+        <p:spPr>
+          <a:xfrm xmlns:a="http://schemas.openxmlformats.org/drawingml/2006/main">
+            <a:off x="685800" y="1809750"/>
+            <a:ext cx="2857500" cy="381000"/>
+          </a:xfrm>
+          <a:prstGeom xmlns:a="http://schemas.openxmlformats.org/drawingml/2006/main" prst="roundRect">
+            <a:avLst>
+              <a:gd name="adj" fmla="val 20000"/>
+            </a:avLst>
+          </a:prstGeom>
+          <a:solidFill xmlns:a="http://schemas.openxmlformats.org/drawingml/2006/main">
+            <a:srgbClr val="00786F"/>
+          </a:solidFill>
+          <a:ln xmlns:a="http://schemas.openxmlformats.org/drawingml/2006/main" w="9525">
+            <a:solidFill>
+              <a:srgbClr val="00786F"/>
+            </a:solidFill>
+            <a:prstDash val="solid"/>
+          </a:ln>
+        </p:spPr>
+      </p:sp>
+      <p:sp>
+        <p:nvSpPr>
+          <p:cNvPr id="5" name="">
+            <a:extLst xmlns:a="http://schemas.openxmlformats.org/drawingml/2006/main">
+              <a:ext uri="{FF2B5EF4-FFF2-40B4-BE49-F238E27FC236}">
+                <a16:creationId xmlns:a16="http://schemas.microsoft.com/office/drawing/2014/main" id="{97458EAF-0727-4772-A241-A64DBAD50929}"/>
+              </a:ext>
+            </a:extLst>
+          </p:cNvPr>
+          <p:cNvSpPr>
+            <a:spLocks xmlns:a="http://schemas.openxmlformats.org/drawingml/2006/main" noGrp="1"/>
+          </p:cNvSpPr>
+          <p:nvPr/>
+        </p:nvSpPr>
+        <p:spPr>
+          <a:xfrm xmlns:a="http://schemas.openxmlformats.org/drawingml/2006/main">
+            <a:off x="781050" y="1885950"/>
+            <a:ext cx="2667000" cy="228600"/>
+          </a:xfrm>
+          <a:prstGeom xmlns:a="http://schemas.openxmlformats.org/drawingml/2006/main" prst="rect">
+            <a:avLst/>
+          </a:prstGeom>
+          <a:noFill xmlns:a="http://schemas.openxmlformats.org/drawingml/2006/main"/>
+          <a:ln xmlns:a="http://schemas.openxmlformats.org/drawingml/2006/main" w="0">
+            <a:noFill/>
+            <a:prstDash val="solid"/>
+          </a:ln>
+        </p:spPr>
+        <p:txBody>
+          <a:bodyPr xmlns:a="http://schemas.openxmlformats.org/drawingml/2006/main"/>
+          <a:lstStyle xmlns:a="http://schemas.openxmlformats.org/drawingml/2006/main"/>
+          <a:p xmlns:a="http://schemas.openxmlformats.org/drawingml/2006/main">
+            <a:pPr algn="l">
+              <a:defRPr sz="1050" b="1">
+                <a:solidFill>
+                  <a:srgbClr val="FFFFFF"/>
+                </a:solidFill>
+              </a:defRPr>
+            </a:pPr>
+            <a:r>
+              <a:rPr sz="1050" b="1">
+                <a:solidFill>
+                  <a:srgbClr val="FFFFFF"/>
+                </a:solidFill>
+              </a:rPr>
+              <a:t>Question</a:t>
+            </a:r>
+          </a:p>
+        </p:txBody>
+      </p:sp>
+      <p:sp>
+        <p:nvSpPr>
+          <p:cNvPr id="6" name="">
+            <a:extLst xmlns:a="http://schemas.openxmlformats.org/drawingml/2006/main">
+              <a:ext uri="{FF2B5EF4-FFF2-40B4-BE49-F238E27FC236}">
+                <a16:creationId xmlns:a16="http://schemas.microsoft.com/office/drawing/2014/main" id="{7B52FA71-382F-4A3C-8360-2485590433A6}"/>
+              </a:ext>
+            </a:extLst>
+          </p:cNvPr>
+          <p:cNvSpPr>
+            <a:spLocks xmlns:a="http://schemas.openxmlformats.org/drawingml/2006/main" noGrp="1"/>
+          </p:cNvSpPr>
+          <p:nvPr/>
+        </p:nvSpPr>
+        <p:spPr>
+          <a:xfrm xmlns:a="http://schemas.openxmlformats.org/drawingml/2006/main">
+            <a:off x="3543300" y="1809750"/>
+            <a:ext cx="7962900" cy="381000"/>
+          </a:xfrm>
+          <a:prstGeom xmlns:a="http://schemas.openxmlformats.org/drawingml/2006/main" prst="roundRect">
+            <a:avLst>
+              <a:gd name="adj" fmla="val 20000"/>
+            </a:avLst>
+          </a:prstGeom>
+          <a:solidFill xmlns:a="http://schemas.openxmlformats.org/drawingml/2006/main">
+            <a:srgbClr val="00786F"/>
+          </a:solidFill>
+          <a:ln xmlns:a="http://schemas.openxmlformats.org/drawingml/2006/main" w="9525">
+            <a:solidFill>
+              <a:srgbClr val="00786F"/>
+            </a:solidFill>
+            <a:prstDash val="solid"/>
+          </a:ln>
+        </p:spPr>
+      </p:sp>
+      <p:sp>
+        <p:nvSpPr>
+          <p:cNvPr id="7" name="">
+            <a:extLst xmlns:a="http://schemas.openxmlformats.org/drawingml/2006/main">
+              <a:ext uri="{FF2B5EF4-FFF2-40B4-BE49-F238E27FC236}">
+                <a16:creationId xmlns:a16="http://schemas.microsoft.com/office/drawing/2014/main" id="{86395E6C-BF4D-419E-9AD4-6A9C834FC2CF}"/>
+              </a:ext>
+            </a:extLst>
+          </p:cNvPr>
+          <p:cNvSpPr>
+            <a:spLocks xmlns:a="http://schemas.openxmlformats.org/drawingml/2006/main" noGrp="1"/>
+          </p:cNvSpPr>
+          <p:nvPr/>
+        </p:nvSpPr>
+        <p:spPr>
+          <a:xfrm xmlns:a="http://schemas.openxmlformats.org/drawingml/2006/main">
+            <a:off x="3638550" y="1885950"/>
+            <a:ext cx="7772400" cy="228600"/>
+          </a:xfrm>
+          <a:prstGeom xmlns:a="http://schemas.openxmlformats.org/drawingml/2006/main" prst="rect">
+            <a:avLst/>
+          </a:prstGeom>
+          <a:noFill xmlns:a="http://schemas.openxmlformats.org/drawingml/2006/main"/>
+          <a:ln xmlns:a="http://schemas.openxmlformats.org/drawingml/2006/main" w="0">
+            <a:noFill/>
+            <a:prstDash val="solid"/>
+          </a:ln>
+        </p:spPr>
+        <p:txBody>
+          <a:bodyPr xmlns:a="http://schemas.openxmlformats.org/drawingml/2006/main"/>
+          <a:lstStyle xmlns:a="http://schemas.openxmlformats.org/drawingml/2006/main"/>
+          <a:p xmlns:a="http://schemas.openxmlformats.org/drawingml/2006/main">
+            <a:pPr algn="l">
+              <a:defRPr sz="1050" b="1">
+                <a:solidFill>
+                  <a:srgbClr val="FFFFFF"/>
+                </a:solidFill>
+              </a:defRPr>
+            </a:pPr>
+            <a:r>
+              <a:rPr sz="1050" b="1">
+                <a:solidFill>
+                  <a:srgbClr val="FFFFFF"/>
+                </a:solidFill>
+              </a:rPr>
+              <a:t>Answer</a:t>
+            </a:r>
+          </a:p>
+        </p:txBody>
+      </p:sp>
+      <p:sp>
+        <p:nvSpPr>
+          <p:cNvPr id="8" name="">
+            <a:extLst xmlns:a="http://schemas.openxmlformats.org/drawingml/2006/main">
+              <a:ext uri="{FF2B5EF4-FFF2-40B4-BE49-F238E27FC236}">
+                <a16:creationId xmlns:a16="http://schemas.microsoft.com/office/drawing/2014/main" id="{9B23EFA3-D6A6-4067-BDB7-08E9ADC1924E}"/>
+              </a:ext>
+            </a:extLst>
+          </p:cNvPr>
+          <p:cNvSpPr>
+            <a:spLocks xmlns:a="http://schemas.openxmlformats.org/drawingml/2006/main" noGrp="1"/>
+          </p:cNvSpPr>
+          <p:nvPr/>
+        </p:nvSpPr>
+        <p:spPr>
+          <a:xfrm xmlns:a="http://schemas.openxmlformats.org/drawingml/2006/main">
+            <a:off x="685800" y="2190750"/>
+            <a:ext cx="2857500" cy="438150"/>
+          </a:xfrm>
+          <a:prstGeom xmlns:a="http://schemas.openxmlformats.org/drawingml/2006/main" prst="roundRect">
+            <a:avLst>
+              <a:gd name="adj" fmla="val 17391"/>
+            </a:avLst>
+          </a:prstGeom>
+          <a:solidFill xmlns:a="http://schemas.openxmlformats.org/drawingml/2006/main">
+            <a:srgbClr val="F1F5F9"/>
+          </a:solidFill>
+          <a:ln xmlns:a="http://schemas.openxmlformats.org/drawingml/2006/main" w="9525">
+            <a:solidFill>
+              <a:srgbClr val="E2E8F0"/>
+            </a:solidFill>
+            <a:prstDash val="solid"/>
+          </a:ln>
+        </p:spPr>
+      </p:sp>
+      <p:sp>
+        <p:nvSpPr>
+          <p:cNvPr id="9" name="">
+            <a:extLst xmlns:a="http://schemas.openxmlformats.org/drawingml/2006/main">
+              <a:ext uri="{FF2B5EF4-FFF2-40B4-BE49-F238E27FC236}">
+                <a16:creationId xmlns:a16="http://schemas.microsoft.com/office/drawing/2014/main" id="{1FC12176-2195-48C6-B29D-F04DB770D306}"/>
+              </a:ext>
+            </a:extLst>
+          </p:cNvPr>
+          <p:cNvSpPr>
+            <a:spLocks xmlns:a="http://schemas.openxmlformats.org/drawingml/2006/main" noGrp="1"/>
+          </p:cNvSpPr>
+          <p:nvPr/>
+        </p:nvSpPr>
+        <p:spPr>
+          <a:xfrm xmlns:a="http://schemas.openxmlformats.org/drawingml/2006/main">
+            <a:off x="781050" y="2266950"/>
+            <a:ext cx="2667000" cy="304800"/>
+          </a:xfrm>
+          <a:prstGeom xmlns:a="http://schemas.openxmlformats.org/drawingml/2006/main" prst="rect">
+            <a:avLst/>
+          </a:prstGeom>
+          <a:noFill xmlns:a="http://schemas.openxmlformats.org/drawingml/2006/main"/>
+          <a:ln xmlns:a="http://schemas.openxmlformats.org/drawingml/2006/main" w="0">
+            <a:noFill/>
+            <a:prstDash val="solid"/>
+          </a:ln>
+        </p:spPr>
+        <p:txBody>
+          <a:bodyPr xmlns:a="http://schemas.openxmlformats.org/drawingml/2006/main"/>
+          <a:lstStyle xmlns:a="http://schemas.openxmlformats.org/drawingml/2006/main"/>
+          <a:p xmlns:a="http://schemas.openxmlformats.org/drawingml/2006/main">
+            <a:pPr algn="l">
+              <a:defRPr sz="975" b="0">
+                <a:solidFill>
+                  <a:srgbClr val="314158"/>
+                </a:solidFill>
+              </a:defRPr>
+            </a:pPr>
+            <a:r>
+              <a:rPr sz="975" b="0">
+                <a:solidFill>
+                  <a:srgbClr val="314158"/>
+                </a:solidFill>
+              </a:rPr>
+              <a:t>Is this only prediction?</a:t>
+            </a:r>
+          </a:p>
+        </p:txBody>
+      </p:sp>
+      <p:sp>
+        <p:nvSpPr>
+          <p:cNvPr id="10" name="">
+            <a:extLst xmlns:a="http://schemas.openxmlformats.org/drawingml/2006/main">
+              <a:ext uri="{FF2B5EF4-FFF2-40B4-BE49-F238E27FC236}">
+                <a16:creationId xmlns:a16="http://schemas.microsoft.com/office/drawing/2014/main" id="{8BD3C0D4-0443-4481-A78E-FCE61735ED71}"/>
+              </a:ext>
+            </a:extLst>
+          </p:cNvPr>
+          <p:cNvSpPr>
+            <a:spLocks xmlns:a="http://schemas.openxmlformats.org/drawingml/2006/main" noGrp="1"/>
+          </p:cNvSpPr>
+          <p:nvPr/>
+        </p:nvSpPr>
+        <p:spPr>
+          <a:xfrm xmlns:a="http://schemas.openxmlformats.org/drawingml/2006/main">
+            <a:off x="3543300" y="2190750"/>
+            <a:ext cx="7962900" cy="438150"/>
+          </a:xfrm>
+          <a:prstGeom xmlns:a="http://schemas.openxmlformats.org/drawingml/2006/main" prst="roundRect">
+            <a:avLst>
+              <a:gd name="adj" fmla="val 17391"/>
+            </a:avLst>
+          </a:prstGeom>
+          <a:solidFill xmlns:a="http://schemas.openxmlformats.org/drawingml/2006/main">
+            <a:srgbClr val="F1F5F9"/>
+          </a:solidFill>
+          <a:ln xmlns:a="http://schemas.openxmlformats.org/drawingml/2006/main" w="9525">
+            <a:solidFill>
+              <a:srgbClr val="E2E8F0"/>
+            </a:solidFill>
+            <a:prstDash val="solid"/>
+          </a:ln>
+        </p:spPr>
+      </p:sp>
+      <p:sp>
+        <p:nvSpPr>
+          <p:cNvPr id="11" name="">
+            <a:extLst xmlns:a="http://schemas.openxmlformats.org/drawingml/2006/main">
+              <a:ext uri="{FF2B5EF4-FFF2-40B4-BE49-F238E27FC236}">
+                <a16:creationId xmlns:a16="http://schemas.microsoft.com/office/drawing/2014/main" id="{E30A0C9A-343F-4049-8FCE-A5E82342BBFD}"/>
+              </a:ext>
+            </a:extLst>
+          </p:cNvPr>
+          <p:cNvSpPr>
+            <a:spLocks xmlns:a="http://schemas.openxmlformats.org/drawingml/2006/main" noGrp="1"/>
+          </p:cNvSpPr>
+          <p:nvPr/>
+        </p:nvSpPr>
+        <p:spPr>
+          <a:xfrm xmlns:a="http://schemas.openxmlformats.org/drawingml/2006/main">
+            <a:off x="3638550" y="2266950"/>
+            <a:ext cx="7772400" cy="304800"/>
+          </a:xfrm>
+          <a:prstGeom xmlns:a="http://schemas.openxmlformats.org/drawingml/2006/main" prst="rect">
+            <a:avLst/>
+          </a:prstGeom>
+          <a:noFill xmlns:a="http://schemas.openxmlformats.org/drawingml/2006/main"/>
+          <a:ln xmlns:a="http://schemas.openxmlformats.org/drawingml/2006/main" w="0">
+            <a:noFill/>
+            <a:prstDash val="solid"/>
+          </a:ln>
+        </p:spPr>
+        <p:txBody>
+          <a:bodyPr xmlns:a="http://schemas.openxmlformats.org/drawingml/2006/main"/>
+          <a:lstStyle xmlns:a="http://schemas.openxmlformats.org/drawingml/2006/main"/>
+          <a:p xmlns:a="http://schemas.openxmlformats.org/drawingml/2006/main">
+            <a:pPr algn="l">
+              <a:defRPr sz="975" b="0">
+                <a:solidFill>
+                  <a:srgbClr val="314158"/>
+                </a:solidFill>
+              </a:defRPr>
+            </a:pPr>
+            <a:r>
+              <a:rPr sz="975" b="0">
+                <a:solidFill>
+                  <a:srgbClr val="314158"/>
+                </a:solidFill>
+              </a:rPr>
+              <a:t>No. The contribution is prediction plus explanation, validation and clinician-facing CDSS design.</a:t>
+            </a:r>
+          </a:p>
+        </p:txBody>
+      </p:sp>
+      <p:sp>
+        <p:nvSpPr>
+          <p:cNvPr id="12" name="">
+            <a:extLst xmlns:a="http://schemas.openxmlformats.org/drawingml/2006/main">
+              <a:ext uri="{FF2B5EF4-FFF2-40B4-BE49-F238E27FC236}">
+                <a16:creationId xmlns:a16="http://schemas.microsoft.com/office/drawing/2014/main" id="{B6C22950-CACB-43AF-AEAA-B7382F4ED1B6}"/>
+              </a:ext>
+            </a:extLst>
+          </p:cNvPr>
+          <p:cNvSpPr>
+            <a:spLocks xmlns:a="http://schemas.openxmlformats.org/drawingml/2006/main" noGrp="1"/>
+          </p:cNvSpPr>
+          <p:nvPr/>
+        </p:nvSpPr>
+        <p:spPr>
+          <a:xfrm xmlns:a="http://schemas.openxmlformats.org/drawingml/2006/main">
+            <a:off x="685800" y="2628900"/>
+            <a:ext cx="2857500" cy="438150"/>
+          </a:xfrm>
+          <a:prstGeom xmlns:a="http://schemas.openxmlformats.org/drawingml/2006/main" prst="roundRect">
+            <a:avLst>
+              <a:gd name="adj" fmla="val 17391"/>
+            </a:avLst>
+          </a:prstGeom>
+          <a:solidFill xmlns:a="http://schemas.openxmlformats.org/drawingml/2006/main">
+            <a:srgbClr val="FFFFFF"/>
+          </a:solidFill>
+          <a:ln xmlns:a="http://schemas.openxmlformats.org/drawingml/2006/main" w="9525">
+            <a:solidFill>
+              <a:srgbClr val="E2E8F0"/>
+            </a:solidFill>
+            <a:prstDash val="solid"/>
+          </a:ln>
+        </p:spPr>
+      </p:sp>
+      <p:sp>
+        <p:nvSpPr>
+          <p:cNvPr id="13" name="">
+            <a:extLst xmlns:a="http://schemas.openxmlformats.org/drawingml/2006/main">
+              <a:ext uri="{FF2B5EF4-FFF2-40B4-BE49-F238E27FC236}">
+                <a16:creationId xmlns:a16="http://schemas.microsoft.com/office/drawing/2014/main" id="{364ADB10-C10F-4A86-AF69-95AE2878E6F9}"/>
+              </a:ext>
+            </a:extLst>
+          </p:cNvPr>
+          <p:cNvSpPr>
+            <a:spLocks xmlns:a="http://schemas.openxmlformats.org/drawingml/2006/main" noGrp="1"/>
+          </p:cNvSpPr>
+          <p:nvPr/>
+        </p:nvSpPr>
+        <p:spPr>
+          <a:xfrm xmlns:a="http://schemas.openxmlformats.org/drawingml/2006/main">
+            <a:off x="781050" y="2705100"/>
+            <a:ext cx="2667000" cy="304800"/>
+          </a:xfrm>
+          <a:prstGeom xmlns:a="http://schemas.openxmlformats.org/drawingml/2006/main" prst="rect">
+            <a:avLst/>
+          </a:prstGeom>
+          <a:noFill xmlns:a="http://schemas.openxmlformats.org/drawingml/2006/main"/>
+          <a:ln xmlns:a="http://schemas.openxmlformats.org/drawingml/2006/main" w="0">
+            <a:noFill/>
+            <a:prstDash val="solid"/>
+          </a:ln>
+        </p:spPr>
+        <p:txBody>
+          <a:bodyPr xmlns:a="http://schemas.openxmlformats.org/drawingml/2006/main"/>
+          <a:lstStyle xmlns:a="http://schemas.openxmlformats.org/drawingml/2006/main"/>
+          <a:p xmlns:a="http://schemas.openxmlformats.org/drawingml/2006/main">
+            <a:pPr algn="l">
+              <a:defRPr sz="975" b="0">
+                <a:solidFill>
+                  <a:srgbClr val="314158"/>
+                </a:solidFill>
+              </a:defRPr>
+            </a:pPr>
+            <a:r>
+              <a:rPr sz="975" b="0">
+                <a:solidFill>
+                  <a:srgbClr val="314158"/>
+                </a:solidFill>
+              </a:rPr>
+              <a:t>Is the final title fixed?</a:t>
+            </a:r>
+          </a:p>
+        </p:txBody>
+      </p:sp>
+      <p:sp>
+        <p:nvSpPr>
+          <p:cNvPr id="14" name="">
+            <a:extLst xmlns:a="http://schemas.openxmlformats.org/drawingml/2006/main">
+              <a:ext uri="{FF2B5EF4-FFF2-40B4-BE49-F238E27FC236}">
+                <a16:creationId xmlns:a16="http://schemas.microsoft.com/office/drawing/2014/main" id="{4937B2C2-A1F8-41F4-8440-0EF8E08B3608}"/>
+              </a:ext>
+            </a:extLst>
+          </p:cNvPr>
+          <p:cNvSpPr>
+            <a:spLocks xmlns:a="http://schemas.openxmlformats.org/drawingml/2006/main" noGrp="1"/>
+          </p:cNvSpPr>
+          <p:nvPr/>
+        </p:nvSpPr>
+        <p:spPr>
+          <a:xfrm xmlns:a="http://schemas.openxmlformats.org/drawingml/2006/main">
+            <a:off x="3543300" y="2628900"/>
+            <a:ext cx="7962900" cy="438150"/>
+          </a:xfrm>
+          <a:prstGeom xmlns:a="http://schemas.openxmlformats.org/drawingml/2006/main" prst="roundRect">
+            <a:avLst>
+              <a:gd name="adj" fmla="val 17391"/>
+            </a:avLst>
+          </a:prstGeom>
+          <a:solidFill xmlns:a="http://schemas.openxmlformats.org/drawingml/2006/main">
+            <a:srgbClr val="FFFFFF"/>
+          </a:solidFill>
+          <a:ln xmlns:a="http://schemas.openxmlformats.org/drawingml/2006/main" w="9525">
+            <a:solidFill>
+              <a:srgbClr val="E2E8F0"/>
+            </a:solidFill>
+            <a:prstDash val="solid"/>
+          </a:ln>
+        </p:spPr>
+      </p:sp>
+      <p:sp>
+        <p:nvSpPr>
+          <p:cNvPr id="15" name="">
+            <a:extLst xmlns:a="http://schemas.openxmlformats.org/drawingml/2006/main">
+              <a:ext uri="{FF2B5EF4-FFF2-40B4-BE49-F238E27FC236}">
+                <a16:creationId xmlns:a16="http://schemas.microsoft.com/office/drawing/2014/main" id="{8FB7F5C2-B31E-4559-BBB2-B22827DC6AAD}"/>
+              </a:ext>
+            </a:extLst>
+          </p:cNvPr>
+          <p:cNvSpPr>
+            <a:spLocks xmlns:a="http://schemas.openxmlformats.org/drawingml/2006/main" noGrp="1"/>
+          </p:cNvSpPr>
+          <p:nvPr/>
+        </p:nvSpPr>
+        <p:spPr>
+          <a:xfrm xmlns:a="http://schemas.openxmlformats.org/drawingml/2006/main">
+            <a:off x="3638550" y="2705100"/>
+            <a:ext cx="7772400" cy="304800"/>
+          </a:xfrm>
+          <a:prstGeom xmlns:a="http://schemas.openxmlformats.org/drawingml/2006/main" prst="rect">
+            <a:avLst/>
+          </a:prstGeom>
+          <a:noFill xmlns:a="http://schemas.openxmlformats.org/drawingml/2006/main"/>
+          <a:ln xmlns:a="http://schemas.openxmlformats.org/drawingml/2006/main" w="0">
+            <a:noFill/>
+            <a:prstDash val="solid"/>
+          </a:ln>
+        </p:spPr>
+        <p:txBody>
+          <a:bodyPr xmlns:a="http://schemas.openxmlformats.org/drawingml/2006/main"/>
+          <a:lstStyle xmlns:a="http://schemas.openxmlformats.org/drawingml/2006/main"/>
+          <a:p xmlns:a="http://schemas.openxmlformats.org/drawingml/2006/main">
+            <a:pPr algn="l">
+              <a:defRPr sz="975" b="0">
+                <a:solidFill>
+                  <a:srgbClr val="314158"/>
+                </a:solidFill>
+              </a:defRPr>
+            </a:pPr>
+            <a:r>
+              <a:rPr sz="975" b="0">
+                <a:solidFill>
+                  <a:srgbClr val="314158"/>
+                </a:solidFill>
+              </a:rPr>
+              <a:t>No. It depends on clinic data access, embryo variables, lifestyle data and validation source.</a:t>
+            </a:r>
+          </a:p>
+        </p:txBody>
+      </p:sp>
+      <p:sp>
+        <p:nvSpPr>
+          <p:cNvPr id="16" name="">
+            <a:extLst xmlns:a="http://schemas.openxmlformats.org/drawingml/2006/main">
+              <a:ext uri="{FF2B5EF4-FFF2-40B4-BE49-F238E27FC236}">
+                <a16:creationId xmlns:a16="http://schemas.microsoft.com/office/drawing/2014/main" id="{9B127DF3-0F54-4786-9EB3-1EA78B891657}"/>
+              </a:ext>
+            </a:extLst>
+          </p:cNvPr>
+          <p:cNvSpPr>
+            <a:spLocks xmlns:a="http://schemas.openxmlformats.org/drawingml/2006/main" noGrp="1"/>
+          </p:cNvSpPr>
+          <p:nvPr/>
+        </p:nvSpPr>
+        <p:spPr>
+          <a:xfrm xmlns:a="http://schemas.openxmlformats.org/drawingml/2006/main">
+            <a:off x="685800" y="3067050"/>
+            <a:ext cx="2857500" cy="438150"/>
+          </a:xfrm>
+          <a:prstGeom xmlns:a="http://schemas.openxmlformats.org/drawingml/2006/main" prst="roundRect">
+            <a:avLst>
+              <a:gd name="adj" fmla="val 17391"/>
+            </a:avLst>
+          </a:prstGeom>
+          <a:solidFill xmlns:a="http://schemas.openxmlformats.org/drawingml/2006/main">
+            <a:srgbClr val="F1F5F9"/>
+          </a:solidFill>
+          <a:ln xmlns:a="http://schemas.openxmlformats.org/drawingml/2006/main" w="9525">
+            <a:solidFill>
+              <a:srgbClr val="E2E8F0"/>
+            </a:solidFill>
+            <a:prstDash val="solid"/>
+          </a:ln>
+        </p:spPr>
+      </p:sp>
+      <p:sp>
+        <p:nvSpPr>
+          <p:cNvPr id="17" name="">
+            <a:extLst xmlns:a="http://schemas.openxmlformats.org/drawingml/2006/main">
+              <a:ext uri="{FF2B5EF4-FFF2-40B4-BE49-F238E27FC236}">
+                <a16:creationId xmlns:a16="http://schemas.microsoft.com/office/drawing/2014/main" id="{C750E8EF-AB90-41E8-9308-F80B2DF6A320}"/>
+              </a:ext>
+            </a:extLst>
+          </p:cNvPr>
+          <p:cNvSpPr>
+            <a:spLocks xmlns:a="http://schemas.openxmlformats.org/drawingml/2006/main" noGrp="1"/>
+          </p:cNvSpPr>
+          <p:nvPr/>
+        </p:nvSpPr>
+        <p:spPr>
+          <a:xfrm xmlns:a="http://schemas.openxmlformats.org/drawingml/2006/main">
+            <a:off x="781050" y="3143250"/>
+            <a:ext cx="2667000" cy="304800"/>
+          </a:xfrm>
+          <a:prstGeom xmlns:a="http://schemas.openxmlformats.org/drawingml/2006/main" prst="rect">
+            <a:avLst/>
+          </a:prstGeom>
+          <a:noFill xmlns:a="http://schemas.openxmlformats.org/drawingml/2006/main"/>
+          <a:ln xmlns:a="http://schemas.openxmlformats.org/drawingml/2006/main" w="0">
+            <a:noFill/>
+            <a:prstDash val="solid"/>
+          </a:ln>
+        </p:spPr>
+        <p:txBody>
+          <a:bodyPr xmlns:a="http://schemas.openxmlformats.org/drawingml/2006/main"/>
+          <a:lstStyle xmlns:a="http://schemas.openxmlformats.org/drawingml/2006/main"/>
+          <a:p xmlns:a="http://schemas.openxmlformats.org/drawingml/2006/main">
+            <a:pPr algn="l">
+              <a:defRPr sz="975" b="0">
+                <a:solidFill>
+                  <a:srgbClr val="314158"/>
+                </a:solidFill>
+              </a:defRPr>
+            </a:pPr>
+            <a:r>
+              <a:rPr sz="975" b="0">
+                <a:solidFill>
+                  <a:srgbClr val="314158"/>
+                </a:solidFill>
+              </a:rPr>
+              <a:t>Will AI replace doctors?</a:t>
+            </a:r>
+          </a:p>
+        </p:txBody>
+      </p:sp>
+      <p:sp>
+        <p:nvSpPr>
+          <p:cNvPr id="18" name="">
+            <a:extLst xmlns:a="http://schemas.openxmlformats.org/drawingml/2006/main">
+              <a:ext uri="{FF2B5EF4-FFF2-40B4-BE49-F238E27FC236}">
+                <a16:creationId xmlns:a16="http://schemas.microsoft.com/office/drawing/2014/main" id="{1899E0E7-D684-45D0-99F7-2DF2AD456F9A}"/>
+              </a:ext>
+            </a:extLst>
+          </p:cNvPr>
+          <p:cNvSpPr>
+            <a:spLocks xmlns:a="http://schemas.openxmlformats.org/drawingml/2006/main" noGrp="1"/>
+          </p:cNvSpPr>
+          <p:nvPr/>
+        </p:nvSpPr>
+        <p:spPr>
+          <a:xfrm xmlns:a="http://schemas.openxmlformats.org/drawingml/2006/main">
+            <a:off x="3543300" y="3067050"/>
+            <a:ext cx="7962900" cy="438150"/>
+          </a:xfrm>
+          <a:prstGeom xmlns:a="http://schemas.openxmlformats.org/drawingml/2006/main" prst="roundRect">
+            <a:avLst>
+              <a:gd name="adj" fmla="val 17391"/>
+            </a:avLst>
+          </a:prstGeom>
+          <a:solidFill xmlns:a="http://schemas.openxmlformats.org/drawingml/2006/main">
+            <a:srgbClr val="F1F5F9"/>
+          </a:solidFill>
+          <a:ln xmlns:a="http://schemas.openxmlformats.org/drawingml/2006/main" w="9525">
+            <a:solidFill>
+              <a:srgbClr val="E2E8F0"/>
+            </a:solidFill>
+            <a:prstDash val="solid"/>
+          </a:ln>
+        </p:spPr>
+      </p:sp>
+      <p:sp>
+        <p:nvSpPr>
+          <p:cNvPr id="19" name="">
+            <a:extLst xmlns:a="http://schemas.openxmlformats.org/drawingml/2006/main">
+              <a:ext uri="{FF2B5EF4-FFF2-40B4-BE49-F238E27FC236}">
+                <a16:creationId xmlns:a16="http://schemas.microsoft.com/office/drawing/2014/main" id="{3EA0FA74-E350-43B5-9182-6BA9CD1F24BE}"/>
+              </a:ext>
+            </a:extLst>
+          </p:cNvPr>
+          <p:cNvSpPr>
+            <a:spLocks xmlns:a="http://schemas.openxmlformats.org/drawingml/2006/main" noGrp="1"/>
+          </p:cNvSpPr>
+          <p:nvPr/>
+        </p:nvSpPr>
+        <p:spPr>
+          <a:xfrm xmlns:a="http://schemas.openxmlformats.org/drawingml/2006/main">
+            <a:off x="3638550" y="3143250"/>
+            <a:ext cx="7772400" cy="304800"/>
+          </a:xfrm>
+          <a:prstGeom xmlns:a="http://schemas.openxmlformats.org/drawingml/2006/main" prst="rect">
+            <a:avLst/>
+          </a:prstGeom>
+          <a:noFill xmlns:a="http://schemas.openxmlformats.org/drawingml/2006/main"/>
+          <a:ln xmlns:a="http://schemas.openxmlformats.org/drawingml/2006/main" w="0">
+            <a:noFill/>
+            <a:prstDash val="solid"/>
+          </a:ln>
+        </p:spPr>
+        <p:txBody>
+          <a:bodyPr xmlns:a="http://schemas.openxmlformats.org/drawingml/2006/main"/>
+          <a:lstStyle xmlns:a="http://schemas.openxmlformats.org/drawingml/2006/main"/>
+          <a:p xmlns:a="http://schemas.openxmlformats.org/drawingml/2006/main">
+            <a:pPr algn="l">
+              <a:defRPr sz="975" b="0">
+                <a:solidFill>
+                  <a:srgbClr val="314158"/>
+                </a:solidFill>
+              </a:defRPr>
+            </a:pPr>
+            <a:r>
+              <a:rPr sz="975" b="0">
+                <a:solidFill>
+                  <a:srgbClr val="314158"/>
+                </a:solidFill>
+              </a:rPr>
+              <a:t>No. It supports counseling and decision-making; final decisions remain clinical.</a:t>
+            </a:r>
+          </a:p>
+        </p:txBody>
+      </p:sp>
+      <p:sp>
+        <p:nvSpPr>
+          <p:cNvPr id="20" name="">
+            <a:extLst xmlns:a="http://schemas.openxmlformats.org/drawingml/2006/main">
+              <a:ext uri="{FF2B5EF4-FFF2-40B4-BE49-F238E27FC236}">
+                <a16:creationId xmlns:a16="http://schemas.microsoft.com/office/drawing/2014/main" id="{0BBDFC14-E37B-489C-ADD6-4A6818EBC134}"/>
+              </a:ext>
+            </a:extLst>
+          </p:cNvPr>
+          <p:cNvSpPr>
+            <a:spLocks xmlns:a="http://schemas.openxmlformats.org/drawingml/2006/main" noGrp="1"/>
+          </p:cNvSpPr>
+          <p:nvPr/>
+        </p:nvSpPr>
+        <p:spPr>
+          <a:xfrm xmlns:a="http://schemas.openxmlformats.org/drawingml/2006/main">
+            <a:off x="685800" y="3505200"/>
+            <a:ext cx="2857500" cy="438150"/>
+          </a:xfrm>
+          <a:prstGeom xmlns:a="http://schemas.openxmlformats.org/drawingml/2006/main" prst="roundRect">
+            <a:avLst>
+              <a:gd name="adj" fmla="val 17391"/>
+            </a:avLst>
+          </a:prstGeom>
+          <a:solidFill xmlns:a="http://schemas.openxmlformats.org/drawingml/2006/main">
+            <a:srgbClr val="FFFFFF"/>
+          </a:solidFill>
+          <a:ln xmlns:a="http://schemas.openxmlformats.org/drawingml/2006/main" w="9525">
+            <a:solidFill>
+              <a:srgbClr val="E2E8F0"/>
+            </a:solidFill>
+            <a:prstDash val="solid"/>
+          </a:ln>
+        </p:spPr>
+      </p:sp>
+      <p:sp>
+        <p:nvSpPr>
+          <p:cNvPr id="21" name="">
+            <a:extLst xmlns:a="http://schemas.openxmlformats.org/drawingml/2006/main">
+              <a:ext uri="{FF2B5EF4-FFF2-40B4-BE49-F238E27FC236}">
+                <a16:creationId xmlns:a16="http://schemas.microsoft.com/office/drawing/2014/main" id="{E8F37394-7ED8-454D-937E-D9FB8DCB8CCA}"/>
+              </a:ext>
+            </a:extLst>
+          </p:cNvPr>
+          <p:cNvSpPr>
+            <a:spLocks xmlns:a="http://schemas.openxmlformats.org/drawingml/2006/main" noGrp="1"/>
+          </p:cNvSpPr>
+          <p:nvPr/>
+        </p:nvSpPr>
+        <p:spPr>
+          <a:xfrm xmlns:a="http://schemas.openxmlformats.org/drawingml/2006/main">
+            <a:off x="781050" y="3581400"/>
+            <a:ext cx="2667000" cy="304800"/>
+          </a:xfrm>
+          <a:prstGeom xmlns:a="http://schemas.openxmlformats.org/drawingml/2006/main" prst="rect">
+            <a:avLst/>
+          </a:prstGeom>
+          <a:noFill xmlns:a="http://schemas.openxmlformats.org/drawingml/2006/main"/>
+          <a:ln xmlns:a="http://schemas.openxmlformats.org/drawingml/2006/main" w="0">
+            <a:noFill/>
+            <a:prstDash val="solid"/>
+          </a:ln>
+        </p:spPr>
+        <p:txBody>
+          <a:bodyPr xmlns:a="http://schemas.openxmlformats.org/drawingml/2006/main"/>
+          <a:lstStyle xmlns:a="http://schemas.openxmlformats.org/drawingml/2006/main"/>
+          <a:p xmlns:a="http://schemas.openxmlformats.org/drawingml/2006/main">
+            <a:pPr algn="l">
+              <a:defRPr sz="975" b="0">
+                <a:solidFill>
+                  <a:srgbClr val="314158"/>
+                </a:solidFill>
+              </a:defRPr>
+            </a:pPr>
+            <a:r>
+              <a:rPr sz="975" b="0">
+                <a:solidFill>
+                  <a:srgbClr val="314158"/>
+                </a:solidFill>
+              </a:rPr>
+              <a:t>Why Indian data?</a:t>
+            </a:r>
+          </a:p>
+        </p:txBody>
+      </p:sp>
+      <p:sp>
+        <p:nvSpPr>
+          <p:cNvPr id="22" name="">
+            <a:extLst xmlns:a="http://schemas.openxmlformats.org/drawingml/2006/main">
+              <a:ext uri="{FF2B5EF4-FFF2-40B4-BE49-F238E27FC236}">
+                <a16:creationId xmlns:a16="http://schemas.microsoft.com/office/drawing/2014/main" id="{F8163585-7771-4239-BDF0-45D1AB50EE17}"/>
+              </a:ext>
+            </a:extLst>
+          </p:cNvPr>
+          <p:cNvSpPr>
+            <a:spLocks xmlns:a="http://schemas.openxmlformats.org/drawingml/2006/main" noGrp="1"/>
+          </p:cNvSpPr>
+          <p:nvPr/>
+        </p:nvSpPr>
+        <p:spPr>
+          <a:xfrm xmlns:a="http://schemas.openxmlformats.org/drawingml/2006/main">
+            <a:off x="3543300" y="3505200"/>
+            <a:ext cx="7962900" cy="438150"/>
+          </a:xfrm>
+          <a:prstGeom xmlns:a="http://schemas.openxmlformats.org/drawingml/2006/main" prst="roundRect">
+            <a:avLst>
+              <a:gd name="adj" fmla="val 17391"/>
+            </a:avLst>
+          </a:prstGeom>
+          <a:solidFill xmlns:a="http://schemas.openxmlformats.org/drawingml/2006/main">
+            <a:srgbClr val="FFFFFF"/>
+          </a:solidFill>
+          <a:ln xmlns:a="http://schemas.openxmlformats.org/drawingml/2006/main" w="9525">
+            <a:solidFill>
+              <a:srgbClr val="E2E8F0"/>
+            </a:solidFill>
+            <a:prstDash val="solid"/>
+          </a:ln>
+        </p:spPr>
+      </p:sp>
+      <p:sp>
+        <p:nvSpPr>
+          <p:cNvPr id="23" name="">
+            <a:extLst xmlns:a="http://schemas.openxmlformats.org/drawingml/2006/main">
+              <a:ext uri="{FF2B5EF4-FFF2-40B4-BE49-F238E27FC236}">
+                <a16:creationId xmlns:a16="http://schemas.microsoft.com/office/drawing/2014/main" id="{ECEF2701-E961-438D-9B5C-A92F2D207BBC}"/>
+              </a:ext>
+            </a:extLst>
+          </p:cNvPr>
+          <p:cNvSpPr>
+            <a:spLocks xmlns:a="http://schemas.openxmlformats.org/drawingml/2006/main" noGrp="1"/>
+          </p:cNvSpPr>
+          <p:nvPr/>
+        </p:nvSpPr>
+        <p:spPr>
+          <a:xfrm xmlns:a="http://schemas.openxmlformats.org/drawingml/2006/main">
+            <a:off x="3638550" y="3581400"/>
+            <a:ext cx="7772400" cy="304800"/>
+          </a:xfrm>
+          <a:prstGeom xmlns:a="http://schemas.openxmlformats.org/drawingml/2006/main" prst="rect">
+            <a:avLst/>
+          </a:prstGeom>
+          <a:noFill xmlns:a="http://schemas.openxmlformats.org/drawingml/2006/main"/>
+          <a:ln xmlns:a="http://schemas.openxmlformats.org/drawingml/2006/main" w="0">
+            <a:noFill/>
+            <a:prstDash val="solid"/>
+          </a:ln>
+        </p:spPr>
+        <p:txBody>
+          <a:bodyPr xmlns:a="http://schemas.openxmlformats.org/drawingml/2006/main"/>
+          <a:lstStyle xmlns:a="http://schemas.openxmlformats.org/drawingml/2006/main"/>
+          <a:p xmlns:a="http://schemas.openxmlformats.org/drawingml/2006/main">
+            <a:pPr algn="l">
+              <a:defRPr sz="975" b="0">
+                <a:solidFill>
+                  <a:srgbClr val="314158"/>
+                </a:solidFill>
+              </a:defRPr>
+            </a:pPr>
+            <a:r>
+              <a:rPr sz="975" b="0">
+                <a:solidFill>
+                  <a:srgbClr val="314158"/>
+                </a:solidFill>
+              </a:rPr>
+              <a:t>Local validation matters because population, access, affordability and workflow can differ.</a:t>
+            </a:r>
+          </a:p>
+        </p:txBody>
+      </p:sp>
+      <p:sp>
+        <p:nvSpPr>
+          <p:cNvPr id="24" name="">
+            <a:extLst xmlns:a="http://schemas.openxmlformats.org/drawingml/2006/main">
+              <a:ext uri="{FF2B5EF4-FFF2-40B4-BE49-F238E27FC236}">
+                <a16:creationId xmlns:a16="http://schemas.microsoft.com/office/drawing/2014/main" id="{94072B11-ECCF-4ACC-874F-E3B24AD42F3B}"/>
+              </a:ext>
+            </a:extLst>
+          </p:cNvPr>
+          <p:cNvSpPr>
+            <a:spLocks xmlns:a="http://schemas.openxmlformats.org/drawingml/2006/main" noGrp="1"/>
+          </p:cNvSpPr>
+          <p:nvPr/>
+        </p:nvSpPr>
+        <p:spPr>
+          <a:xfrm xmlns:a="http://schemas.openxmlformats.org/drawingml/2006/main">
+            <a:off x="685800" y="3943350"/>
+            <a:ext cx="2857500" cy="438150"/>
+          </a:xfrm>
+          <a:prstGeom xmlns:a="http://schemas.openxmlformats.org/drawingml/2006/main" prst="roundRect">
+            <a:avLst>
+              <a:gd name="adj" fmla="val 17391"/>
+            </a:avLst>
+          </a:prstGeom>
+          <a:solidFill xmlns:a="http://schemas.openxmlformats.org/drawingml/2006/main">
+            <a:srgbClr val="F1F5F9"/>
+          </a:solidFill>
+          <a:ln xmlns:a="http://schemas.openxmlformats.org/drawingml/2006/main" w="9525">
+            <a:solidFill>
+              <a:srgbClr val="E2E8F0"/>
+            </a:solidFill>
+            <a:prstDash val="solid"/>
+          </a:ln>
+        </p:spPr>
+      </p:sp>
+      <p:sp>
+        <p:nvSpPr>
+          <p:cNvPr id="25" name="">
+            <a:extLst xmlns:a="http://schemas.openxmlformats.org/drawingml/2006/main">
+              <a:ext uri="{FF2B5EF4-FFF2-40B4-BE49-F238E27FC236}">
+                <a16:creationId xmlns:a16="http://schemas.microsoft.com/office/drawing/2014/main" id="{47BFC78C-F45F-43BA-A1C0-8BD132076B17}"/>
+              </a:ext>
+            </a:extLst>
+          </p:cNvPr>
+          <p:cNvSpPr>
+            <a:spLocks xmlns:a="http://schemas.openxmlformats.org/drawingml/2006/main" noGrp="1"/>
+          </p:cNvSpPr>
+          <p:nvPr/>
+        </p:nvSpPr>
+        <p:spPr>
+          <a:xfrm xmlns:a="http://schemas.openxmlformats.org/drawingml/2006/main">
+            <a:off x="781050" y="4019550"/>
+            <a:ext cx="2667000" cy="304800"/>
+          </a:xfrm>
+          <a:prstGeom xmlns:a="http://schemas.openxmlformats.org/drawingml/2006/main" prst="rect">
+            <a:avLst/>
+          </a:prstGeom>
+          <a:noFill xmlns:a="http://schemas.openxmlformats.org/drawingml/2006/main"/>
+          <a:ln xmlns:a="http://schemas.openxmlformats.org/drawingml/2006/main" w="0">
+            <a:noFill/>
+            <a:prstDash val="solid"/>
+          </a:ln>
+        </p:spPr>
+        <p:txBody>
+          <a:bodyPr xmlns:a="http://schemas.openxmlformats.org/drawingml/2006/main"/>
+          <a:lstStyle xmlns:a="http://schemas.openxmlformats.org/drawingml/2006/main"/>
+          <a:p xmlns:a="http://schemas.openxmlformats.org/drawingml/2006/main">
+            <a:pPr algn="l">
+              <a:defRPr sz="975" b="0">
+                <a:solidFill>
+                  <a:srgbClr val="314158"/>
+                </a:solidFill>
+              </a:defRPr>
+            </a:pPr>
+            <a:r>
+              <a:rPr sz="975" b="0">
+                <a:solidFill>
+                  <a:srgbClr val="314158"/>
+                </a:solidFill>
+              </a:rPr>
+              <a:t>What if data is limited?</a:t>
+            </a:r>
+          </a:p>
+        </p:txBody>
+      </p:sp>
+      <p:sp>
+        <p:nvSpPr>
+          <p:cNvPr id="26" name="">
+            <a:extLst xmlns:a="http://schemas.openxmlformats.org/drawingml/2006/main">
+              <a:ext uri="{FF2B5EF4-FFF2-40B4-BE49-F238E27FC236}">
+                <a16:creationId xmlns:a16="http://schemas.microsoft.com/office/drawing/2014/main" id="{63A1DDF0-3964-4D4A-8071-02C55F1A5C32}"/>
+              </a:ext>
+            </a:extLst>
+          </p:cNvPr>
+          <p:cNvSpPr>
+            <a:spLocks xmlns:a="http://schemas.openxmlformats.org/drawingml/2006/main" noGrp="1"/>
+          </p:cNvSpPr>
+          <p:nvPr/>
+        </p:nvSpPr>
+        <p:spPr>
+          <a:xfrm xmlns:a="http://schemas.openxmlformats.org/drawingml/2006/main">
+            <a:off x="3543300" y="3943350"/>
+            <a:ext cx="7962900" cy="438150"/>
+          </a:xfrm>
+          <a:prstGeom xmlns:a="http://schemas.openxmlformats.org/drawingml/2006/main" prst="roundRect">
+            <a:avLst>
+              <a:gd name="adj" fmla="val 17391"/>
+            </a:avLst>
+          </a:prstGeom>
+          <a:solidFill xmlns:a="http://schemas.openxmlformats.org/drawingml/2006/main">
+            <a:srgbClr val="F1F5F9"/>
+          </a:solidFill>
+          <a:ln xmlns:a="http://schemas.openxmlformats.org/drawingml/2006/main" w="9525">
+            <a:solidFill>
+              <a:srgbClr val="E2E8F0"/>
+            </a:solidFill>
+            <a:prstDash val="solid"/>
+          </a:ln>
+        </p:spPr>
+      </p:sp>
+      <p:sp>
+        <p:nvSpPr>
+          <p:cNvPr id="27" name="">
+            <a:extLst xmlns:a="http://schemas.openxmlformats.org/drawingml/2006/main">
+              <a:ext uri="{FF2B5EF4-FFF2-40B4-BE49-F238E27FC236}">
+                <a16:creationId xmlns:a16="http://schemas.microsoft.com/office/drawing/2014/main" id="{FE9DD029-FE2F-4A1B-B87B-F5FC042BAE0C}"/>
+              </a:ext>
+            </a:extLst>
+          </p:cNvPr>
+          <p:cNvSpPr>
+            <a:spLocks xmlns:a="http://schemas.openxmlformats.org/drawingml/2006/main" noGrp="1"/>
+          </p:cNvSpPr>
+          <p:nvPr/>
+        </p:nvSpPr>
+        <p:spPr>
+          <a:xfrm xmlns:a="http://schemas.openxmlformats.org/drawingml/2006/main">
+            <a:off x="3638550" y="4019550"/>
+            <a:ext cx="7772400" cy="304800"/>
+          </a:xfrm>
+          <a:prstGeom xmlns:a="http://schemas.openxmlformats.org/drawingml/2006/main" prst="rect">
+            <a:avLst/>
+          </a:prstGeom>
+          <a:noFill xmlns:a="http://schemas.openxmlformats.org/drawingml/2006/main"/>
+          <a:ln xmlns:a="http://schemas.openxmlformats.org/drawingml/2006/main" w="0">
+            <a:noFill/>
+            <a:prstDash val="solid"/>
+          </a:ln>
+        </p:spPr>
+        <p:txBody>
+          <a:bodyPr xmlns:a="http://schemas.openxmlformats.org/drawingml/2006/main"/>
+          <a:lstStyle xmlns:a="http://schemas.openxmlformats.org/drawingml/2006/main"/>
+          <a:p xmlns:a="http://schemas.openxmlformats.org/drawingml/2006/main">
+            <a:pPr algn="l">
+              <a:defRPr sz="975" b="0">
+                <a:solidFill>
+                  <a:srgbClr val="314158"/>
+                </a:solidFill>
+              </a:defRPr>
+            </a:pPr>
+            <a:r>
+              <a:rPr sz="975" b="0">
+                <a:solidFill>
+                  <a:srgbClr val="314158"/>
+                </a:solidFill>
+              </a:rPr>
+              <a:t>Reduce the title scope and use honest internal or temporal validation.</a:t>
+            </a:r>
+          </a:p>
+        </p:txBody>
+      </p:sp>
+      <p:sp>
+        <p:nvSpPr>
+          <p:cNvPr id="28" name="">
+            <a:extLst xmlns:a="http://schemas.openxmlformats.org/drawingml/2006/main">
+              <a:ext uri="{FF2B5EF4-FFF2-40B4-BE49-F238E27FC236}">
+                <a16:creationId xmlns:a16="http://schemas.microsoft.com/office/drawing/2014/main" id="{3ECAA45F-C1CF-444A-8A7D-3A393D368836}"/>
+              </a:ext>
+            </a:extLst>
+          </p:cNvPr>
+          <p:cNvSpPr>
+            <a:spLocks xmlns:a="http://schemas.openxmlformats.org/drawingml/2006/main" noGrp="1"/>
+          </p:cNvSpPr>
+          <p:nvPr/>
+        </p:nvSpPr>
+        <p:spPr>
+          <a:xfrm xmlns:a="http://schemas.openxmlformats.org/drawingml/2006/main">
+            <a:off x="685800" y="6400800"/>
+            <a:ext cx="2857500" cy="190500"/>
+          </a:xfrm>
+          <a:prstGeom xmlns:a="http://schemas.openxmlformats.org/drawingml/2006/main" prst="rect">
+            <a:avLst/>
+          </a:prstGeom>
+          <a:noFill xmlns:a="http://schemas.openxmlformats.org/drawingml/2006/main"/>
+          <a:ln xmlns:a="http://schemas.openxmlformats.org/drawingml/2006/main" w="0">
+            <a:noFill/>
+            <a:prstDash val="solid"/>
+          </a:ln>
+        </p:spPr>
+        <p:txBody>
+          <a:bodyPr xmlns:a="http://schemas.openxmlformats.org/drawingml/2006/main"/>
+          <a:lstStyle xmlns:a="http://schemas.openxmlformats.org/drawingml/2006/main"/>
+          <a:p xmlns:a="http://schemas.openxmlformats.org/drawingml/2006/main">
+            <a:pPr algn="l">
+              <a:defRPr sz="825" b="0">
+                <a:solidFill>
+                  <a:srgbClr val="90A1B9"/>
+                </a:solidFill>
+              </a:defRPr>
+            </a:pPr>
+            <a:r>
+              <a:rPr sz="825" b="0">
+                <a:solidFill>
+                  <a:srgbClr val="90A1B9"/>
+                </a:solidFill>
+              </a:rPr>
+              <a:t>Faculty backup slide 2</a:t>
+            </a:r>
+          </a:p>
+        </p:txBody>
+      </p:sp>
+    </p:spTree>
+    <p:extLst>
+      <p:ext uri="{BB962C8B-B14F-4D97-AF65-F5344CB8AC3E}">
+        <p14:creationId xmlns:p14="http://schemas.microsoft.com/office/powerpoint/2010/main" val="1581847302"/>
       </p:ext>
     </p:extLst>
   </p:cSld>
@@ -10375,6 +13809,7 @@
           <a:lstStyle xmlns:a="http://schemas.openxmlformats.org/drawingml/2006/main"/>
           <a:p xmlns:a="http://schemas.openxmlformats.org/drawingml/2006/main">
             <a:pPr algn="l">
+              <a:buNone/>
               <a:defRPr sz="1050" b="1">
                 <a:solidFill>
                   <a:srgbClr val="555555"/>
@@ -10425,6 +13860,7 @@
           <a:lstStyle xmlns:a="http://schemas.openxmlformats.org/drawingml/2006/main"/>
           <a:p xmlns:a="http://schemas.openxmlformats.org/drawingml/2006/main">
             <a:pPr algn="r">
+              <a:buNone/>
               <a:defRPr sz="1050" b="1">
                 <a:solidFill>
                   <a:srgbClr val="555555"/>
@@ -10475,6 +13911,7 @@
           <a:lstStyle xmlns:a="http://schemas.openxmlformats.org/drawingml/2006/main"/>
           <a:p xmlns:a="http://schemas.openxmlformats.org/drawingml/2006/main">
             <a:pPr algn="l">
+              <a:buNone/>
               <a:defRPr sz="2850" b="1">
                 <a:solidFill>
                   <a:srgbClr val="111111"/>
@@ -10556,6 +13993,7 @@
           <a:lstStyle xmlns:a="http://schemas.openxmlformats.org/drawingml/2006/main"/>
           <a:p xmlns:a="http://schemas.openxmlformats.org/drawingml/2006/main">
             <a:pPr algn="l">
+              <a:buNone/>
               <a:defRPr sz="4050" b="1">
                 <a:solidFill>
                   <a:srgbClr val="111111"/>
@@ -10606,6 +14044,7 @@
           <a:lstStyle xmlns:a="http://schemas.openxmlformats.org/drawingml/2006/main"/>
           <a:p xmlns:a="http://schemas.openxmlformats.org/drawingml/2006/main">
             <a:pPr algn="l">
+              <a:buNone/>
               <a:defRPr sz="1500" b="0">
                 <a:solidFill>
                   <a:srgbClr val="555555"/>
@@ -10656,6 +14095,7 @@
           <a:lstStyle xmlns:a="http://schemas.openxmlformats.org/drawingml/2006/main"/>
           <a:p xmlns:a="http://schemas.openxmlformats.org/drawingml/2006/main">
             <a:pPr algn="l">
+              <a:buNone/>
               <a:defRPr sz="900" b="0">
                 <a:solidFill>
                   <a:srgbClr val="555555"/>
@@ -10706,6 +14146,7 @@
           <a:lstStyle xmlns:a="http://schemas.openxmlformats.org/drawingml/2006/main"/>
           <a:p xmlns:a="http://schemas.openxmlformats.org/drawingml/2006/main">
             <a:pPr algn="l">
+              <a:buNone/>
               <a:defRPr sz="4050" b="1">
                 <a:solidFill>
                   <a:srgbClr val="111111"/>
@@ -10756,6 +14197,7 @@
           <a:lstStyle xmlns:a="http://schemas.openxmlformats.org/drawingml/2006/main"/>
           <a:p xmlns:a="http://schemas.openxmlformats.org/drawingml/2006/main">
             <a:pPr algn="l">
+              <a:buNone/>
               <a:defRPr sz="1500" b="0">
                 <a:solidFill>
                   <a:srgbClr val="555555"/>
@@ -10806,6 +14248,7 @@
           <a:lstStyle xmlns:a="http://schemas.openxmlformats.org/drawingml/2006/main"/>
           <a:p xmlns:a="http://schemas.openxmlformats.org/drawingml/2006/main">
             <a:pPr algn="l">
+              <a:buNone/>
               <a:defRPr sz="900" b="0">
                 <a:solidFill>
                   <a:srgbClr val="555555"/>
@@ -10856,6 +14299,7 @@
           <a:lstStyle xmlns:a="http://schemas.openxmlformats.org/drawingml/2006/main"/>
           <a:p xmlns:a="http://schemas.openxmlformats.org/drawingml/2006/main">
             <a:pPr algn="l">
+              <a:buNone/>
               <a:defRPr sz="4050" b="1">
                 <a:solidFill>
                   <a:srgbClr val="111111"/>
@@ -10906,6 +14350,7 @@
           <a:lstStyle xmlns:a="http://schemas.openxmlformats.org/drawingml/2006/main"/>
           <a:p xmlns:a="http://schemas.openxmlformats.org/drawingml/2006/main">
             <a:pPr algn="l">
+              <a:buNone/>
               <a:defRPr sz="1500" b="0">
                 <a:solidFill>
                   <a:srgbClr val="555555"/>
@@ -10956,6 +14401,7 @@
           <a:lstStyle xmlns:a="http://schemas.openxmlformats.org/drawingml/2006/main"/>
           <a:p xmlns:a="http://schemas.openxmlformats.org/drawingml/2006/main">
             <a:pPr algn="l">
+              <a:buNone/>
               <a:defRPr sz="900" b="0">
                 <a:solidFill>
                   <a:srgbClr val="555555"/>
@@ -11037,6 +14483,7 @@
           <a:lstStyle xmlns:a="http://schemas.openxmlformats.org/drawingml/2006/main"/>
           <a:p xmlns:a="http://schemas.openxmlformats.org/drawingml/2006/main">
             <a:pPr algn="l">
+              <a:buNone/>
               <a:defRPr sz="2250" b="1">
                 <a:solidFill>
                   <a:srgbClr val="111111"/>
@@ -11087,6 +14534,7 @@
           <a:lstStyle xmlns:a="http://schemas.openxmlformats.org/drawingml/2006/main"/>
           <a:p xmlns:a="http://schemas.openxmlformats.org/drawingml/2006/main">
             <a:pPr algn="l">
+              <a:buNone/>
               <a:defRPr sz="1125" b="0">
                 <a:solidFill>
                   <a:srgbClr val="555555"/>
@@ -11108,6 +14556,2519 @@
     <p:extLst>
       <p:ext uri="{BB962C8B-B14F-4D97-AF65-F5344CB8AC3E}">
         <p14:creationId xmlns:p14="http://schemas.microsoft.com/office/powerpoint/2010/main" val="1860757587"/>
+      </p:ext>
+    </p:extLst>
+  </p:cSld>
+</p:sld>
+</file>
+
+<file path=ppt/slides/slide20.xml><?xml version="1.0" encoding="utf-8"?>
+<p:sld xmlns:p="http://schemas.openxmlformats.org/presentationml/2006/main">
+  <p:cSld>
+    <p:bg>
+      <p:bgPr>
+        <a:solidFill xmlns:a="http://schemas.openxmlformats.org/drawingml/2006/main">
+          <a:srgbClr val="F8FAFC"/>
+        </a:solidFill>
+      </p:bgPr>
+    </p:bg>
+    <p:spTree>
+      <p:nvGrpSpPr>
+        <p:cNvPr id="1" name=""/>
+        <p:cNvGrpSpPr/>
+        <p:nvPr/>
+      </p:nvGrpSpPr>
+      <p:grpSpPr>
+        <a:xfrm xmlns:a="http://schemas.openxmlformats.org/drawingml/2006/main"/>
+      </p:grpSpPr>
+      <p:sp>
+        <p:nvSpPr>
+          <p:cNvPr id="1" name="">
+            <a:extLst xmlns:a="http://schemas.openxmlformats.org/drawingml/2006/main">
+              <a:ext uri="{FF2B5EF4-FFF2-40B4-BE49-F238E27FC236}">
+                <a16:creationId xmlns:a16="http://schemas.microsoft.com/office/drawing/2014/main" id="{6EA116E1-D704-442F-A031-924332EF6049}"/>
+              </a:ext>
+            </a:extLst>
+          </p:cNvPr>
+          <p:cNvSpPr>
+            <a:spLocks xmlns:a="http://schemas.openxmlformats.org/drawingml/2006/main" noGrp="1"/>
+          </p:cNvSpPr>
+          <p:nvPr/>
+        </p:nvSpPr>
+        <p:spPr>
+          <a:xfrm xmlns:a="http://schemas.openxmlformats.org/drawingml/2006/main">
+            <a:off x="685800" y="419100"/>
+            <a:ext cx="1714500" cy="228600"/>
+          </a:xfrm>
+          <a:prstGeom xmlns:a="http://schemas.openxmlformats.org/drawingml/2006/main" prst="rect">
+            <a:avLst/>
+          </a:prstGeom>
+          <a:noFill xmlns:a="http://schemas.openxmlformats.org/drawingml/2006/main"/>
+          <a:ln xmlns:a="http://schemas.openxmlformats.org/drawingml/2006/main" w="0">
+            <a:noFill/>
+            <a:prstDash val="solid"/>
+          </a:ln>
+        </p:spPr>
+        <p:txBody>
+          <a:bodyPr xmlns:a="http://schemas.openxmlformats.org/drawingml/2006/main"/>
+          <a:lstStyle xmlns:a="http://schemas.openxmlformats.org/drawingml/2006/main"/>
+          <a:p xmlns:a="http://schemas.openxmlformats.org/drawingml/2006/main">
+            <a:pPr algn="l">
+              <a:defRPr sz="975" b="1">
+                <a:solidFill>
+                  <a:srgbClr val="00786F"/>
+                </a:solidFill>
+              </a:defRPr>
+            </a:pPr>
+            <a:r>
+              <a:rPr sz="975" b="1">
+                <a:solidFill>
+                  <a:srgbClr val="00786F"/>
+                </a:solidFill>
+              </a:rPr>
+              <a:t>APPENDIX</a:t>
+            </a:r>
+          </a:p>
+        </p:txBody>
+      </p:sp>
+      <p:sp>
+        <p:nvSpPr>
+          <p:cNvPr id="2" name="">
+            <a:extLst xmlns:a="http://schemas.openxmlformats.org/drawingml/2006/main">
+              <a:ext uri="{FF2B5EF4-FFF2-40B4-BE49-F238E27FC236}">
+                <a16:creationId xmlns:a16="http://schemas.microsoft.com/office/drawing/2014/main" id="{7B2032A4-398A-4527-8C56-48C0D3D301DB}"/>
+              </a:ext>
+            </a:extLst>
+          </p:cNvPr>
+          <p:cNvSpPr>
+            <a:spLocks xmlns:a="http://schemas.openxmlformats.org/drawingml/2006/main" noGrp="1"/>
+          </p:cNvSpPr>
+          <p:nvPr/>
+        </p:nvSpPr>
+        <p:spPr>
+          <a:xfrm xmlns:a="http://schemas.openxmlformats.org/drawingml/2006/main">
+            <a:off x="685800" y="742950"/>
+            <a:ext cx="8572500" cy="514350"/>
+          </a:xfrm>
+          <a:prstGeom xmlns:a="http://schemas.openxmlformats.org/drawingml/2006/main" prst="rect">
+            <a:avLst/>
+          </a:prstGeom>
+          <a:noFill xmlns:a="http://schemas.openxmlformats.org/drawingml/2006/main"/>
+          <a:ln xmlns:a="http://schemas.openxmlformats.org/drawingml/2006/main" w="0">
+            <a:noFill/>
+            <a:prstDash val="solid"/>
+          </a:ln>
+        </p:spPr>
+        <p:txBody>
+          <a:bodyPr xmlns:a="http://schemas.openxmlformats.org/drawingml/2006/main"/>
+          <a:lstStyle xmlns:a="http://schemas.openxmlformats.org/drawingml/2006/main"/>
+          <a:p xmlns:a="http://schemas.openxmlformats.org/drawingml/2006/main">
+            <a:pPr algn="l">
+              <a:defRPr sz="2550" b="1">
+                <a:solidFill>
+                  <a:srgbClr val="020618"/>
+                </a:solidFill>
+              </a:defRPr>
+            </a:pPr>
+            <a:r>
+              <a:rPr sz="2550" b="1">
+                <a:solidFill>
+                  <a:srgbClr val="020618"/>
+                </a:solidFill>
+              </a:rPr>
+              <a:t>Panel backup: methodology choices</a:t>
+            </a:r>
+          </a:p>
+        </p:txBody>
+      </p:sp>
+      <p:sp>
+        <p:nvSpPr>
+          <p:cNvPr id="3" name="">
+            <a:extLst xmlns:a="http://schemas.openxmlformats.org/drawingml/2006/main">
+              <a:ext uri="{FF2B5EF4-FFF2-40B4-BE49-F238E27FC236}">
+                <a16:creationId xmlns:a16="http://schemas.microsoft.com/office/drawing/2014/main" id="{46BDBD86-14FF-4078-AE5D-8B3694AC54F0}"/>
+              </a:ext>
+            </a:extLst>
+          </p:cNvPr>
+          <p:cNvSpPr>
+            <a:spLocks xmlns:a="http://schemas.openxmlformats.org/drawingml/2006/main" noGrp="1"/>
+          </p:cNvSpPr>
+          <p:nvPr/>
+        </p:nvSpPr>
+        <p:spPr>
+          <a:xfrm xmlns:a="http://schemas.openxmlformats.org/drawingml/2006/main">
+            <a:off x="685800" y="1238250"/>
+            <a:ext cx="9048750" cy="400050"/>
+          </a:xfrm>
+          <a:prstGeom xmlns:a="http://schemas.openxmlformats.org/drawingml/2006/main" prst="rect">
+            <a:avLst/>
+          </a:prstGeom>
+          <a:noFill xmlns:a="http://schemas.openxmlformats.org/drawingml/2006/main"/>
+          <a:ln xmlns:a="http://schemas.openxmlformats.org/drawingml/2006/main" w="0">
+            <a:noFill/>
+            <a:prstDash val="solid"/>
+          </a:ln>
+        </p:spPr>
+        <p:txBody>
+          <a:bodyPr xmlns:a="http://schemas.openxmlformats.org/drawingml/2006/main"/>
+          <a:lstStyle xmlns:a="http://schemas.openxmlformats.org/drawingml/2006/main"/>
+          <a:p xmlns:a="http://schemas.openxmlformats.org/drawingml/2006/main">
+            <a:pPr algn="l">
+              <a:defRPr sz="1350" b="0">
+                <a:solidFill>
+                  <a:srgbClr val="45556C"/>
+                </a:solidFill>
+              </a:defRPr>
+            </a:pPr>
+            <a:r>
+              <a:rPr sz="1350" b="0">
+                <a:solidFill>
+                  <a:srgbClr val="45556C"/>
+                </a:solidFill>
+              </a:rPr>
+              <a:t>Start with realistic tabular-data models, then add explanation and validation.</a:t>
+            </a:r>
+          </a:p>
+        </p:txBody>
+      </p:sp>
+      <p:sp>
+        <p:nvSpPr>
+          <p:cNvPr id="4" name="">
+            <a:extLst xmlns:a="http://schemas.openxmlformats.org/drawingml/2006/main">
+              <a:ext uri="{FF2B5EF4-FFF2-40B4-BE49-F238E27FC236}">
+                <a16:creationId xmlns:a16="http://schemas.microsoft.com/office/drawing/2014/main" id="{6F504D40-871A-491B-BA63-9F4190303632}"/>
+              </a:ext>
+            </a:extLst>
+          </p:cNvPr>
+          <p:cNvSpPr>
+            <a:spLocks xmlns:a="http://schemas.openxmlformats.org/drawingml/2006/main" noGrp="1"/>
+          </p:cNvSpPr>
+          <p:nvPr/>
+        </p:nvSpPr>
+        <p:spPr>
+          <a:xfrm xmlns:a="http://schemas.openxmlformats.org/drawingml/2006/main">
+            <a:off x="685800" y="1885950"/>
+            <a:ext cx="3238500" cy="3333750"/>
+          </a:xfrm>
+          <a:prstGeom xmlns:a="http://schemas.openxmlformats.org/drawingml/2006/main" prst="roundRect">
+            <a:avLst>
+              <a:gd name="adj" fmla="val 2353"/>
+            </a:avLst>
+          </a:prstGeom>
+          <a:solidFill xmlns:a="http://schemas.openxmlformats.org/drawingml/2006/main">
+            <a:srgbClr val="FFFFFF"/>
+          </a:solidFill>
+          <a:ln xmlns:a="http://schemas.openxmlformats.org/drawingml/2006/main" w="9525">
+            <a:solidFill>
+              <a:srgbClr val="E2E8F0"/>
+            </a:solidFill>
+            <a:prstDash val="solid"/>
+          </a:ln>
+        </p:spPr>
+      </p:sp>
+      <p:sp>
+        <p:nvSpPr>
+          <p:cNvPr id="5" name="">
+            <a:extLst xmlns:a="http://schemas.openxmlformats.org/drawingml/2006/main">
+              <a:ext uri="{FF2B5EF4-FFF2-40B4-BE49-F238E27FC236}">
+                <a16:creationId xmlns:a16="http://schemas.microsoft.com/office/drawing/2014/main" id="{7FEDF32B-45F8-44EB-843B-CE45B59ACABC}"/>
+              </a:ext>
+            </a:extLst>
+          </p:cNvPr>
+          <p:cNvSpPr>
+            <a:spLocks xmlns:a="http://schemas.openxmlformats.org/drawingml/2006/main" noGrp="1"/>
+          </p:cNvSpPr>
+          <p:nvPr/>
+        </p:nvSpPr>
+        <p:spPr>
+          <a:xfrm xmlns:a="http://schemas.openxmlformats.org/drawingml/2006/main">
+            <a:off x="914400" y="2133600"/>
+            <a:ext cx="2381250" cy="285750"/>
+          </a:xfrm>
+          <a:prstGeom xmlns:a="http://schemas.openxmlformats.org/drawingml/2006/main" prst="rect">
+            <a:avLst/>
+          </a:prstGeom>
+          <a:noFill xmlns:a="http://schemas.openxmlformats.org/drawingml/2006/main"/>
+          <a:ln xmlns:a="http://schemas.openxmlformats.org/drawingml/2006/main" w="0">
+            <a:noFill/>
+            <a:prstDash val="solid"/>
+          </a:ln>
+        </p:spPr>
+        <p:txBody>
+          <a:bodyPr xmlns:a="http://schemas.openxmlformats.org/drawingml/2006/main"/>
+          <a:lstStyle xmlns:a="http://schemas.openxmlformats.org/drawingml/2006/main"/>
+          <a:p xmlns:a="http://schemas.openxmlformats.org/drawingml/2006/main">
+            <a:pPr algn="l">
+              <a:defRPr sz="1800" b="1">
+                <a:solidFill>
+                  <a:srgbClr val="020618"/>
+                </a:solidFill>
+              </a:defRPr>
+            </a:pPr>
+            <a:r>
+              <a:rPr sz="1800" b="1">
+                <a:solidFill>
+                  <a:srgbClr val="020618"/>
+                </a:solidFill>
+              </a:rPr>
+              <a:t>Models</a:t>
+            </a:r>
+          </a:p>
+        </p:txBody>
+      </p:sp>
+      <p:sp>
+        <p:nvSpPr>
+          <p:cNvPr id="6" name="">
+            <a:extLst xmlns:a="http://schemas.openxmlformats.org/drawingml/2006/main">
+              <a:ext uri="{FF2B5EF4-FFF2-40B4-BE49-F238E27FC236}">
+                <a16:creationId xmlns:a16="http://schemas.microsoft.com/office/drawing/2014/main" id="{BDC2FCC9-EF5E-4E04-9C75-E1D9072AA2E3}"/>
+              </a:ext>
+            </a:extLst>
+          </p:cNvPr>
+          <p:cNvSpPr>
+            <a:spLocks xmlns:a="http://schemas.openxmlformats.org/drawingml/2006/main" noGrp="1"/>
+          </p:cNvSpPr>
+          <p:nvPr/>
+        </p:nvSpPr>
+        <p:spPr>
+          <a:xfrm xmlns:a="http://schemas.openxmlformats.org/drawingml/2006/main">
+            <a:off x="914400" y="2686050"/>
+            <a:ext cx="209550" cy="266700"/>
+          </a:xfrm>
+          <a:prstGeom xmlns:a="http://schemas.openxmlformats.org/drawingml/2006/main" prst="rect">
+            <a:avLst/>
+          </a:prstGeom>
+          <a:noFill xmlns:a="http://schemas.openxmlformats.org/drawingml/2006/main"/>
+          <a:ln xmlns:a="http://schemas.openxmlformats.org/drawingml/2006/main" w="0">
+            <a:noFill/>
+            <a:prstDash val="solid"/>
+          </a:ln>
+        </p:spPr>
+        <p:txBody>
+          <a:bodyPr xmlns:a="http://schemas.openxmlformats.org/drawingml/2006/main"/>
+          <a:lstStyle xmlns:a="http://schemas.openxmlformats.org/drawingml/2006/main"/>
+          <a:p xmlns:a="http://schemas.openxmlformats.org/drawingml/2006/main">
+            <a:pPr algn="l">
+              <a:defRPr sz="1275" b="1">
+                <a:solidFill>
+                  <a:srgbClr val="00786F"/>
+                </a:solidFill>
+              </a:defRPr>
+            </a:pPr>
+            <a:r>
+              <a:rPr sz="1275" b="1">
+                <a:solidFill>
+                  <a:srgbClr val="00786F"/>
+                </a:solidFill>
+              </a:rPr>
+              <a:t>•</a:t>
+            </a:r>
+          </a:p>
+        </p:txBody>
+      </p:sp>
+      <p:sp>
+        <p:nvSpPr>
+          <p:cNvPr id="7" name="">
+            <a:extLst xmlns:a="http://schemas.openxmlformats.org/drawingml/2006/main">
+              <a:ext uri="{FF2B5EF4-FFF2-40B4-BE49-F238E27FC236}">
+                <a16:creationId xmlns:a16="http://schemas.microsoft.com/office/drawing/2014/main" id="{92471B44-4242-4115-8BE2-427BA1F3D77D}"/>
+              </a:ext>
+            </a:extLst>
+          </p:cNvPr>
+          <p:cNvSpPr>
+            <a:spLocks xmlns:a="http://schemas.openxmlformats.org/drawingml/2006/main" noGrp="1"/>
+          </p:cNvSpPr>
+          <p:nvPr/>
+        </p:nvSpPr>
+        <p:spPr>
+          <a:xfrm xmlns:a="http://schemas.openxmlformats.org/drawingml/2006/main">
+            <a:off x="1181100" y="2686050"/>
+            <a:ext cx="2571750" cy="323850"/>
+          </a:xfrm>
+          <a:prstGeom xmlns:a="http://schemas.openxmlformats.org/drawingml/2006/main" prst="rect">
+            <a:avLst/>
+          </a:prstGeom>
+          <a:noFill xmlns:a="http://schemas.openxmlformats.org/drawingml/2006/main"/>
+          <a:ln xmlns:a="http://schemas.openxmlformats.org/drawingml/2006/main" w="0">
+            <a:noFill/>
+            <a:prstDash val="solid"/>
+          </a:ln>
+        </p:spPr>
+        <p:txBody>
+          <a:bodyPr xmlns:a="http://schemas.openxmlformats.org/drawingml/2006/main"/>
+          <a:lstStyle xmlns:a="http://schemas.openxmlformats.org/drawingml/2006/main"/>
+          <a:p xmlns:a="http://schemas.openxmlformats.org/drawingml/2006/main">
+            <a:pPr algn="l">
+              <a:defRPr sz="1275" b="0">
+                <a:solidFill>
+                  <a:srgbClr val="314158"/>
+                </a:solidFill>
+              </a:defRPr>
+            </a:pPr>
+            <a:r>
+              <a:rPr sz="1275" b="0">
+                <a:solidFill>
+                  <a:srgbClr val="314158"/>
+                </a:solidFill>
+              </a:rPr>
+              <a:t>Logistic regression baseline</a:t>
+            </a:r>
+          </a:p>
+        </p:txBody>
+      </p:sp>
+      <p:sp>
+        <p:nvSpPr>
+          <p:cNvPr id="8" name="">
+            <a:extLst xmlns:a="http://schemas.openxmlformats.org/drawingml/2006/main">
+              <a:ext uri="{FF2B5EF4-FFF2-40B4-BE49-F238E27FC236}">
+                <a16:creationId xmlns:a16="http://schemas.microsoft.com/office/drawing/2014/main" id="{5D7830AC-4631-479D-8EB4-B68BAB06E84C}"/>
+              </a:ext>
+            </a:extLst>
+          </p:cNvPr>
+          <p:cNvSpPr>
+            <a:spLocks xmlns:a="http://schemas.openxmlformats.org/drawingml/2006/main" noGrp="1"/>
+          </p:cNvSpPr>
+          <p:nvPr/>
+        </p:nvSpPr>
+        <p:spPr>
+          <a:xfrm xmlns:a="http://schemas.openxmlformats.org/drawingml/2006/main">
+            <a:off x="914400" y="3143250"/>
+            <a:ext cx="209550" cy="266700"/>
+          </a:xfrm>
+          <a:prstGeom xmlns:a="http://schemas.openxmlformats.org/drawingml/2006/main" prst="rect">
+            <a:avLst/>
+          </a:prstGeom>
+          <a:noFill xmlns:a="http://schemas.openxmlformats.org/drawingml/2006/main"/>
+          <a:ln xmlns:a="http://schemas.openxmlformats.org/drawingml/2006/main" w="0">
+            <a:noFill/>
+            <a:prstDash val="solid"/>
+          </a:ln>
+        </p:spPr>
+        <p:txBody>
+          <a:bodyPr xmlns:a="http://schemas.openxmlformats.org/drawingml/2006/main"/>
+          <a:lstStyle xmlns:a="http://schemas.openxmlformats.org/drawingml/2006/main"/>
+          <a:p xmlns:a="http://schemas.openxmlformats.org/drawingml/2006/main">
+            <a:pPr algn="l">
+              <a:defRPr sz="1275" b="1">
+                <a:solidFill>
+                  <a:srgbClr val="00786F"/>
+                </a:solidFill>
+              </a:defRPr>
+            </a:pPr>
+            <a:r>
+              <a:rPr sz="1275" b="1">
+                <a:solidFill>
+                  <a:srgbClr val="00786F"/>
+                </a:solidFill>
+              </a:rPr>
+              <a:t>•</a:t>
+            </a:r>
+          </a:p>
+        </p:txBody>
+      </p:sp>
+      <p:sp>
+        <p:nvSpPr>
+          <p:cNvPr id="9" name="">
+            <a:extLst xmlns:a="http://schemas.openxmlformats.org/drawingml/2006/main">
+              <a:ext uri="{FF2B5EF4-FFF2-40B4-BE49-F238E27FC236}">
+                <a16:creationId xmlns:a16="http://schemas.microsoft.com/office/drawing/2014/main" id="{6190C0CF-1D56-46D7-A8E4-D68DA6143613}"/>
+              </a:ext>
+            </a:extLst>
+          </p:cNvPr>
+          <p:cNvSpPr>
+            <a:spLocks xmlns:a="http://schemas.openxmlformats.org/drawingml/2006/main" noGrp="1"/>
+          </p:cNvSpPr>
+          <p:nvPr/>
+        </p:nvSpPr>
+        <p:spPr>
+          <a:xfrm xmlns:a="http://schemas.openxmlformats.org/drawingml/2006/main">
+            <a:off x="1181100" y="3143250"/>
+            <a:ext cx="2571750" cy="323850"/>
+          </a:xfrm>
+          <a:prstGeom xmlns:a="http://schemas.openxmlformats.org/drawingml/2006/main" prst="rect">
+            <a:avLst/>
+          </a:prstGeom>
+          <a:noFill xmlns:a="http://schemas.openxmlformats.org/drawingml/2006/main"/>
+          <a:ln xmlns:a="http://schemas.openxmlformats.org/drawingml/2006/main" w="0">
+            <a:noFill/>
+            <a:prstDash val="solid"/>
+          </a:ln>
+        </p:spPr>
+        <p:txBody>
+          <a:bodyPr xmlns:a="http://schemas.openxmlformats.org/drawingml/2006/main"/>
+          <a:lstStyle xmlns:a="http://schemas.openxmlformats.org/drawingml/2006/main"/>
+          <a:p xmlns:a="http://schemas.openxmlformats.org/drawingml/2006/main">
+            <a:pPr algn="l">
+              <a:defRPr sz="1275" b="0">
+                <a:solidFill>
+                  <a:srgbClr val="314158"/>
+                </a:solidFill>
+              </a:defRPr>
+            </a:pPr>
+            <a:r>
+              <a:rPr sz="1275" b="0">
+                <a:solidFill>
+                  <a:srgbClr val="314158"/>
+                </a:solidFill>
+              </a:rPr>
+              <a:t>Random Forest</a:t>
+            </a:r>
+          </a:p>
+        </p:txBody>
+      </p:sp>
+      <p:sp>
+        <p:nvSpPr>
+          <p:cNvPr id="10" name="">
+            <a:extLst xmlns:a="http://schemas.openxmlformats.org/drawingml/2006/main">
+              <a:ext uri="{FF2B5EF4-FFF2-40B4-BE49-F238E27FC236}">
+                <a16:creationId xmlns:a16="http://schemas.microsoft.com/office/drawing/2014/main" id="{3C533CD6-3C39-4FDE-A845-EE83D94E66E3}"/>
+              </a:ext>
+            </a:extLst>
+          </p:cNvPr>
+          <p:cNvSpPr>
+            <a:spLocks xmlns:a="http://schemas.openxmlformats.org/drawingml/2006/main" noGrp="1"/>
+          </p:cNvSpPr>
+          <p:nvPr/>
+        </p:nvSpPr>
+        <p:spPr>
+          <a:xfrm xmlns:a="http://schemas.openxmlformats.org/drawingml/2006/main">
+            <a:off x="914400" y="3600450"/>
+            <a:ext cx="209550" cy="266700"/>
+          </a:xfrm>
+          <a:prstGeom xmlns:a="http://schemas.openxmlformats.org/drawingml/2006/main" prst="rect">
+            <a:avLst/>
+          </a:prstGeom>
+          <a:noFill xmlns:a="http://schemas.openxmlformats.org/drawingml/2006/main"/>
+          <a:ln xmlns:a="http://schemas.openxmlformats.org/drawingml/2006/main" w="0">
+            <a:noFill/>
+            <a:prstDash val="solid"/>
+          </a:ln>
+        </p:spPr>
+        <p:txBody>
+          <a:bodyPr xmlns:a="http://schemas.openxmlformats.org/drawingml/2006/main"/>
+          <a:lstStyle xmlns:a="http://schemas.openxmlformats.org/drawingml/2006/main"/>
+          <a:p xmlns:a="http://schemas.openxmlformats.org/drawingml/2006/main">
+            <a:pPr algn="l">
+              <a:defRPr sz="1275" b="1">
+                <a:solidFill>
+                  <a:srgbClr val="00786F"/>
+                </a:solidFill>
+              </a:defRPr>
+            </a:pPr>
+            <a:r>
+              <a:rPr sz="1275" b="1">
+                <a:solidFill>
+                  <a:srgbClr val="00786F"/>
+                </a:solidFill>
+              </a:rPr>
+              <a:t>•</a:t>
+            </a:r>
+          </a:p>
+        </p:txBody>
+      </p:sp>
+      <p:sp>
+        <p:nvSpPr>
+          <p:cNvPr id="11" name="">
+            <a:extLst xmlns:a="http://schemas.openxmlformats.org/drawingml/2006/main">
+              <a:ext uri="{FF2B5EF4-FFF2-40B4-BE49-F238E27FC236}">
+                <a16:creationId xmlns:a16="http://schemas.microsoft.com/office/drawing/2014/main" id="{E48AF662-75F8-48C1-A2A6-5E2E5CB84AF5}"/>
+              </a:ext>
+            </a:extLst>
+          </p:cNvPr>
+          <p:cNvSpPr>
+            <a:spLocks xmlns:a="http://schemas.openxmlformats.org/drawingml/2006/main" noGrp="1"/>
+          </p:cNvSpPr>
+          <p:nvPr/>
+        </p:nvSpPr>
+        <p:spPr>
+          <a:xfrm xmlns:a="http://schemas.openxmlformats.org/drawingml/2006/main">
+            <a:off x="1181100" y="3600450"/>
+            <a:ext cx="2571750" cy="323850"/>
+          </a:xfrm>
+          <a:prstGeom xmlns:a="http://schemas.openxmlformats.org/drawingml/2006/main" prst="rect">
+            <a:avLst/>
+          </a:prstGeom>
+          <a:noFill xmlns:a="http://schemas.openxmlformats.org/drawingml/2006/main"/>
+          <a:ln xmlns:a="http://schemas.openxmlformats.org/drawingml/2006/main" w="0">
+            <a:noFill/>
+            <a:prstDash val="solid"/>
+          </a:ln>
+        </p:spPr>
+        <p:txBody>
+          <a:bodyPr xmlns:a="http://schemas.openxmlformats.org/drawingml/2006/main"/>
+          <a:lstStyle xmlns:a="http://schemas.openxmlformats.org/drawingml/2006/main"/>
+          <a:p xmlns:a="http://schemas.openxmlformats.org/drawingml/2006/main">
+            <a:pPr algn="l">
+              <a:defRPr sz="1275" b="0">
+                <a:solidFill>
+                  <a:srgbClr val="314158"/>
+                </a:solidFill>
+              </a:defRPr>
+            </a:pPr>
+            <a:r>
+              <a:rPr sz="1275" b="0">
+                <a:solidFill>
+                  <a:srgbClr val="314158"/>
+                </a:solidFill>
+              </a:rPr>
+              <a:t>XGBoost or LightGBM</a:t>
+            </a:r>
+          </a:p>
+        </p:txBody>
+      </p:sp>
+      <p:sp>
+        <p:nvSpPr>
+          <p:cNvPr id="12" name="">
+            <a:extLst xmlns:a="http://schemas.openxmlformats.org/drawingml/2006/main">
+              <a:ext uri="{FF2B5EF4-FFF2-40B4-BE49-F238E27FC236}">
+                <a16:creationId xmlns:a16="http://schemas.microsoft.com/office/drawing/2014/main" id="{B2F6586D-2DDA-434D-B3B4-9046F3F81B2B}"/>
+              </a:ext>
+            </a:extLst>
+          </p:cNvPr>
+          <p:cNvSpPr>
+            <a:spLocks xmlns:a="http://schemas.openxmlformats.org/drawingml/2006/main" noGrp="1"/>
+          </p:cNvSpPr>
+          <p:nvPr/>
+        </p:nvSpPr>
+        <p:spPr>
+          <a:xfrm xmlns:a="http://schemas.openxmlformats.org/drawingml/2006/main">
+            <a:off x="914400" y="4057650"/>
+            <a:ext cx="209550" cy="266700"/>
+          </a:xfrm>
+          <a:prstGeom xmlns:a="http://schemas.openxmlformats.org/drawingml/2006/main" prst="rect">
+            <a:avLst/>
+          </a:prstGeom>
+          <a:noFill xmlns:a="http://schemas.openxmlformats.org/drawingml/2006/main"/>
+          <a:ln xmlns:a="http://schemas.openxmlformats.org/drawingml/2006/main" w="0">
+            <a:noFill/>
+            <a:prstDash val="solid"/>
+          </a:ln>
+        </p:spPr>
+        <p:txBody>
+          <a:bodyPr xmlns:a="http://schemas.openxmlformats.org/drawingml/2006/main"/>
+          <a:lstStyle xmlns:a="http://schemas.openxmlformats.org/drawingml/2006/main"/>
+          <a:p xmlns:a="http://schemas.openxmlformats.org/drawingml/2006/main">
+            <a:pPr algn="l">
+              <a:defRPr sz="1275" b="1">
+                <a:solidFill>
+                  <a:srgbClr val="00786F"/>
+                </a:solidFill>
+              </a:defRPr>
+            </a:pPr>
+            <a:r>
+              <a:rPr sz="1275" b="1">
+                <a:solidFill>
+                  <a:srgbClr val="00786F"/>
+                </a:solidFill>
+              </a:rPr>
+              <a:t>•</a:t>
+            </a:r>
+          </a:p>
+        </p:txBody>
+      </p:sp>
+      <p:sp>
+        <p:nvSpPr>
+          <p:cNvPr id="13" name="">
+            <a:extLst xmlns:a="http://schemas.openxmlformats.org/drawingml/2006/main">
+              <a:ext uri="{FF2B5EF4-FFF2-40B4-BE49-F238E27FC236}">
+                <a16:creationId xmlns:a16="http://schemas.microsoft.com/office/drawing/2014/main" id="{7E9DBE3E-3C00-4E0E-AA52-544003B1676D}"/>
+              </a:ext>
+            </a:extLst>
+          </p:cNvPr>
+          <p:cNvSpPr>
+            <a:spLocks xmlns:a="http://schemas.openxmlformats.org/drawingml/2006/main" noGrp="1"/>
+          </p:cNvSpPr>
+          <p:nvPr/>
+        </p:nvSpPr>
+        <p:spPr>
+          <a:xfrm xmlns:a="http://schemas.openxmlformats.org/drawingml/2006/main">
+            <a:off x="1181100" y="4057650"/>
+            <a:ext cx="2571750" cy="323850"/>
+          </a:xfrm>
+          <a:prstGeom xmlns:a="http://schemas.openxmlformats.org/drawingml/2006/main" prst="rect">
+            <a:avLst/>
+          </a:prstGeom>
+          <a:noFill xmlns:a="http://schemas.openxmlformats.org/drawingml/2006/main"/>
+          <a:ln xmlns:a="http://schemas.openxmlformats.org/drawingml/2006/main" w="0">
+            <a:noFill/>
+            <a:prstDash val="solid"/>
+          </a:ln>
+        </p:spPr>
+        <p:txBody>
+          <a:bodyPr xmlns:a="http://schemas.openxmlformats.org/drawingml/2006/main"/>
+          <a:lstStyle xmlns:a="http://schemas.openxmlformats.org/drawingml/2006/main"/>
+          <a:p xmlns:a="http://schemas.openxmlformats.org/drawingml/2006/main">
+            <a:pPr algn="l">
+              <a:defRPr sz="1275" b="0">
+                <a:solidFill>
+                  <a:srgbClr val="314158"/>
+                </a:solidFill>
+              </a:defRPr>
+            </a:pPr>
+            <a:r>
+              <a:rPr sz="1275" b="0">
+                <a:solidFill>
+                  <a:srgbClr val="314158"/>
+                </a:solidFill>
+              </a:rPr>
+              <a:t>Deep learning only if data supports it</a:t>
+            </a:r>
+          </a:p>
+        </p:txBody>
+      </p:sp>
+      <p:sp>
+        <p:nvSpPr>
+          <p:cNvPr id="14" name="">
+            <a:extLst xmlns:a="http://schemas.openxmlformats.org/drawingml/2006/main">
+              <a:ext uri="{FF2B5EF4-FFF2-40B4-BE49-F238E27FC236}">
+                <a16:creationId xmlns:a16="http://schemas.microsoft.com/office/drawing/2014/main" id="{85DFFDA9-41CB-49C2-BE10-A3BCA041020C}"/>
+              </a:ext>
+            </a:extLst>
+          </p:cNvPr>
+          <p:cNvSpPr>
+            <a:spLocks xmlns:a="http://schemas.openxmlformats.org/drawingml/2006/main" noGrp="1"/>
+          </p:cNvSpPr>
+          <p:nvPr/>
+        </p:nvSpPr>
+        <p:spPr>
+          <a:xfrm xmlns:a="http://schemas.openxmlformats.org/drawingml/2006/main">
+            <a:off x="4476750" y="1885950"/>
+            <a:ext cx="3238500" cy="3333750"/>
+          </a:xfrm>
+          <a:prstGeom xmlns:a="http://schemas.openxmlformats.org/drawingml/2006/main" prst="roundRect">
+            <a:avLst>
+              <a:gd name="adj" fmla="val 2353"/>
+            </a:avLst>
+          </a:prstGeom>
+          <a:solidFill xmlns:a="http://schemas.openxmlformats.org/drawingml/2006/main">
+            <a:srgbClr val="FFFFFF"/>
+          </a:solidFill>
+          <a:ln xmlns:a="http://schemas.openxmlformats.org/drawingml/2006/main" w="9525">
+            <a:solidFill>
+              <a:srgbClr val="E2E8F0"/>
+            </a:solidFill>
+            <a:prstDash val="solid"/>
+          </a:ln>
+        </p:spPr>
+      </p:sp>
+      <p:sp>
+        <p:nvSpPr>
+          <p:cNvPr id="15" name="">
+            <a:extLst xmlns:a="http://schemas.openxmlformats.org/drawingml/2006/main">
+              <a:ext uri="{FF2B5EF4-FFF2-40B4-BE49-F238E27FC236}">
+                <a16:creationId xmlns:a16="http://schemas.microsoft.com/office/drawing/2014/main" id="{3ADF812F-4246-405C-AF2B-4600D50661CE}"/>
+              </a:ext>
+            </a:extLst>
+          </p:cNvPr>
+          <p:cNvSpPr>
+            <a:spLocks xmlns:a="http://schemas.openxmlformats.org/drawingml/2006/main" noGrp="1"/>
+          </p:cNvSpPr>
+          <p:nvPr/>
+        </p:nvSpPr>
+        <p:spPr>
+          <a:xfrm xmlns:a="http://schemas.openxmlformats.org/drawingml/2006/main">
+            <a:off x="4705350" y="2133600"/>
+            <a:ext cx="2381250" cy="285750"/>
+          </a:xfrm>
+          <a:prstGeom xmlns:a="http://schemas.openxmlformats.org/drawingml/2006/main" prst="rect">
+            <a:avLst/>
+          </a:prstGeom>
+          <a:noFill xmlns:a="http://schemas.openxmlformats.org/drawingml/2006/main"/>
+          <a:ln xmlns:a="http://schemas.openxmlformats.org/drawingml/2006/main" w="0">
+            <a:noFill/>
+            <a:prstDash val="solid"/>
+          </a:ln>
+        </p:spPr>
+        <p:txBody>
+          <a:bodyPr xmlns:a="http://schemas.openxmlformats.org/drawingml/2006/main"/>
+          <a:lstStyle xmlns:a="http://schemas.openxmlformats.org/drawingml/2006/main"/>
+          <a:p xmlns:a="http://schemas.openxmlformats.org/drawingml/2006/main">
+            <a:pPr algn="l">
+              <a:defRPr sz="1800" b="1">
+                <a:solidFill>
+                  <a:srgbClr val="020618"/>
+                </a:solidFill>
+              </a:defRPr>
+            </a:pPr>
+            <a:r>
+              <a:rPr sz="1800" b="1">
+                <a:solidFill>
+                  <a:srgbClr val="020618"/>
+                </a:solidFill>
+              </a:rPr>
+              <a:t>Evaluation</a:t>
+            </a:r>
+          </a:p>
+        </p:txBody>
+      </p:sp>
+      <p:sp>
+        <p:nvSpPr>
+          <p:cNvPr id="16" name="">
+            <a:extLst xmlns:a="http://schemas.openxmlformats.org/drawingml/2006/main">
+              <a:ext uri="{FF2B5EF4-FFF2-40B4-BE49-F238E27FC236}">
+                <a16:creationId xmlns:a16="http://schemas.microsoft.com/office/drawing/2014/main" id="{F85B8521-B776-43E2-B42E-9805885A249E}"/>
+              </a:ext>
+            </a:extLst>
+          </p:cNvPr>
+          <p:cNvSpPr>
+            <a:spLocks xmlns:a="http://schemas.openxmlformats.org/drawingml/2006/main" noGrp="1"/>
+          </p:cNvSpPr>
+          <p:nvPr/>
+        </p:nvSpPr>
+        <p:spPr>
+          <a:xfrm xmlns:a="http://schemas.openxmlformats.org/drawingml/2006/main">
+            <a:off x="4705350" y="2686050"/>
+            <a:ext cx="209550" cy="266700"/>
+          </a:xfrm>
+          <a:prstGeom xmlns:a="http://schemas.openxmlformats.org/drawingml/2006/main" prst="rect">
+            <a:avLst/>
+          </a:prstGeom>
+          <a:noFill xmlns:a="http://schemas.openxmlformats.org/drawingml/2006/main"/>
+          <a:ln xmlns:a="http://schemas.openxmlformats.org/drawingml/2006/main" w="0">
+            <a:noFill/>
+            <a:prstDash val="solid"/>
+          </a:ln>
+        </p:spPr>
+        <p:txBody>
+          <a:bodyPr xmlns:a="http://schemas.openxmlformats.org/drawingml/2006/main"/>
+          <a:lstStyle xmlns:a="http://schemas.openxmlformats.org/drawingml/2006/main"/>
+          <a:p xmlns:a="http://schemas.openxmlformats.org/drawingml/2006/main">
+            <a:pPr algn="l">
+              <a:defRPr sz="1275" b="1">
+                <a:solidFill>
+                  <a:srgbClr val="00786F"/>
+                </a:solidFill>
+              </a:defRPr>
+            </a:pPr>
+            <a:r>
+              <a:rPr sz="1275" b="1">
+                <a:solidFill>
+                  <a:srgbClr val="00786F"/>
+                </a:solidFill>
+              </a:rPr>
+              <a:t>•</a:t>
+            </a:r>
+          </a:p>
+        </p:txBody>
+      </p:sp>
+      <p:sp>
+        <p:nvSpPr>
+          <p:cNvPr id="17" name="">
+            <a:extLst xmlns:a="http://schemas.openxmlformats.org/drawingml/2006/main">
+              <a:ext uri="{FF2B5EF4-FFF2-40B4-BE49-F238E27FC236}">
+                <a16:creationId xmlns:a16="http://schemas.microsoft.com/office/drawing/2014/main" id="{84E3347E-1AB9-418F-B0F1-F5A37F68A911}"/>
+              </a:ext>
+            </a:extLst>
+          </p:cNvPr>
+          <p:cNvSpPr>
+            <a:spLocks xmlns:a="http://schemas.openxmlformats.org/drawingml/2006/main" noGrp="1"/>
+          </p:cNvSpPr>
+          <p:nvPr/>
+        </p:nvSpPr>
+        <p:spPr>
+          <a:xfrm xmlns:a="http://schemas.openxmlformats.org/drawingml/2006/main">
+            <a:off x="4972050" y="2686050"/>
+            <a:ext cx="2571750" cy="323850"/>
+          </a:xfrm>
+          <a:prstGeom xmlns:a="http://schemas.openxmlformats.org/drawingml/2006/main" prst="rect">
+            <a:avLst/>
+          </a:prstGeom>
+          <a:noFill xmlns:a="http://schemas.openxmlformats.org/drawingml/2006/main"/>
+          <a:ln xmlns:a="http://schemas.openxmlformats.org/drawingml/2006/main" w="0">
+            <a:noFill/>
+            <a:prstDash val="solid"/>
+          </a:ln>
+        </p:spPr>
+        <p:txBody>
+          <a:bodyPr xmlns:a="http://schemas.openxmlformats.org/drawingml/2006/main"/>
+          <a:lstStyle xmlns:a="http://schemas.openxmlformats.org/drawingml/2006/main"/>
+          <a:p xmlns:a="http://schemas.openxmlformats.org/drawingml/2006/main">
+            <a:pPr algn="l">
+              <a:defRPr sz="1275" b="0">
+                <a:solidFill>
+                  <a:srgbClr val="314158"/>
+                </a:solidFill>
+              </a:defRPr>
+            </a:pPr>
+            <a:r>
+              <a:rPr sz="1275" b="0">
+                <a:solidFill>
+                  <a:srgbClr val="314158"/>
+                </a:solidFill>
+              </a:rPr>
+              <a:t>AUC and F1</a:t>
+            </a:r>
+          </a:p>
+        </p:txBody>
+      </p:sp>
+      <p:sp>
+        <p:nvSpPr>
+          <p:cNvPr id="18" name="">
+            <a:extLst xmlns:a="http://schemas.openxmlformats.org/drawingml/2006/main">
+              <a:ext uri="{FF2B5EF4-FFF2-40B4-BE49-F238E27FC236}">
+                <a16:creationId xmlns:a16="http://schemas.microsoft.com/office/drawing/2014/main" id="{65199741-C881-4458-99D8-955F9F669EB8}"/>
+              </a:ext>
+            </a:extLst>
+          </p:cNvPr>
+          <p:cNvSpPr>
+            <a:spLocks xmlns:a="http://schemas.openxmlformats.org/drawingml/2006/main" noGrp="1"/>
+          </p:cNvSpPr>
+          <p:nvPr/>
+        </p:nvSpPr>
+        <p:spPr>
+          <a:xfrm xmlns:a="http://schemas.openxmlformats.org/drawingml/2006/main">
+            <a:off x="4705350" y="3143250"/>
+            <a:ext cx="209550" cy="266700"/>
+          </a:xfrm>
+          <a:prstGeom xmlns:a="http://schemas.openxmlformats.org/drawingml/2006/main" prst="rect">
+            <a:avLst/>
+          </a:prstGeom>
+          <a:noFill xmlns:a="http://schemas.openxmlformats.org/drawingml/2006/main"/>
+          <a:ln xmlns:a="http://schemas.openxmlformats.org/drawingml/2006/main" w="0">
+            <a:noFill/>
+            <a:prstDash val="solid"/>
+          </a:ln>
+        </p:spPr>
+        <p:txBody>
+          <a:bodyPr xmlns:a="http://schemas.openxmlformats.org/drawingml/2006/main"/>
+          <a:lstStyle xmlns:a="http://schemas.openxmlformats.org/drawingml/2006/main"/>
+          <a:p xmlns:a="http://schemas.openxmlformats.org/drawingml/2006/main">
+            <a:pPr algn="l">
+              <a:defRPr sz="1275" b="1">
+                <a:solidFill>
+                  <a:srgbClr val="00786F"/>
+                </a:solidFill>
+              </a:defRPr>
+            </a:pPr>
+            <a:r>
+              <a:rPr sz="1275" b="1">
+                <a:solidFill>
+                  <a:srgbClr val="00786F"/>
+                </a:solidFill>
+              </a:rPr>
+              <a:t>•</a:t>
+            </a:r>
+          </a:p>
+        </p:txBody>
+      </p:sp>
+      <p:sp>
+        <p:nvSpPr>
+          <p:cNvPr id="19" name="">
+            <a:extLst xmlns:a="http://schemas.openxmlformats.org/drawingml/2006/main">
+              <a:ext uri="{FF2B5EF4-FFF2-40B4-BE49-F238E27FC236}">
+                <a16:creationId xmlns:a16="http://schemas.microsoft.com/office/drawing/2014/main" id="{C006D002-2435-4744-83D9-CDE0886AAAC8}"/>
+              </a:ext>
+            </a:extLst>
+          </p:cNvPr>
+          <p:cNvSpPr>
+            <a:spLocks xmlns:a="http://schemas.openxmlformats.org/drawingml/2006/main" noGrp="1"/>
+          </p:cNvSpPr>
+          <p:nvPr/>
+        </p:nvSpPr>
+        <p:spPr>
+          <a:xfrm xmlns:a="http://schemas.openxmlformats.org/drawingml/2006/main">
+            <a:off x="4972050" y="3143250"/>
+            <a:ext cx="2571750" cy="323850"/>
+          </a:xfrm>
+          <a:prstGeom xmlns:a="http://schemas.openxmlformats.org/drawingml/2006/main" prst="rect">
+            <a:avLst/>
+          </a:prstGeom>
+          <a:noFill xmlns:a="http://schemas.openxmlformats.org/drawingml/2006/main"/>
+          <a:ln xmlns:a="http://schemas.openxmlformats.org/drawingml/2006/main" w="0">
+            <a:noFill/>
+            <a:prstDash val="solid"/>
+          </a:ln>
+        </p:spPr>
+        <p:txBody>
+          <a:bodyPr xmlns:a="http://schemas.openxmlformats.org/drawingml/2006/main"/>
+          <a:lstStyle xmlns:a="http://schemas.openxmlformats.org/drawingml/2006/main"/>
+          <a:p xmlns:a="http://schemas.openxmlformats.org/drawingml/2006/main">
+            <a:pPr algn="l">
+              <a:defRPr sz="1275" b="0">
+                <a:solidFill>
+                  <a:srgbClr val="314158"/>
+                </a:solidFill>
+              </a:defRPr>
+            </a:pPr>
+            <a:r>
+              <a:rPr sz="1275" b="0">
+                <a:solidFill>
+                  <a:srgbClr val="314158"/>
+                </a:solidFill>
+              </a:rPr>
+              <a:t>Sensitivity and specificity</a:t>
+            </a:r>
+          </a:p>
+        </p:txBody>
+      </p:sp>
+      <p:sp>
+        <p:nvSpPr>
+          <p:cNvPr id="20" name="">
+            <a:extLst xmlns:a="http://schemas.openxmlformats.org/drawingml/2006/main">
+              <a:ext uri="{FF2B5EF4-FFF2-40B4-BE49-F238E27FC236}">
+                <a16:creationId xmlns:a16="http://schemas.microsoft.com/office/drawing/2014/main" id="{94B81805-57DB-48C9-839A-B475EBF5D926}"/>
+              </a:ext>
+            </a:extLst>
+          </p:cNvPr>
+          <p:cNvSpPr>
+            <a:spLocks xmlns:a="http://schemas.openxmlformats.org/drawingml/2006/main" noGrp="1"/>
+          </p:cNvSpPr>
+          <p:nvPr/>
+        </p:nvSpPr>
+        <p:spPr>
+          <a:xfrm xmlns:a="http://schemas.openxmlformats.org/drawingml/2006/main">
+            <a:off x="4705350" y="3600450"/>
+            <a:ext cx="209550" cy="266700"/>
+          </a:xfrm>
+          <a:prstGeom xmlns:a="http://schemas.openxmlformats.org/drawingml/2006/main" prst="rect">
+            <a:avLst/>
+          </a:prstGeom>
+          <a:noFill xmlns:a="http://schemas.openxmlformats.org/drawingml/2006/main"/>
+          <a:ln xmlns:a="http://schemas.openxmlformats.org/drawingml/2006/main" w="0">
+            <a:noFill/>
+            <a:prstDash val="solid"/>
+          </a:ln>
+        </p:spPr>
+        <p:txBody>
+          <a:bodyPr xmlns:a="http://schemas.openxmlformats.org/drawingml/2006/main"/>
+          <a:lstStyle xmlns:a="http://schemas.openxmlformats.org/drawingml/2006/main"/>
+          <a:p xmlns:a="http://schemas.openxmlformats.org/drawingml/2006/main">
+            <a:pPr algn="l">
+              <a:defRPr sz="1275" b="1">
+                <a:solidFill>
+                  <a:srgbClr val="00786F"/>
+                </a:solidFill>
+              </a:defRPr>
+            </a:pPr>
+            <a:r>
+              <a:rPr sz="1275" b="1">
+                <a:solidFill>
+                  <a:srgbClr val="00786F"/>
+                </a:solidFill>
+              </a:rPr>
+              <a:t>•</a:t>
+            </a:r>
+          </a:p>
+        </p:txBody>
+      </p:sp>
+      <p:sp>
+        <p:nvSpPr>
+          <p:cNvPr id="21" name="">
+            <a:extLst xmlns:a="http://schemas.openxmlformats.org/drawingml/2006/main">
+              <a:ext uri="{FF2B5EF4-FFF2-40B4-BE49-F238E27FC236}">
+                <a16:creationId xmlns:a16="http://schemas.microsoft.com/office/drawing/2014/main" id="{F7741C2A-3765-4197-9963-39D16AC35F15}"/>
+              </a:ext>
+            </a:extLst>
+          </p:cNvPr>
+          <p:cNvSpPr>
+            <a:spLocks xmlns:a="http://schemas.openxmlformats.org/drawingml/2006/main" noGrp="1"/>
+          </p:cNvSpPr>
+          <p:nvPr/>
+        </p:nvSpPr>
+        <p:spPr>
+          <a:xfrm xmlns:a="http://schemas.openxmlformats.org/drawingml/2006/main">
+            <a:off x="4972050" y="3600450"/>
+            <a:ext cx="2571750" cy="323850"/>
+          </a:xfrm>
+          <a:prstGeom xmlns:a="http://schemas.openxmlformats.org/drawingml/2006/main" prst="rect">
+            <a:avLst/>
+          </a:prstGeom>
+          <a:noFill xmlns:a="http://schemas.openxmlformats.org/drawingml/2006/main"/>
+          <a:ln xmlns:a="http://schemas.openxmlformats.org/drawingml/2006/main" w="0">
+            <a:noFill/>
+            <a:prstDash val="solid"/>
+          </a:ln>
+        </p:spPr>
+        <p:txBody>
+          <a:bodyPr xmlns:a="http://schemas.openxmlformats.org/drawingml/2006/main"/>
+          <a:lstStyle xmlns:a="http://schemas.openxmlformats.org/drawingml/2006/main"/>
+          <a:p xmlns:a="http://schemas.openxmlformats.org/drawingml/2006/main">
+            <a:pPr algn="l">
+              <a:defRPr sz="1275" b="0">
+                <a:solidFill>
+                  <a:srgbClr val="314158"/>
+                </a:solidFill>
+              </a:defRPr>
+            </a:pPr>
+            <a:r>
+              <a:rPr sz="1275" b="0">
+                <a:solidFill>
+                  <a:srgbClr val="314158"/>
+                </a:solidFill>
+              </a:rPr>
+              <a:t>Calibration and Brier score</a:t>
+            </a:r>
+          </a:p>
+        </p:txBody>
+      </p:sp>
+      <p:sp>
+        <p:nvSpPr>
+          <p:cNvPr id="22" name="">
+            <a:extLst xmlns:a="http://schemas.openxmlformats.org/drawingml/2006/main">
+              <a:ext uri="{FF2B5EF4-FFF2-40B4-BE49-F238E27FC236}">
+                <a16:creationId xmlns:a16="http://schemas.microsoft.com/office/drawing/2014/main" id="{493CAA32-E290-4352-8274-87014E9B8DDC}"/>
+              </a:ext>
+            </a:extLst>
+          </p:cNvPr>
+          <p:cNvSpPr>
+            <a:spLocks xmlns:a="http://schemas.openxmlformats.org/drawingml/2006/main" noGrp="1"/>
+          </p:cNvSpPr>
+          <p:nvPr/>
+        </p:nvSpPr>
+        <p:spPr>
+          <a:xfrm xmlns:a="http://schemas.openxmlformats.org/drawingml/2006/main">
+            <a:off x="4705350" y="4057650"/>
+            <a:ext cx="209550" cy="266700"/>
+          </a:xfrm>
+          <a:prstGeom xmlns:a="http://schemas.openxmlformats.org/drawingml/2006/main" prst="rect">
+            <a:avLst/>
+          </a:prstGeom>
+          <a:noFill xmlns:a="http://schemas.openxmlformats.org/drawingml/2006/main"/>
+          <a:ln xmlns:a="http://schemas.openxmlformats.org/drawingml/2006/main" w="0">
+            <a:noFill/>
+            <a:prstDash val="solid"/>
+          </a:ln>
+        </p:spPr>
+        <p:txBody>
+          <a:bodyPr xmlns:a="http://schemas.openxmlformats.org/drawingml/2006/main"/>
+          <a:lstStyle xmlns:a="http://schemas.openxmlformats.org/drawingml/2006/main"/>
+          <a:p xmlns:a="http://schemas.openxmlformats.org/drawingml/2006/main">
+            <a:pPr algn="l">
+              <a:defRPr sz="1275" b="1">
+                <a:solidFill>
+                  <a:srgbClr val="00786F"/>
+                </a:solidFill>
+              </a:defRPr>
+            </a:pPr>
+            <a:r>
+              <a:rPr sz="1275" b="1">
+                <a:solidFill>
+                  <a:srgbClr val="00786F"/>
+                </a:solidFill>
+              </a:rPr>
+              <a:t>•</a:t>
+            </a:r>
+          </a:p>
+        </p:txBody>
+      </p:sp>
+      <p:sp>
+        <p:nvSpPr>
+          <p:cNvPr id="23" name="">
+            <a:extLst xmlns:a="http://schemas.openxmlformats.org/drawingml/2006/main">
+              <a:ext uri="{FF2B5EF4-FFF2-40B4-BE49-F238E27FC236}">
+                <a16:creationId xmlns:a16="http://schemas.microsoft.com/office/drawing/2014/main" id="{2F973D60-EFF1-4097-8321-4A635D5053D4}"/>
+              </a:ext>
+            </a:extLst>
+          </p:cNvPr>
+          <p:cNvSpPr>
+            <a:spLocks xmlns:a="http://schemas.openxmlformats.org/drawingml/2006/main" noGrp="1"/>
+          </p:cNvSpPr>
+          <p:nvPr/>
+        </p:nvSpPr>
+        <p:spPr>
+          <a:xfrm xmlns:a="http://schemas.openxmlformats.org/drawingml/2006/main">
+            <a:off x="4972050" y="4057650"/>
+            <a:ext cx="2571750" cy="323850"/>
+          </a:xfrm>
+          <a:prstGeom xmlns:a="http://schemas.openxmlformats.org/drawingml/2006/main" prst="rect">
+            <a:avLst/>
+          </a:prstGeom>
+          <a:noFill xmlns:a="http://schemas.openxmlformats.org/drawingml/2006/main"/>
+          <a:ln xmlns:a="http://schemas.openxmlformats.org/drawingml/2006/main" w="0">
+            <a:noFill/>
+            <a:prstDash val="solid"/>
+          </a:ln>
+        </p:spPr>
+        <p:txBody>
+          <a:bodyPr xmlns:a="http://schemas.openxmlformats.org/drawingml/2006/main"/>
+          <a:lstStyle xmlns:a="http://schemas.openxmlformats.org/drawingml/2006/main"/>
+          <a:p xmlns:a="http://schemas.openxmlformats.org/drawingml/2006/main">
+            <a:pPr algn="l">
+              <a:defRPr sz="1275" b="0">
+                <a:solidFill>
+                  <a:srgbClr val="314158"/>
+                </a:solidFill>
+              </a:defRPr>
+            </a:pPr>
+            <a:r>
+              <a:rPr sz="1275" b="0">
+                <a:solidFill>
+                  <a:srgbClr val="314158"/>
+                </a:solidFill>
+              </a:rPr>
+              <a:t>Subgroup or temporal validation</a:t>
+            </a:r>
+          </a:p>
+        </p:txBody>
+      </p:sp>
+      <p:sp>
+        <p:nvSpPr>
+          <p:cNvPr id="24" name="">
+            <a:extLst xmlns:a="http://schemas.openxmlformats.org/drawingml/2006/main">
+              <a:ext uri="{FF2B5EF4-FFF2-40B4-BE49-F238E27FC236}">
+                <a16:creationId xmlns:a16="http://schemas.microsoft.com/office/drawing/2014/main" id="{E5249F3F-1135-4EC2-BEF2-C3BF3A37A814}"/>
+              </a:ext>
+            </a:extLst>
+          </p:cNvPr>
+          <p:cNvSpPr>
+            <a:spLocks xmlns:a="http://schemas.openxmlformats.org/drawingml/2006/main" noGrp="1"/>
+          </p:cNvSpPr>
+          <p:nvPr/>
+        </p:nvSpPr>
+        <p:spPr>
+          <a:xfrm xmlns:a="http://schemas.openxmlformats.org/drawingml/2006/main">
+            <a:off x="8267700" y="1885950"/>
+            <a:ext cx="3238500" cy="3333750"/>
+          </a:xfrm>
+          <a:prstGeom xmlns:a="http://schemas.openxmlformats.org/drawingml/2006/main" prst="roundRect">
+            <a:avLst>
+              <a:gd name="adj" fmla="val 2353"/>
+            </a:avLst>
+          </a:prstGeom>
+          <a:solidFill xmlns:a="http://schemas.openxmlformats.org/drawingml/2006/main">
+            <a:srgbClr val="FFFFFF"/>
+          </a:solidFill>
+          <a:ln xmlns:a="http://schemas.openxmlformats.org/drawingml/2006/main" w="9525">
+            <a:solidFill>
+              <a:srgbClr val="E2E8F0"/>
+            </a:solidFill>
+            <a:prstDash val="solid"/>
+          </a:ln>
+        </p:spPr>
+      </p:sp>
+      <p:sp>
+        <p:nvSpPr>
+          <p:cNvPr id="25" name="">
+            <a:extLst xmlns:a="http://schemas.openxmlformats.org/drawingml/2006/main">
+              <a:ext uri="{FF2B5EF4-FFF2-40B4-BE49-F238E27FC236}">
+                <a16:creationId xmlns:a16="http://schemas.microsoft.com/office/drawing/2014/main" id="{81B577DA-1226-438B-AE30-ABAE0539C5AF}"/>
+              </a:ext>
+            </a:extLst>
+          </p:cNvPr>
+          <p:cNvSpPr>
+            <a:spLocks xmlns:a="http://schemas.openxmlformats.org/drawingml/2006/main" noGrp="1"/>
+          </p:cNvSpPr>
+          <p:nvPr/>
+        </p:nvSpPr>
+        <p:spPr>
+          <a:xfrm xmlns:a="http://schemas.openxmlformats.org/drawingml/2006/main">
+            <a:off x="8496300" y="2133600"/>
+            <a:ext cx="2381250" cy="285750"/>
+          </a:xfrm>
+          <a:prstGeom xmlns:a="http://schemas.openxmlformats.org/drawingml/2006/main" prst="rect">
+            <a:avLst/>
+          </a:prstGeom>
+          <a:noFill xmlns:a="http://schemas.openxmlformats.org/drawingml/2006/main"/>
+          <a:ln xmlns:a="http://schemas.openxmlformats.org/drawingml/2006/main" w="0">
+            <a:noFill/>
+            <a:prstDash val="solid"/>
+          </a:ln>
+        </p:spPr>
+        <p:txBody>
+          <a:bodyPr xmlns:a="http://schemas.openxmlformats.org/drawingml/2006/main"/>
+          <a:lstStyle xmlns:a="http://schemas.openxmlformats.org/drawingml/2006/main"/>
+          <a:p xmlns:a="http://schemas.openxmlformats.org/drawingml/2006/main">
+            <a:pPr algn="l">
+              <a:defRPr sz="1800" b="1">
+                <a:solidFill>
+                  <a:srgbClr val="020618"/>
+                </a:solidFill>
+              </a:defRPr>
+            </a:pPr>
+            <a:r>
+              <a:rPr sz="1800" b="1">
+                <a:solidFill>
+                  <a:srgbClr val="020618"/>
+                </a:solidFill>
+              </a:rPr>
+              <a:t>Explainability</a:t>
+            </a:r>
+          </a:p>
+        </p:txBody>
+      </p:sp>
+      <p:sp>
+        <p:nvSpPr>
+          <p:cNvPr id="26" name="">
+            <a:extLst xmlns:a="http://schemas.openxmlformats.org/drawingml/2006/main">
+              <a:ext uri="{FF2B5EF4-FFF2-40B4-BE49-F238E27FC236}">
+                <a16:creationId xmlns:a16="http://schemas.microsoft.com/office/drawing/2014/main" id="{84A97AC1-4339-4E85-824F-D0574388936F}"/>
+              </a:ext>
+            </a:extLst>
+          </p:cNvPr>
+          <p:cNvSpPr>
+            <a:spLocks xmlns:a="http://schemas.openxmlformats.org/drawingml/2006/main" noGrp="1"/>
+          </p:cNvSpPr>
+          <p:nvPr/>
+        </p:nvSpPr>
+        <p:spPr>
+          <a:xfrm xmlns:a="http://schemas.openxmlformats.org/drawingml/2006/main">
+            <a:off x="8496300" y="2686050"/>
+            <a:ext cx="209550" cy="266700"/>
+          </a:xfrm>
+          <a:prstGeom xmlns:a="http://schemas.openxmlformats.org/drawingml/2006/main" prst="rect">
+            <a:avLst/>
+          </a:prstGeom>
+          <a:noFill xmlns:a="http://schemas.openxmlformats.org/drawingml/2006/main"/>
+          <a:ln xmlns:a="http://schemas.openxmlformats.org/drawingml/2006/main" w="0">
+            <a:noFill/>
+            <a:prstDash val="solid"/>
+          </a:ln>
+        </p:spPr>
+        <p:txBody>
+          <a:bodyPr xmlns:a="http://schemas.openxmlformats.org/drawingml/2006/main"/>
+          <a:lstStyle xmlns:a="http://schemas.openxmlformats.org/drawingml/2006/main"/>
+          <a:p xmlns:a="http://schemas.openxmlformats.org/drawingml/2006/main">
+            <a:pPr algn="l">
+              <a:defRPr sz="1275" b="1">
+                <a:solidFill>
+                  <a:srgbClr val="00786F"/>
+                </a:solidFill>
+              </a:defRPr>
+            </a:pPr>
+            <a:r>
+              <a:rPr sz="1275" b="1">
+                <a:solidFill>
+                  <a:srgbClr val="00786F"/>
+                </a:solidFill>
+              </a:rPr>
+              <a:t>•</a:t>
+            </a:r>
+          </a:p>
+        </p:txBody>
+      </p:sp>
+      <p:sp>
+        <p:nvSpPr>
+          <p:cNvPr id="27" name="">
+            <a:extLst xmlns:a="http://schemas.openxmlformats.org/drawingml/2006/main">
+              <a:ext uri="{FF2B5EF4-FFF2-40B4-BE49-F238E27FC236}">
+                <a16:creationId xmlns:a16="http://schemas.microsoft.com/office/drawing/2014/main" id="{750C9F1E-673C-4C14-BF03-A10AAC36626C}"/>
+              </a:ext>
+            </a:extLst>
+          </p:cNvPr>
+          <p:cNvSpPr>
+            <a:spLocks xmlns:a="http://schemas.openxmlformats.org/drawingml/2006/main" noGrp="1"/>
+          </p:cNvSpPr>
+          <p:nvPr/>
+        </p:nvSpPr>
+        <p:spPr>
+          <a:xfrm xmlns:a="http://schemas.openxmlformats.org/drawingml/2006/main">
+            <a:off x="8763000" y="2686050"/>
+            <a:ext cx="2571750" cy="323850"/>
+          </a:xfrm>
+          <a:prstGeom xmlns:a="http://schemas.openxmlformats.org/drawingml/2006/main" prst="rect">
+            <a:avLst/>
+          </a:prstGeom>
+          <a:noFill xmlns:a="http://schemas.openxmlformats.org/drawingml/2006/main"/>
+          <a:ln xmlns:a="http://schemas.openxmlformats.org/drawingml/2006/main" w="0">
+            <a:noFill/>
+            <a:prstDash val="solid"/>
+          </a:ln>
+        </p:spPr>
+        <p:txBody>
+          <a:bodyPr xmlns:a="http://schemas.openxmlformats.org/drawingml/2006/main"/>
+          <a:lstStyle xmlns:a="http://schemas.openxmlformats.org/drawingml/2006/main"/>
+          <a:p xmlns:a="http://schemas.openxmlformats.org/drawingml/2006/main">
+            <a:pPr algn="l">
+              <a:defRPr sz="1275" b="0">
+                <a:solidFill>
+                  <a:srgbClr val="314158"/>
+                </a:solidFill>
+              </a:defRPr>
+            </a:pPr>
+            <a:r>
+              <a:rPr sz="1275" b="0">
+                <a:solidFill>
+                  <a:srgbClr val="314158"/>
+                </a:solidFill>
+              </a:rPr>
+              <a:t>Global feature importance</a:t>
+            </a:r>
+          </a:p>
+        </p:txBody>
+      </p:sp>
+      <p:sp>
+        <p:nvSpPr>
+          <p:cNvPr id="28" name="">
+            <a:extLst xmlns:a="http://schemas.openxmlformats.org/drawingml/2006/main">
+              <a:ext uri="{FF2B5EF4-FFF2-40B4-BE49-F238E27FC236}">
+                <a16:creationId xmlns:a16="http://schemas.microsoft.com/office/drawing/2014/main" id="{59FF964A-BAF8-4987-9749-2E0131377532}"/>
+              </a:ext>
+            </a:extLst>
+          </p:cNvPr>
+          <p:cNvSpPr>
+            <a:spLocks xmlns:a="http://schemas.openxmlformats.org/drawingml/2006/main" noGrp="1"/>
+          </p:cNvSpPr>
+          <p:nvPr/>
+        </p:nvSpPr>
+        <p:spPr>
+          <a:xfrm xmlns:a="http://schemas.openxmlformats.org/drawingml/2006/main">
+            <a:off x="8496300" y="3143250"/>
+            <a:ext cx="209550" cy="266700"/>
+          </a:xfrm>
+          <a:prstGeom xmlns:a="http://schemas.openxmlformats.org/drawingml/2006/main" prst="rect">
+            <a:avLst/>
+          </a:prstGeom>
+          <a:noFill xmlns:a="http://schemas.openxmlformats.org/drawingml/2006/main"/>
+          <a:ln xmlns:a="http://schemas.openxmlformats.org/drawingml/2006/main" w="0">
+            <a:noFill/>
+            <a:prstDash val="solid"/>
+          </a:ln>
+        </p:spPr>
+        <p:txBody>
+          <a:bodyPr xmlns:a="http://schemas.openxmlformats.org/drawingml/2006/main"/>
+          <a:lstStyle xmlns:a="http://schemas.openxmlformats.org/drawingml/2006/main"/>
+          <a:p xmlns:a="http://schemas.openxmlformats.org/drawingml/2006/main">
+            <a:pPr algn="l">
+              <a:defRPr sz="1275" b="1">
+                <a:solidFill>
+                  <a:srgbClr val="00786F"/>
+                </a:solidFill>
+              </a:defRPr>
+            </a:pPr>
+            <a:r>
+              <a:rPr sz="1275" b="1">
+                <a:solidFill>
+                  <a:srgbClr val="00786F"/>
+                </a:solidFill>
+              </a:rPr>
+              <a:t>•</a:t>
+            </a:r>
+          </a:p>
+        </p:txBody>
+      </p:sp>
+      <p:sp>
+        <p:nvSpPr>
+          <p:cNvPr id="29" name="">
+            <a:extLst xmlns:a="http://schemas.openxmlformats.org/drawingml/2006/main">
+              <a:ext uri="{FF2B5EF4-FFF2-40B4-BE49-F238E27FC236}">
+                <a16:creationId xmlns:a16="http://schemas.microsoft.com/office/drawing/2014/main" id="{7BD2C66B-3912-4A46-A1C0-A977C1B919B7}"/>
+              </a:ext>
+            </a:extLst>
+          </p:cNvPr>
+          <p:cNvSpPr>
+            <a:spLocks xmlns:a="http://schemas.openxmlformats.org/drawingml/2006/main" noGrp="1"/>
+          </p:cNvSpPr>
+          <p:nvPr/>
+        </p:nvSpPr>
+        <p:spPr>
+          <a:xfrm xmlns:a="http://schemas.openxmlformats.org/drawingml/2006/main">
+            <a:off x="8763000" y="3143250"/>
+            <a:ext cx="2571750" cy="323850"/>
+          </a:xfrm>
+          <a:prstGeom xmlns:a="http://schemas.openxmlformats.org/drawingml/2006/main" prst="rect">
+            <a:avLst/>
+          </a:prstGeom>
+          <a:noFill xmlns:a="http://schemas.openxmlformats.org/drawingml/2006/main"/>
+          <a:ln xmlns:a="http://schemas.openxmlformats.org/drawingml/2006/main" w="0">
+            <a:noFill/>
+            <a:prstDash val="solid"/>
+          </a:ln>
+        </p:spPr>
+        <p:txBody>
+          <a:bodyPr xmlns:a="http://schemas.openxmlformats.org/drawingml/2006/main"/>
+          <a:lstStyle xmlns:a="http://schemas.openxmlformats.org/drawingml/2006/main"/>
+          <a:p xmlns:a="http://schemas.openxmlformats.org/drawingml/2006/main">
+            <a:pPr algn="l">
+              <a:defRPr sz="1275" b="0">
+                <a:solidFill>
+                  <a:srgbClr val="314158"/>
+                </a:solidFill>
+              </a:defRPr>
+            </a:pPr>
+            <a:r>
+              <a:rPr sz="1275" b="0">
+                <a:solidFill>
+                  <a:srgbClr val="314158"/>
+                </a:solidFill>
+              </a:rPr>
+              <a:t>Patient-level explanation</a:t>
+            </a:r>
+          </a:p>
+        </p:txBody>
+      </p:sp>
+      <p:sp>
+        <p:nvSpPr>
+          <p:cNvPr id="30" name="">
+            <a:extLst xmlns:a="http://schemas.openxmlformats.org/drawingml/2006/main">
+              <a:ext uri="{FF2B5EF4-FFF2-40B4-BE49-F238E27FC236}">
+                <a16:creationId xmlns:a16="http://schemas.microsoft.com/office/drawing/2014/main" id="{C1A887F9-E9FA-49E5-AB1C-8D1C2FDBAC33}"/>
+              </a:ext>
+            </a:extLst>
+          </p:cNvPr>
+          <p:cNvSpPr>
+            <a:spLocks xmlns:a="http://schemas.openxmlformats.org/drawingml/2006/main" noGrp="1"/>
+          </p:cNvSpPr>
+          <p:nvPr/>
+        </p:nvSpPr>
+        <p:spPr>
+          <a:xfrm xmlns:a="http://schemas.openxmlformats.org/drawingml/2006/main">
+            <a:off x="8496300" y="3600450"/>
+            <a:ext cx="209550" cy="266700"/>
+          </a:xfrm>
+          <a:prstGeom xmlns:a="http://schemas.openxmlformats.org/drawingml/2006/main" prst="rect">
+            <a:avLst/>
+          </a:prstGeom>
+          <a:noFill xmlns:a="http://schemas.openxmlformats.org/drawingml/2006/main"/>
+          <a:ln xmlns:a="http://schemas.openxmlformats.org/drawingml/2006/main" w="0">
+            <a:noFill/>
+            <a:prstDash val="solid"/>
+          </a:ln>
+        </p:spPr>
+        <p:txBody>
+          <a:bodyPr xmlns:a="http://schemas.openxmlformats.org/drawingml/2006/main"/>
+          <a:lstStyle xmlns:a="http://schemas.openxmlformats.org/drawingml/2006/main"/>
+          <a:p xmlns:a="http://schemas.openxmlformats.org/drawingml/2006/main">
+            <a:pPr algn="l">
+              <a:defRPr sz="1275" b="1">
+                <a:solidFill>
+                  <a:srgbClr val="00786F"/>
+                </a:solidFill>
+              </a:defRPr>
+            </a:pPr>
+            <a:r>
+              <a:rPr sz="1275" b="1">
+                <a:solidFill>
+                  <a:srgbClr val="00786F"/>
+                </a:solidFill>
+              </a:rPr>
+              <a:t>•</a:t>
+            </a:r>
+          </a:p>
+        </p:txBody>
+      </p:sp>
+      <p:sp>
+        <p:nvSpPr>
+          <p:cNvPr id="31" name="">
+            <a:extLst xmlns:a="http://schemas.openxmlformats.org/drawingml/2006/main">
+              <a:ext uri="{FF2B5EF4-FFF2-40B4-BE49-F238E27FC236}">
+                <a16:creationId xmlns:a16="http://schemas.microsoft.com/office/drawing/2014/main" id="{A5A3442C-774C-4E8F-B3FD-E4288AEF6C04}"/>
+              </a:ext>
+            </a:extLst>
+          </p:cNvPr>
+          <p:cNvSpPr>
+            <a:spLocks xmlns:a="http://schemas.openxmlformats.org/drawingml/2006/main" noGrp="1"/>
+          </p:cNvSpPr>
+          <p:nvPr/>
+        </p:nvSpPr>
+        <p:spPr>
+          <a:xfrm xmlns:a="http://schemas.openxmlformats.org/drawingml/2006/main">
+            <a:off x="8763000" y="3600450"/>
+            <a:ext cx="2571750" cy="323850"/>
+          </a:xfrm>
+          <a:prstGeom xmlns:a="http://schemas.openxmlformats.org/drawingml/2006/main" prst="rect">
+            <a:avLst/>
+          </a:prstGeom>
+          <a:noFill xmlns:a="http://schemas.openxmlformats.org/drawingml/2006/main"/>
+          <a:ln xmlns:a="http://schemas.openxmlformats.org/drawingml/2006/main" w="0">
+            <a:noFill/>
+            <a:prstDash val="solid"/>
+          </a:ln>
+        </p:spPr>
+        <p:txBody>
+          <a:bodyPr xmlns:a="http://schemas.openxmlformats.org/drawingml/2006/main"/>
+          <a:lstStyle xmlns:a="http://schemas.openxmlformats.org/drawingml/2006/main"/>
+          <a:p xmlns:a="http://schemas.openxmlformats.org/drawingml/2006/main">
+            <a:pPr algn="l">
+              <a:defRPr sz="1275" b="0">
+                <a:solidFill>
+                  <a:srgbClr val="314158"/>
+                </a:solidFill>
+              </a:defRPr>
+            </a:pPr>
+            <a:r>
+              <a:rPr sz="1275" b="0">
+                <a:solidFill>
+                  <a:srgbClr val="314158"/>
+                </a:solidFill>
+              </a:rPr>
+              <a:t>Modifiable/non-modifiable factors</a:t>
+            </a:r>
+          </a:p>
+        </p:txBody>
+      </p:sp>
+      <p:sp>
+        <p:nvSpPr>
+          <p:cNvPr id="32" name="">
+            <a:extLst xmlns:a="http://schemas.openxmlformats.org/drawingml/2006/main">
+              <a:ext uri="{FF2B5EF4-FFF2-40B4-BE49-F238E27FC236}">
+                <a16:creationId xmlns:a16="http://schemas.microsoft.com/office/drawing/2014/main" id="{96DE4941-858A-4457-A5BC-88FD6860AF08}"/>
+              </a:ext>
+            </a:extLst>
+          </p:cNvPr>
+          <p:cNvSpPr>
+            <a:spLocks xmlns:a="http://schemas.openxmlformats.org/drawingml/2006/main" noGrp="1"/>
+          </p:cNvSpPr>
+          <p:nvPr/>
+        </p:nvSpPr>
+        <p:spPr>
+          <a:xfrm xmlns:a="http://schemas.openxmlformats.org/drawingml/2006/main">
+            <a:off x="8496300" y="4057650"/>
+            <a:ext cx="209550" cy="266700"/>
+          </a:xfrm>
+          <a:prstGeom xmlns:a="http://schemas.openxmlformats.org/drawingml/2006/main" prst="rect">
+            <a:avLst/>
+          </a:prstGeom>
+          <a:noFill xmlns:a="http://schemas.openxmlformats.org/drawingml/2006/main"/>
+          <a:ln xmlns:a="http://schemas.openxmlformats.org/drawingml/2006/main" w="0">
+            <a:noFill/>
+            <a:prstDash val="solid"/>
+          </a:ln>
+        </p:spPr>
+        <p:txBody>
+          <a:bodyPr xmlns:a="http://schemas.openxmlformats.org/drawingml/2006/main"/>
+          <a:lstStyle xmlns:a="http://schemas.openxmlformats.org/drawingml/2006/main"/>
+          <a:p xmlns:a="http://schemas.openxmlformats.org/drawingml/2006/main">
+            <a:pPr algn="l">
+              <a:defRPr sz="1275" b="1">
+                <a:solidFill>
+                  <a:srgbClr val="00786F"/>
+                </a:solidFill>
+              </a:defRPr>
+            </a:pPr>
+            <a:r>
+              <a:rPr sz="1275" b="1">
+                <a:solidFill>
+                  <a:srgbClr val="00786F"/>
+                </a:solidFill>
+              </a:rPr>
+              <a:t>•</a:t>
+            </a:r>
+          </a:p>
+        </p:txBody>
+      </p:sp>
+      <p:sp>
+        <p:nvSpPr>
+          <p:cNvPr id="33" name="">
+            <a:extLst xmlns:a="http://schemas.openxmlformats.org/drawingml/2006/main">
+              <a:ext uri="{FF2B5EF4-FFF2-40B4-BE49-F238E27FC236}">
+                <a16:creationId xmlns:a16="http://schemas.microsoft.com/office/drawing/2014/main" id="{1724D165-0607-448E-A3A7-5A2F50B46E34}"/>
+              </a:ext>
+            </a:extLst>
+          </p:cNvPr>
+          <p:cNvSpPr>
+            <a:spLocks xmlns:a="http://schemas.openxmlformats.org/drawingml/2006/main" noGrp="1"/>
+          </p:cNvSpPr>
+          <p:nvPr/>
+        </p:nvSpPr>
+        <p:spPr>
+          <a:xfrm xmlns:a="http://schemas.openxmlformats.org/drawingml/2006/main">
+            <a:off x="8763000" y="4057650"/>
+            <a:ext cx="2571750" cy="323850"/>
+          </a:xfrm>
+          <a:prstGeom xmlns:a="http://schemas.openxmlformats.org/drawingml/2006/main" prst="rect">
+            <a:avLst/>
+          </a:prstGeom>
+          <a:noFill xmlns:a="http://schemas.openxmlformats.org/drawingml/2006/main"/>
+          <a:ln xmlns:a="http://schemas.openxmlformats.org/drawingml/2006/main" w="0">
+            <a:noFill/>
+            <a:prstDash val="solid"/>
+          </a:ln>
+        </p:spPr>
+        <p:txBody>
+          <a:bodyPr xmlns:a="http://schemas.openxmlformats.org/drawingml/2006/main"/>
+          <a:lstStyle xmlns:a="http://schemas.openxmlformats.org/drawingml/2006/main"/>
+          <a:p xmlns:a="http://schemas.openxmlformats.org/drawingml/2006/main">
+            <a:pPr algn="l">
+              <a:defRPr sz="1275" b="0">
+                <a:solidFill>
+                  <a:srgbClr val="314158"/>
+                </a:solidFill>
+              </a:defRPr>
+            </a:pPr>
+            <a:r>
+              <a:rPr sz="1275" b="0">
+                <a:solidFill>
+                  <a:srgbClr val="314158"/>
+                </a:solidFill>
+              </a:rPr>
+              <a:t>Clinician usefulness review</a:t>
+            </a:r>
+          </a:p>
+        </p:txBody>
+      </p:sp>
+      <p:sp>
+        <p:nvSpPr>
+          <p:cNvPr id="34" name="">
+            <a:extLst xmlns:a="http://schemas.openxmlformats.org/drawingml/2006/main">
+              <a:ext uri="{FF2B5EF4-FFF2-40B4-BE49-F238E27FC236}">
+                <a16:creationId xmlns:a16="http://schemas.microsoft.com/office/drawing/2014/main" id="{2FB90F6E-68FD-4DBB-AE78-0584A03A78BE}"/>
+              </a:ext>
+            </a:extLst>
+          </p:cNvPr>
+          <p:cNvSpPr>
+            <a:spLocks xmlns:a="http://schemas.openxmlformats.org/drawingml/2006/main" noGrp="1"/>
+          </p:cNvSpPr>
+          <p:nvPr/>
+        </p:nvSpPr>
+        <p:spPr>
+          <a:xfrm xmlns:a="http://schemas.openxmlformats.org/drawingml/2006/main">
+            <a:off x="685800" y="6400800"/>
+            <a:ext cx="2857500" cy="190500"/>
+          </a:xfrm>
+          <a:prstGeom xmlns:a="http://schemas.openxmlformats.org/drawingml/2006/main" prst="rect">
+            <a:avLst/>
+          </a:prstGeom>
+          <a:noFill xmlns:a="http://schemas.openxmlformats.org/drawingml/2006/main"/>
+          <a:ln xmlns:a="http://schemas.openxmlformats.org/drawingml/2006/main" w="0">
+            <a:noFill/>
+            <a:prstDash val="solid"/>
+          </a:ln>
+        </p:spPr>
+        <p:txBody>
+          <a:bodyPr xmlns:a="http://schemas.openxmlformats.org/drawingml/2006/main"/>
+          <a:lstStyle xmlns:a="http://schemas.openxmlformats.org/drawingml/2006/main"/>
+          <a:p xmlns:a="http://schemas.openxmlformats.org/drawingml/2006/main">
+            <a:pPr algn="l">
+              <a:defRPr sz="825" b="0">
+                <a:solidFill>
+                  <a:srgbClr val="90A1B9"/>
+                </a:solidFill>
+              </a:defRPr>
+            </a:pPr>
+            <a:r>
+              <a:rPr sz="825" b="0">
+                <a:solidFill>
+                  <a:srgbClr val="90A1B9"/>
+                </a:solidFill>
+              </a:rPr>
+              <a:t>Faculty backup slide 3</a:t>
+            </a:r>
+          </a:p>
+        </p:txBody>
+      </p:sp>
+    </p:spTree>
+    <p:extLst>
+      <p:ext uri="{BB962C8B-B14F-4D97-AF65-F5344CB8AC3E}">
+        <p14:creationId xmlns:p14="http://schemas.microsoft.com/office/powerpoint/2010/main" val="2007013884"/>
+      </p:ext>
+    </p:extLst>
+  </p:cSld>
+</p:sld>
+</file>
+
+<file path=ppt/slides/slide21.xml><?xml version="1.0" encoding="utf-8"?>
+<p:sld xmlns:p="http://schemas.openxmlformats.org/presentationml/2006/main">
+  <p:cSld>
+    <p:bg>
+      <p:bgPr>
+        <a:solidFill xmlns:a="http://schemas.openxmlformats.org/drawingml/2006/main">
+          <a:srgbClr val="F8FAFC"/>
+        </a:solidFill>
+      </p:bgPr>
+    </p:bg>
+    <p:spTree>
+      <p:nvGrpSpPr>
+        <p:cNvPr id="1" name=""/>
+        <p:cNvGrpSpPr/>
+        <p:nvPr/>
+      </p:nvGrpSpPr>
+      <p:grpSpPr>
+        <a:xfrm xmlns:a="http://schemas.openxmlformats.org/drawingml/2006/main"/>
+      </p:grpSpPr>
+      <p:sp>
+        <p:nvSpPr>
+          <p:cNvPr id="1" name="">
+            <a:extLst xmlns:a="http://schemas.openxmlformats.org/drawingml/2006/main">
+              <a:ext uri="{FF2B5EF4-FFF2-40B4-BE49-F238E27FC236}">
+                <a16:creationId xmlns:a16="http://schemas.microsoft.com/office/drawing/2014/main" id="{2751051B-19D3-4597-9F52-560D57ED7194}"/>
+              </a:ext>
+            </a:extLst>
+          </p:cNvPr>
+          <p:cNvSpPr>
+            <a:spLocks xmlns:a="http://schemas.openxmlformats.org/drawingml/2006/main" noGrp="1"/>
+          </p:cNvSpPr>
+          <p:nvPr/>
+        </p:nvSpPr>
+        <p:spPr>
+          <a:xfrm xmlns:a="http://schemas.openxmlformats.org/drawingml/2006/main">
+            <a:off x="685800" y="419100"/>
+            <a:ext cx="1714500" cy="228600"/>
+          </a:xfrm>
+          <a:prstGeom xmlns:a="http://schemas.openxmlformats.org/drawingml/2006/main" prst="rect">
+            <a:avLst/>
+          </a:prstGeom>
+          <a:noFill xmlns:a="http://schemas.openxmlformats.org/drawingml/2006/main"/>
+          <a:ln xmlns:a="http://schemas.openxmlformats.org/drawingml/2006/main" w="0">
+            <a:noFill/>
+            <a:prstDash val="solid"/>
+          </a:ln>
+        </p:spPr>
+        <p:txBody>
+          <a:bodyPr xmlns:a="http://schemas.openxmlformats.org/drawingml/2006/main"/>
+          <a:lstStyle xmlns:a="http://schemas.openxmlformats.org/drawingml/2006/main"/>
+          <a:p xmlns:a="http://schemas.openxmlformats.org/drawingml/2006/main">
+            <a:pPr algn="l">
+              <a:defRPr sz="975" b="1">
+                <a:solidFill>
+                  <a:srgbClr val="00786F"/>
+                </a:solidFill>
+              </a:defRPr>
+            </a:pPr>
+            <a:r>
+              <a:rPr sz="975" b="1">
+                <a:solidFill>
+                  <a:srgbClr val="00786F"/>
+                </a:solidFill>
+              </a:rPr>
+              <a:t>APPENDIX</a:t>
+            </a:r>
+          </a:p>
+        </p:txBody>
+      </p:sp>
+      <p:sp>
+        <p:nvSpPr>
+          <p:cNvPr id="2" name="">
+            <a:extLst xmlns:a="http://schemas.openxmlformats.org/drawingml/2006/main">
+              <a:ext uri="{FF2B5EF4-FFF2-40B4-BE49-F238E27FC236}">
+                <a16:creationId xmlns:a16="http://schemas.microsoft.com/office/drawing/2014/main" id="{61599C9C-B0D1-47FE-A7BC-43E9C32016D3}"/>
+              </a:ext>
+            </a:extLst>
+          </p:cNvPr>
+          <p:cNvSpPr>
+            <a:spLocks xmlns:a="http://schemas.openxmlformats.org/drawingml/2006/main" noGrp="1"/>
+          </p:cNvSpPr>
+          <p:nvPr/>
+        </p:nvSpPr>
+        <p:spPr>
+          <a:xfrm xmlns:a="http://schemas.openxmlformats.org/drawingml/2006/main">
+            <a:off x="685800" y="742950"/>
+            <a:ext cx="8572500" cy="514350"/>
+          </a:xfrm>
+          <a:prstGeom xmlns:a="http://schemas.openxmlformats.org/drawingml/2006/main" prst="rect">
+            <a:avLst/>
+          </a:prstGeom>
+          <a:noFill xmlns:a="http://schemas.openxmlformats.org/drawingml/2006/main"/>
+          <a:ln xmlns:a="http://schemas.openxmlformats.org/drawingml/2006/main" w="0">
+            <a:noFill/>
+            <a:prstDash val="solid"/>
+          </a:ln>
+        </p:spPr>
+        <p:txBody>
+          <a:bodyPr xmlns:a="http://schemas.openxmlformats.org/drawingml/2006/main"/>
+          <a:lstStyle xmlns:a="http://schemas.openxmlformats.org/drawingml/2006/main"/>
+          <a:p xmlns:a="http://schemas.openxmlformats.org/drawingml/2006/main">
+            <a:pPr algn="l">
+              <a:defRPr sz="2550" b="1">
+                <a:solidFill>
+                  <a:srgbClr val="020618"/>
+                </a:solidFill>
+              </a:defRPr>
+            </a:pPr>
+            <a:r>
+              <a:rPr sz="2550" b="1">
+                <a:solidFill>
+                  <a:srgbClr val="020618"/>
+                </a:solidFill>
+              </a:rPr>
+              <a:t>Panel backup: clinic discussion checklist</a:t>
+            </a:r>
+          </a:p>
+        </p:txBody>
+      </p:sp>
+      <p:sp>
+        <p:nvSpPr>
+          <p:cNvPr id="3" name="">
+            <a:extLst xmlns:a="http://schemas.openxmlformats.org/drawingml/2006/main">
+              <a:ext uri="{FF2B5EF4-FFF2-40B4-BE49-F238E27FC236}">
+                <a16:creationId xmlns:a16="http://schemas.microsoft.com/office/drawing/2014/main" id="{F8A379CA-5691-4FED-960A-416856335015}"/>
+              </a:ext>
+            </a:extLst>
+          </p:cNvPr>
+          <p:cNvSpPr>
+            <a:spLocks xmlns:a="http://schemas.openxmlformats.org/drawingml/2006/main" noGrp="1"/>
+          </p:cNvSpPr>
+          <p:nvPr/>
+        </p:nvSpPr>
+        <p:spPr>
+          <a:xfrm xmlns:a="http://schemas.openxmlformats.org/drawingml/2006/main">
+            <a:off x="685800" y="1238250"/>
+            <a:ext cx="9048750" cy="400050"/>
+          </a:xfrm>
+          <a:prstGeom xmlns:a="http://schemas.openxmlformats.org/drawingml/2006/main" prst="rect">
+            <a:avLst/>
+          </a:prstGeom>
+          <a:noFill xmlns:a="http://schemas.openxmlformats.org/drawingml/2006/main"/>
+          <a:ln xmlns:a="http://schemas.openxmlformats.org/drawingml/2006/main" w="0">
+            <a:noFill/>
+            <a:prstDash val="solid"/>
+          </a:ln>
+        </p:spPr>
+        <p:txBody>
+          <a:bodyPr xmlns:a="http://schemas.openxmlformats.org/drawingml/2006/main"/>
+          <a:lstStyle xmlns:a="http://schemas.openxmlformats.org/drawingml/2006/main"/>
+          <a:p xmlns:a="http://schemas.openxmlformats.org/drawingml/2006/main">
+            <a:pPr algn="l">
+              <a:defRPr sz="1350" b="0">
+                <a:solidFill>
+                  <a:srgbClr val="45556C"/>
+                </a:solidFill>
+              </a:defRPr>
+            </a:pPr>
+            <a:r>
+              <a:rPr sz="1350" b="0">
+                <a:solidFill>
+                  <a:srgbClr val="45556C"/>
+                </a:solidFill>
+              </a:rPr>
+              <a:t>These answers decide the final title and methodology.</a:t>
+            </a:r>
+          </a:p>
+        </p:txBody>
+      </p:sp>
+      <p:sp>
+        <p:nvSpPr>
+          <p:cNvPr id="4" name="">
+            <a:extLst xmlns:a="http://schemas.openxmlformats.org/drawingml/2006/main">
+              <a:ext uri="{FF2B5EF4-FFF2-40B4-BE49-F238E27FC236}">
+                <a16:creationId xmlns:a16="http://schemas.microsoft.com/office/drawing/2014/main" id="{5EF7CBEF-F7A2-457D-82A1-9631F98E8BCD}"/>
+              </a:ext>
+            </a:extLst>
+          </p:cNvPr>
+          <p:cNvSpPr>
+            <a:spLocks xmlns:a="http://schemas.openxmlformats.org/drawingml/2006/main" noGrp="1"/>
+          </p:cNvSpPr>
+          <p:nvPr/>
+        </p:nvSpPr>
+        <p:spPr>
+          <a:xfrm xmlns:a="http://schemas.openxmlformats.org/drawingml/2006/main">
+            <a:off x="1047750" y="1905000"/>
+            <a:ext cx="209550" cy="266700"/>
+          </a:xfrm>
+          <a:prstGeom xmlns:a="http://schemas.openxmlformats.org/drawingml/2006/main" prst="rect">
+            <a:avLst/>
+          </a:prstGeom>
+          <a:noFill xmlns:a="http://schemas.openxmlformats.org/drawingml/2006/main"/>
+          <a:ln xmlns:a="http://schemas.openxmlformats.org/drawingml/2006/main" w="0">
+            <a:noFill/>
+            <a:prstDash val="solid"/>
+          </a:ln>
+        </p:spPr>
+        <p:txBody>
+          <a:bodyPr xmlns:a="http://schemas.openxmlformats.org/drawingml/2006/main"/>
+          <a:lstStyle xmlns:a="http://schemas.openxmlformats.org/drawingml/2006/main"/>
+          <a:p xmlns:a="http://schemas.openxmlformats.org/drawingml/2006/main">
+            <a:pPr algn="l">
+              <a:defRPr sz="1500" b="1">
+                <a:solidFill>
+                  <a:srgbClr val="00786F"/>
+                </a:solidFill>
+              </a:defRPr>
+            </a:pPr>
+            <a:r>
+              <a:rPr sz="1500" b="1">
+                <a:solidFill>
+                  <a:srgbClr val="00786F"/>
+                </a:solidFill>
+              </a:rPr>
+              <a:t>•</a:t>
+            </a:r>
+          </a:p>
+        </p:txBody>
+      </p:sp>
+      <p:sp>
+        <p:nvSpPr>
+          <p:cNvPr id="5" name="">
+            <a:extLst xmlns:a="http://schemas.openxmlformats.org/drawingml/2006/main">
+              <a:ext uri="{FF2B5EF4-FFF2-40B4-BE49-F238E27FC236}">
+                <a16:creationId xmlns:a16="http://schemas.microsoft.com/office/drawing/2014/main" id="{A2C2CEB3-72F5-4313-B39D-576D9F131EB9}"/>
+              </a:ext>
+            </a:extLst>
+          </p:cNvPr>
+          <p:cNvSpPr>
+            <a:spLocks xmlns:a="http://schemas.openxmlformats.org/drawingml/2006/main" noGrp="1"/>
+          </p:cNvSpPr>
+          <p:nvPr/>
+        </p:nvSpPr>
+        <p:spPr>
+          <a:xfrm xmlns:a="http://schemas.openxmlformats.org/drawingml/2006/main">
+            <a:off x="1314450" y="1905000"/>
+            <a:ext cx="9334500" cy="323850"/>
+          </a:xfrm>
+          <a:prstGeom xmlns:a="http://schemas.openxmlformats.org/drawingml/2006/main" prst="rect">
+            <a:avLst/>
+          </a:prstGeom>
+          <a:noFill xmlns:a="http://schemas.openxmlformats.org/drawingml/2006/main"/>
+          <a:ln xmlns:a="http://schemas.openxmlformats.org/drawingml/2006/main" w="0">
+            <a:noFill/>
+            <a:prstDash val="solid"/>
+          </a:ln>
+        </p:spPr>
+        <p:txBody>
+          <a:bodyPr xmlns:a="http://schemas.openxmlformats.org/drawingml/2006/main"/>
+          <a:lstStyle xmlns:a="http://schemas.openxmlformats.org/drawingml/2006/main"/>
+          <a:p xmlns:a="http://schemas.openxmlformats.org/drawingml/2006/main">
+            <a:pPr algn="l">
+              <a:defRPr sz="1500" b="0">
+                <a:solidFill>
+                  <a:srgbClr val="314158"/>
+                </a:solidFill>
+              </a:defRPr>
+            </a:pPr>
+            <a:r>
+              <a:rPr sz="1500" b="0">
+                <a:solidFill>
+                  <a:srgbClr val="314158"/>
+                </a:solidFill>
+              </a:rPr>
+              <a:t>How many anonymized IVF/ICSI cycles from 2021-2025 can be shared?</a:t>
+            </a:r>
+          </a:p>
+        </p:txBody>
+      </p:sp>
+      <p:sp>
+        <p:nvSpPr>
+          <p:cNvPr id="6" name="">
+            <a:extLst xmlns:a="http://schemas.openxmlformats.org/drawingml/2006/main">
+              <a:ext uri="{FF2B5EF4-FFF2-40B4-BE49-F238E27FC236}">
+                <a16:creationId xmlns:a16="http://schemas.microsoft.com/office/drawing/2014/main" id="{CD6005CF-63C6-42D4-8822-A116F940C4C9}"/>
+              </a:ext>
+            </a:extLst>
+          </p:cNvPr>
+          <p:cNvSpPr>
+            <a:spLocks xmlns:a="http://schemas.openxmlformats.org/drawingml/2006/main" noGrp="1"/>
+          </p:cNvSpPr>
+          <p:nvPr/>
+        </p:nvSpPr>
+        <p:spPr>
+          <a:xfrm xmlns:a="http://schemas.openxmlformats.org/drawingml/2006/main">
+            <a:off x="1047750" y="2457450"/>
+            <a:ext cx="209550" cy="266700"/>
+          </a:xfrm>
+          <a:prstGeom xmlns:a="http://schemas.openxmlformats.org/drawingml/2006/main" prst="rect">
+            <a:avLst/>
+          </a:prstGeom>
+          <a:noFill xmlns:a="http://schemas.openxmlformats.org/drawingml/2006/main"/>
+          <a:ln xmlns:a="http://schemas.openxmlformats.org/drawingml/2006/main" w="0">
+            <a:noFill/>
+            <a:prstDash val="solid"/>
+          </a:ln>
+        </p:spPr>
+        <p:txBody>
+          <a:bodyPr xmlns:a="http://schemas.openxmlformats.org/drawingml/2006/main"/>
+          <a:lstStyle xmlns:a="http://schemas.openxmlformats.org/drawingml/2006/main"/>
+          <a:p xmlns:a="http://schemas.openxmlformats.org/drawingml/2006/main">
+            <a:pPr algn="l">
+              <a:defRPr sz="1500" b="1">
+                <a:solidFill>
+                  <a:srgbClr val="00786F"/>
+                </a:solidFill>
+              </a:defRPr>
+            </a:pPr>
+            <a:r>
+              <a:rPr sz="1500" b="1">
+                <a:solidFill>
+                  <a:srgbClr val="00786F"/>
+                </a:solidFill>
+              </a:rPr>
+              <a:t>•</a:t>
+            </a:r>
+          </a:p>
+        </p:txBody>
+      </p:sp>
+      <p:sp>
+        <p:nvSpPr>
+          <p:cNvPr id="7" name="">
+            <a:extLst xmlns:a="http://schemas.openxmlformats.org/drawingml/2006/main">
+              <a:ext uri="{FF2B5EF4-FFF2-40B4-BE49-F238E27FC236}">
+                <a16:creationId xmlns:a16="http://schemas.microsoft.com/office/drawing/2014/main" id="{D99ABE9A-C684-43F7-9135-3E4012A41C08}"/>
+              </a:ext>
+            </a:extLst>
+          </p:cNvPr>
+          <p:cNvSpPr>
+            <a:spLocks xmlns:a="http://schemas.openxmlformats.org/drawingml/2006/main" noGrp="1"/>
+          </p:cNvSpPr>
+          <p:nvPr/>
+        </p:nvSpPr>
+        <p:spPr>
+          <a:xfrm xmlns:a="http://schemas.openxmlformats.org/drawingml/2006/main">
+            <a:off x="1314450" y="2457450"/>
+            <a:ext cx="9334500" cy="323850"/>
+          </a:xfrm>
+          <a:prstGeom xmlns:a="http://schemas.openxmlformats.org/drawingml/2006/main" prst="rect">
+            <a:avLst/>
+          </a:prstGeom>
+          <a:noFill xmlns:a="http://schemas.openxmlformats.org/drawingml/2006/main"/>
+          <a:ln xmlns:a="http://schemas.openxmlformats.org/drawingml/2006/main" w="0">
+            <a:noFill/>
+            <a:prstDash val="solid"/>
+          </a:ln>
+        </p:spPr>
+        <p:txBody>
+          <a:bodyPr xmlns:a="http://schemas.openxmlformats.org/drawingml/2006/main"/>
+          <a:lstStyle xmlns:a="http://schemas.openxmlformats.org/drawingml/2006/main"/>
+          <a:p xmlns:a="http://schemas.openxmlformats.org/drawingml/2006/main">
+            <a:pPr algn="l">
+              <a:defRPr sz="1500" b="0">
+                <a:solidFill>
+                  <a:srgbClr val="314158"/>
+                </a:solidFill>
+              </a:defRPr>
+            </a:pPr>
+            <a:r>
+              <a:rPr sz="1500" b="0">
+                <a:solidFill>
+                  <a:srgbClr val="314158"/>
+                </a:solidFill>
+              </a:rPr>
+              <a:t>Are clinical pregnancy, live birth and miscarriage outcomes recorded reliably?</a:t>
+            </a:r>
+          </a:p>
+        </p:txBody>
+      </p:sp>
+      <p:sp>
+        <p:nvSpPr>
+          <p:cNvPr id="8" name="">
+            <a:extLst xmlns:a="http://schemas.openxmlformats.org/drawingml/2006/main">
+              <a:ext uri="{FF2B5EF4-FFF2-40B4-BE49-F238E27FC236}">
+                <a16:creationId xmlns:a16="http://schemas.microsoft.com/office/drawing/2014/main" id="{E37018D5-EB24-4FFA-A3AF-B7BBA5DF8239}"/>
+              </a:ext>
+            </a:extLst>
+          </p:cNvPr>
+          <p:cNvSpPr>
+            <a:spLocks xmlns:a="http://schemas.openxmlformats.org/drawingml/2006/main" noGrp="1"/>
+          </p:cNvSpPr>
+          <p:nvPr/>
+        </p:nvSpPr>
+        <p:spPr>
+          <a:xfrm xmlns:a="http://schemas.openxmlformats.org/drawingml/2006/main">
+            <a:off x="1047750" y="3009900"/>
+            <a:ext cx="209550" cy="266700"/>
+          </a:xfrm>
+          <a:prstGeom xmlns:a="http://schemas.openxmlformats.org/drawingml/2006/main" prst="rect">
+            <a:avLst/>
+          </a:prstGeom>
+          <a:noFill xmlns:a="http://schemas.openxmlformats.org/drawingml/2006/main"/>
+          <a:ln xmlns:a="http://schemas.openxmlformats.org/drawingml/2006/main" w="0">
+            <a:noFill/>
+            <a:prstDash val="solid"/>
+          </a:ln>
+        </p:spPr>
+        <p:txBody>
+          <a:bodyPr xmlns:a="http://schemas.openxmlformats.org/drawingml/2006/main"/>
+          <a:lstStyle xmlns:a="http://schemas.openxmlformats.org/drawingml/2006/main"/>
+          <a:p xmlns:a="http://schemas.openxmlformats.org/drawingml/2006/main">
+            <a:pPr algn="l">
+              <a:defRPr sz="1500" b="1">
+                <a:solidFill>
+                  <a:srgbClr val="00786F"/>
+                </a:solidFill>
+              </a:defRPr>
+            </a:pPr>
+            <a:r>
+              <a:rPr sz="1500" b="1">
+                <a:solidFill>
+                  <a:srgbClr val="00786F"/>
+                </a:solidFill>
+              </a:rPr>
+              <a:t>•</a:t>
+            </a:r>
+          </a:p>
+        </p:txBody>
+      </p:sp>
+      <p:sp>
+        <p:nvSpPr>
+          <p:cNvPr id="9" name="">
+            <a:extLst xmlns:a="http://schemas.openxmlformats.org/drawingml/2006/main">
+              <a:ext uri="{FF2B5EF4-FFF2-40B4-BE49-F238E27FC236}">
+                <a16:creationId xmlns:a16="http://schemas.microsoft.com/office/drawing/2014/main" id="{88F041F0-6BB9-4CFF-8118-67AEBB6EE707}"/>
+              </a:ext>
+            </a:extLst>
+          </p:cNvPr>
+          <p:cNvSpPr>
+            <a:spLocks xmlns:a="http://schemas.openxmlformats.org/drawingml/2006/main" noGrp="1"/>
+          </p:cNvSpPr>
+          <p:nvPr/>
+        </p:nvSpPr>
+        <p:spPr>
+          <a:xfrm xmlns:a="http://schemas.openxmlformats.org/drawingml/2006/main">
+            <a:off x="1314450" y="3009900"/>
+            <a:ext cx="9334500" cy="323850"/>
+          </a:xfrm>
+          <a:prstGeom xmlns:a="http://schemas.openxmlformats.org/drawingml/2006/main" prst="rect">
+            <a:avLst/>
+          </a:prstGeom>
+          <a:noFill xmlns:a="http://schemas.openxmlformats.org/drawingml/2006/main"/>
+          <a:ln xmlns:a="http://schemas.openxmlformats.org/drawingml/2006/main" w="0">
+            <a:noFill/>
+            <a:prstDash val="solid"/>
+          </a:ln>
+        </p:spPr>
+        <p:txBody>
+          <a:bodyPr xmlns:a="http://schemas.openxmlformats.org/drawingml/2006/main"/>
+          <a:lstStyle xmlns:a="http://schemas.openxmlformats.org/drawingml/2006/main"/>
+          <a:p xmlns:a="http://schemas.openxmlformats.org/drawingml/2006/main">
+            <a:pPr algn="l">
+              <a:defRPr sz="1500" b="0">
+                <a:solidFill>
+                  <a:srgbClr val="314158"/>
+                </a:solidFill>
+              </a:defRPr>
+            </a:pPr>
+            <a:r>
+              <a:rPr sz="1500" b="0">
+                <a:solidFill>
+                  <a:srgbClr val="314158"/>
+                </a:solidFill>
+              </a:rPr>
+              <a:t>Are embryo grade, blastocyst grade and transfer-day details available digitally?</a:t>
+            </a:r>
+          </a:p>
+        </p:txBody>
+      </p:sp>
+      <p:sp>
+        <p:nvSpPr>
+          <p:cNvPr id="10" name="">
+            <a:extLst xmlns:a="http://schemas.openxmlformats.org/drawingml/2006/main">
+              <a:ext uri="{FF2B5EF4-FFF2-40B4-BE49-F238E27FC236}">
+                <a16:creationId xmlns:a16="http://schemas.microsoft.com/office/drawing/2014/main" id="{A089F3B2-020A-4E1E-8D3B-2CFF81FB32B5}"/>
+              </a:ext>
+            </a:extLst>
+          </p:cNvPr>
+          <p:cNvSpPr>
+            <a:spLocks xmlns:a="http://schemas.openxmlformats.org/drawingml/2006/main" noGrp="1"/>
+          </p:cNvSpPr>
+          <p:nvPr/>
+        </p:nvSpPr>
+        <p:spPr>
+          <a:xfrm xmlns:a="http://schemas.openxmlformats.org/drawingml/2006/main">
+            <a:off x="1047750" y="3562350"/>
+            <a:ext cx="209550" cy="266700"/>
+          </a:xfrm>
+          <a:prstGeom xmlns:a="http://schemas.openxmlformats.org/drawingml/2006/main" prst="rect">
+            <a:avLst/>
+          </a:prstGeom>
+          <a:noFill xmlns:a="http://schemas.openxmlformats.org/drawingml/2006/main"/>
+          <a:ln xmlns:a="http://schemas.openxmlformats.org/drawingml/2006/main" w="0">
+            <a:noFill/>
+            <a:prstDash val="solid"/>
+          </a:ln>
+        </p:spPr>
+        <p:txBody>
+          <a:bodyPr xmlns:a="http://schemas.openxmlformats.org/drawingml/2006/main"/>
+          <a:lstStyle xmlns:a="http://schemas.openxmlformats.org/drawingml/2006/main"/>
+          <a:p xmlns:a="http://schemas.openxmlformats.org/drawingml/2006/main">
+            <a:pPr algn="l">
+              <a:defRPr sz="1500" b="1">
+                <a:solidFill>
+                  <a:srgbClr val="00786F"/>
+                </a:solidFill>
+              </a:defRPr>
+            </a:pPr>
+            <a:r>
+              <a:rPr sz="1500" b="1">
+                <a:solidFill>
+                  <a:srgbClr val="00786F"/>
+                </a:solidFill>
+              </a:rPr>
+              <a:t>•</a:t>
+            </a:r>
+          </a:p>
+        </p:txBody>
+      </p:sp>
+      <p:sp>
+        <p:nvSpPr>
+          <p:cNvPr id="11" name="">
+            <a:extLst xmlns:a="http://schemas.openxmlformats.org/drawingml/2006/main">
+              <a:ext uri="{FF2B5EF4-FFF2-40B4-BE49-F238E27FC236}">
+                <a16:creationId xmlns:a16="http://schemas.microsoft.com/office/drawing/2014/main" id="{FDC3B0C0-4050-41C9-9146-53EECCDA76AE}"/>
+              </a:ext>
+            </a:extLst>
+          </p:cNvPr>
+          <p:cNvSpPr>
+            <a:spLocks xmlns:a="http://schemas.openxmlformats.org/drawingml/2006/main" noGrp="1"/>
+          </p:cNvSpPr>
+          <p:nvPr/>
+        </p:nvSpPr>
+        <p:spPr>
+          <a:xfrm xmlns:a="http://schemas.openxmlformats.org/drawingml/2006/main">
+            <a:off x="1314450" y="3562350"/>
+            <a:ext cx="9334500" cy="323850"/>
+          </a:xfrm>
+          <a:prstGeom xmlns:a="http://schemas.openxmlformats.org/drawingml/2006/main" prst="rect">
+            <a:avLst/>
+          </a:prstGeom>
+          <a:noFill xmlns:a="http://schemas.openxmlformats.org/drawingml/2006/main"/>
+          <a:ln xmlns:a="http://schemas.openxmlformats.org/drawingml/2006/main" w="0">
+            <a:noFill/>
+            <a:prstDash val="solid"/>
+          </a:ln>
+        </p:spPr>
+        <p:txBody>
+          <a:bodyPr xmlns:a="http://schemas.openxmlformats.org/drawingml/2006/main"/>
+          <a:lstStyle xmlns:a="http://schemas.openxmlformats.org/drawingml/2006/main"/>
+          <a:p xmlns:a="http://schemas.openxmlformats.org/drawingml/2006/main">
+            <a:pPr algn="l">
+              <a:defRPr sz="1500" b="0">
+                <a:solidFill>
+                  <a:srgbClr val="314158"/>
+                </a:solidFill>
+              </a:defRPr>
+            </a:pPr>
+            <a:r>
+              <a:rPr sz="1500" b="0">
+                <a:solidFill>
+                  <a:srgbClr val="314158"/>
+                </a:solidFill>
+              </a:rPr>
+              <a:t>Can lifestyle variables be collected from records or a structured questionnaire?</a:t>
+            </a:r>
+          </a:p>
+        </p:txBody>
+      </p:sp>
+      <p:sp>
+        <p:nvSpPr>
+          <p:cNvPr id="12" name="">
+            <a:extLst xmlns:a="http://schemas.openxmlformats.org/drawingml/2006/main">
+              <a:ext uri="{FF2B5EF4-FFF2-40B4-BE49-F238E27FC236}">
+                <a16:creationId xmlns:a16="http://schemas.microsoft.com/office/drawing/2014/main" id="{A21F1217-021D-4199-9D05-7C24DC28D58A}"/>
+              </a:ext>
+            </a:extLst>
+          </p:cNvPr>
+          <p:cNvSpPr>
+            <a:spLocks xmlns:a="http://schemas.openxmlformats.org/drawingml/2006/main" noGrp="1"/>
+          </p:cNvSpPr>
+          <p:nvPr/>
+        </p:nvSpPr>
+        <p:spPr>
+          <a:xfrm xmlns:a="http://schemas.openxmlformats.org/drawingml/2006/main">
+            <a:off x="1047750" y="4114800"/>
+            <a:ext cx="209550" cy="266700"/>
+          </a:xfrm>
+          <a:prstGeom xmlns:a="http://schemas.openxmlformats.org/drawingml/2006/main" prst="rect">
+            <a:avLst/>
+          </a:prstGeom>
+          <a:noFill xmlns:a="http://schemas.openxmlformats.org/drawingml/2006/main"/>
+          <a:ln xmlns:a="http://schemas.openxmlformats.org/drawingml/2006/main" w="0">
+            <a:noFill/>
+            <a:prstDash val="solid"/>
+          </a:ln>
+        </p:spPr>
+        <p:txBody>
+          <a:bodyPr xmlns:a="http://schemas.openxmlformats.org/drawingml/2006/main"/>
+          <a:lstStyle xmlns:a="http://schemas.openxmlformats.org/drawingml/2006/main"/>
+          <a:p xmlns:a="http://schemas.openxmlformats.org/drawingml/2006/main">
+            <a:pPr algn="l">
+              <a:defRPr sz="1500" b="1">
+                <a:solidFill>
+                  <a:srgbClr val="00786F"/>
+                </a:solidFill>
+              </a:defRPr>
+            </a:pPr>
+            <a:r>
+              <a:rPr sz="1500" b="1">
+                <a:solidFill>
+                  <a:srgbClr val="00786F"/>
+                </a:solidFill>
+              </a:rPr>
+              <a:t>•</a:t>
+            </a:r>
+          </a:p>
+        </p:txBody>
+      </p:sp>
+      <p:sp>
+        <p:nvSpPr>
+          <p:cNvPr id="13" name="">
+            <a:extLst xmlns:a="http://schemas.openxmlformats.org/drawingml/2006/main">
+              <a:ext uri="{FF2B5EF4-FFF2-40B4-BE49-F238E27FC236}">
+                <a16:creationId xmlns:a16="http://schemas.microsoft.com/office/drawing/2014/main" id="{417B2C2A-C5B3-4762-B1CA-515E4DAA5983}"/>
+              </a:ext>
+            </a:extLst>
+          </p:cNvPr>
+          <p:cNvSpPr>
+            <a:spLocks xmlns:a="http://schemas.openxmlformats.org/drawingml/2006/main" noGrp="1"/>
+          </p:cNvSpPr>
+          <p:nvPr/>
+        </p:nvSpPr>
+        <p:spPr>
+          <a:xfrm xmlns:a="http://schemas.openxmlformats.org/drawingml/2006/main">
+            <a:off x="1314450" y="4114800"/>
+            <a:ext cx="9334500" cy="323850"/>
+          </a:xfrm>
+          <a:prstGeom xmlns:a="http://schemas.openxmlformats.org/drawingml/2006/main" prst="rect">
+            <a:avLst/>
+          </a:prstGeom>
+          <a:noFill xmlns:a="http://schemas.openxmlformats.org/drawingml/2006/main"/>
+          <a:ln xmlns:a="http://schemas.openxmlformats.org/drawingml/2006/main" w="0">
+            <a:noFill/>
+            <a:prstDash val="solid"/>
+          </a:ln>
+        </p:spPr>
+        <p:txBody>
+          <a:bodyPr xmlns:a="http://schemas.openxmlformats.org/drawingml/2006/main"/>
+          <a:lstStyle xmlns:a="http://schemas.openxmlformats.org/drawingml/2006/main"/>
+          <a:p xmlns:a="http://schemas.openxmlformats.org/drawingml/2006/main">
+            <a:pPr algn="l">
+              <a:defRPr sz="1500" b="0">
+                <a:solidFill>
+                  <a:srgbClr val="314158"/>
+                </a:solidFill>
+              </a:defRPr>
+            </a:pPr>
+            <a:r>
+              <a:rPr sz="1500" b="0">
+                <a:solidFill>
+                  <a:srgbClr val="314158"/>
+                </a:solidFill>
+              </a:rPr>
+              <a:t>Can data be separated by year, clinic, doctor or source for validation?</a:t>
+            </a:r>
+          </a:p>
+        </p:txBody>
+      </p:sp>
+      <p:sp>
+        <p:nvSpPr>
+          <p:cNvPr id="14" name="">
+            <a:extLst xmlns:a="http://schemas.openxmlformats.org/drawingml/2006/main">
+              <a:ext uri="{FF2B5EF4-FFF2-40B4-BE49-F238E27FC236}">
+                <a16:creationId xmlns:a16="http://schemas.microsoft.com/office/drawing/2014/main" id="{BFCE7AFA-98AC-4EDD-A38D-71A211851FF3}"/>
+              </a:ext>
+            </a:extLst>
+          </p:cNvPr>
+          <p:cNvSpPr>
+            <a:spLocks xmlns:a="http://schemas.openxmlformats.org/drawingml/2006/main" noGrp="1"/>
+          </p:cNvSpPr>
+          <p:nvPr/>
+        </p:nvSpPr>
+        <p:spPr>
+          <a:xfrm xmlns:a="http://schemas.openxmlformats.org/drawingml/2006/main">
+            <a:off x="1047750" y="4667250"/>
+            <a:ext cx="209550" cy="266700"/>
+          </a:xfrm>
+          <a:prstGeom xmlns:a="http://schemas.openxmlformats.org/drawingml/2006/main" prst="rect">
+            <a:avLst/>
+          </a:prstGeom>
+          <a:noFill xmlns:a="http://schemas.openxmlformats.org/drawingml/2006/main"/>
+          <a:ln xmlns:a="http://schemas.openxmlformats.org/drawingml/2006/main" w="0">
+            <a:noFill/>
+            <a:prstDash val="solid"/>
+          </a:ln>
+        </p:spPr>
+        <p:txBody>
+          <a:bodyPr xmlns:a="http://schemas.openxmlformats.org/drawingml/2006/main"/>
+          <a:lstStyle xmlns:a="http://schemas.openxmlformats.org/drawingml/2006/main"/>
+          <a:p xmlns:a="http://schemas.openxmlformats.org/drawingml/2006/main">
+            <a:pPr algn="l">
+              <a:defRPr sz="1500" b="1">
+                <a:solidFill>
+                  <a:srgbClr val="00786F"/>
+                </a:solidFill>
+              </a:defRPr>
+            </a:pPr>
+            <a:r>
+              <a:rPr sz="1500" b="1">
+                <a:solidFill>
+                  <a:srgbClr val="00786F"/>
+                </a:solidFill>
+              </a:rPr>
+              <a:t>•</a:t>
+            </a:r>
+          </a:p>
+        </p:txBody>
+      </p:sp>
+      <p:sp>
+        <p:nvSpPr>
+          <p:cNvPr id="15" name="">
+            <a:extLst xmlns:a="http://schemas.openxmlformats.org/drawingml/2006/main">
+              <a:ext uri="{FF2B5EF4-FFF2-40B4-BE49-F238E27FC236}">
+                <a16:creationId xmlns:a16="http://schemas.microsoft.com/office/drawing/2014/main" id="{F7D56F60-F891-46CB-9036-CEC6F8C31C30}"/>
+              </a:ext>
+            </a:extLst>
+          </p:cNvPr>
+          <p:cNvSpPr>
+            <a:spLocks xmlns:a="http://schemas.openxmlformats.org/drawingml/2006/main" noGrp="1"/>
+          </p:cNvSpPr>
+          <p:nvPr/>
+        </p:nvSpPr>
+        <p:spPr>
+          <a:xfrm xmlns:a="http://schemas.openxmlformats.org/drawingml/2006/main">
+            <a:off x="1314450" y="4667250"/>
+            <a:ext cx="9334500" cy="323850"/>
+          </a:xfrm>
+          <a:prstGeom xmlns:a="http://schemas.openxmlformats.org/drawingml/2006/main" prst="rect">
+            <a:avLst/>
+          </a:prstGeom>
+          <a:noFill xmlns:a="http://schemas.openxmlformats.org/drawingml/2006/main"/>
+          <a:ln xmlns:a="http://schemas.openxmlformats.org/drawingml/2006/main" w="0">
+            <a:noFill/>
+            <a:prstDash val="solid"/>
+          </a:ln>
+        </p:spPr>
+        <p:txBody>
+          <a:bodyPr xmlns:a="http://schemas.openxmlformats.org/drawingml/2006/main"/>
+          <a:lstStyle xmlns:a="http://schemas.openxmlformats.org/drawingml/2006/main"/>
+          <a:p xmlns:a="http://schemas.openxmlformats.org/drawingml/2006/main">
+            <a:pPr algn="l">
+              <a:defRPr sz="1500" b="0">
+                <a:solidFill>
+                  <a:srgbClr val="314158"/>
+                </a:solidFill>
+              </a:defRPr>
+            </a:pPr>
+            <a:r>
+              <a:rPr sz="1500" b="0">
+                <a:solidFill>
+                  <a:srgbClr val="314158"/>
+                </a:solidFill>
+              </a:rPr>
+              <a:t>Can clinicians review model explanations and comment on usefulness?</a:t>
+            </a:r>
+          </a:p>
+        </p:txBody>
+      </p:sp>
+      <p:sp>
+        <p:nvSpPr>
+          <p:cNvPr id="16" name="">
+            <a:extLst xmlns:a="http://schemas.openxmlformats.org/drawingml/2006/main">
+              <a:ext uri="{FF2B5EF4-FFF2-40B4-BE49-F238E27FC236}">
+                <a16:creationId xmlns:a16="http://schemas.microsoft.com/office/drawing/2014/main" id="{78312F89-31B0-4DA9-9607-E191E8C3C361}"/>
+              </a:ext>
+            </a:extLst>
+          </p:cNvPr>
+          <p:cNvSpPr>
+            <a:spLocks xmlns:a="http://schemas.openxmlformats.org/drawingml/2006/main" noGrp="1"/>
+          </p:cNvSpPr>
+          <p:nvPr/>
+        </p:nvSpPr>
+        <p:spPr>
+          <a:xfrm xmlns:a="http://schemas.openxmlformats.org/drawingml/2006/main">
+            <a:off x="685800" y="6400800"/>
+            <a:ext cx="2857500" cy="190500"/>
+          </a:xfrm>
+          <a:prstGeom xmlns:a="http://schemas.openxmlformats.org/drawingml/2006/main" prst="rect">
+            <a:avLst/>
+          </a:prstGeom>
+          <a:noFill xmlns:a="http://schemas.openxmlformats.org/drawingml/2006/main"/>
+          <a:ln xmlns:a="http://schemas.openxmlformats.org/drawingml/2006/main" w="0">
+            <a:noFill/>
+            <a:prstDash val="solid"/>
+          </a:ln>
+        </p:spPr>
+        <p:txBody>
+          <a:bodyPr xmlns:a="http://schemas.openxmlformats.org/drawingml/2006/main"/>
+          <a:lstStyle xmlns:a="http://schemas.openxmlformats.org/drawingml/2006/main"/>
+          <a:p xmlns:a="http://schemas.openxmlformats.org/drawingml/2006/main">
+            <a:pPr algn="l">
+              <a:defRPr sz="825" b="0">
+                <a:solidFill>
+                  <a:srgbClr val="90A1B9"/>
+                </a:solidFill>
+              </a:defRPr>
+            </a:pPr>
+            <a:r>
+              <a:rPr sz="825" b="0">
+                <a:solidFill>
+                  <a:srgbClr val="90A1B9"/>
+                </a:solidFill>
+              </a:rPr>
+              <a:t>Faculty backup slide 4</a:t>
+            </a:r>
+          </a:p>
+        </p:txBody>
+      </p:sp>
+    </p:spTree>
+    <p:extLst>
+      <p:ext uri="{BB962C8B-B14F-4D97-AF65-F5344CB8AC3E}">
+        <p14:creationId xmlns:p14="http://schemas.microsoft.com/office/powerpoint/2010/main" val="101435487"/>
       </p:ext>
     </p:extLst>
   </p:cSld>
@@ -11159,6 +17120,7 @@
           <a:lstStyle xmlns:a="http://schemas.openxmlformats.org/drawingml/2006/main"/>
           <a:p xmlns:a="http://schemas.openxmlformats.org/drawingml/2006/main">
             <a:pPr algn="l">
+              <a:buNone/>
               <a:defRPr sz="1050" b="1">
                 <a:solidFill>
                   <a:srgbClr val="555555"/>
@@ -11209,6 +17171,7 @@
           <a:lstStyle xmlns:a="http://schemas.openxmlformats.org/drawingml/2006/main"/>
           <a:p xmlns:a="http://schemas.openxmlformats.org/drawingml/2006/main">
             <a:pPr algn="r">
+              <a:buNone/>
               <a:defRPr sz="1050" b="1">
                 <a:solidFill>
                   <a:srgbClr val="555555"/>
@@ -11259,6 +17222,7 @@
           <a:lstStyle xmlns:a="http://schemas.openxmlformats.org/drawingml/2006/main"/>
           <a:p xmlns:a="http://schemas.openxmlformats.org/drawingml/2006/main">
             <a:pPr algn="l">
+              <a:buNone/>
               <a:defRPr sz="2850" b="1">
                 <a:solidFill>
                   <a:srgbClr val="111111"/>
@@ -11371,6 +17335,7 @@
           <a:lstStyle xmlns:a="http://schemas.openxmlformats.org/drawingml/2006/main"/>
           <a:p xmlns:a="http://schemas.openxmlformats.org/drawingml/2006/main">
             <a:pPr algn="ctr">
+              <a:buNone/>
               <a:defRPr sz="1350" b="1">
                 <a:solidFill>
                   <a:srgbClr val="111111"/>
@@ -11483,6 +17448,7 @@
           <a:lstStyle xmlns:a="http://schemas.openxmlformats.org/drawingml/2006/main"/>
           <a:p xmlns:a="http://schemas.openxmlformats.org/drawingml/2006/main">
             <a:pPr algn="ctr">
+              <a:buNone/>
               <a:defRPr sz="1350" b="1">
                 <a:solidFill>
                   <a:srgbClr val="111111"/>
@@ -11595,6 +17561,7 @@
           <a:lstStyle xmlns:a="http://schemas.openxmlformats.org/drawingml/2006/main"/>
           <a:p xmlns:a="http://schemas.openxmlformats.org/drawingml/2006/main">
             <a:pPr algn="ctr">
+              <a:buNone/>
               <a:defRPr sz="1350" b="1">
                 <a:solidFill>
                   <a:srgbClr val="111111"/>
@@ -11707,6 +17674,7 @@
           <a:lstStyle xmlns:a="http://schemas.openxmlformats.org/drawingml/2006/main"/>
           <a:p xmlns:a="http://schemas.openxmlformats.org/drawingml/2006/main">
             <a:pPr algn="ctr">
+              <a:buNone/>
               <a:defRPr sz="1350" b="1">
                 <a:solidFill>
                   <a:srgbClr val="FFFFFF"/>
@@ -11819,6 +17787,7 @@
           <a:lstStyle xmlns:a="http://schemas.openxmlformats.org/drawingml/2006/main"/>
           <a:p xmlns:a="http://schemas.openxmlformats.org/drawingml/2006/main">
             <a:pPr algn="ctr">
+              <a:buNone/>
               <a:defRPr sz="1350" b="1">
                 <a:solidFill>
                   <a:srgbClr val="111111"/>
@@ -11931,6 +17900,7 @@
           <a:lstStyle xmlns:a="http://schemas.openxmlformats.org/drawingml/2006/main"/>
           <a:p xmlns:a="http://schemas.openxmlformats.org/drawingml/2006/main">
             <a:pPr algn="ctr">
+              <a:buNone/>
               <a:defRPr sz="1350" b="1">
                 <a:solidFill>
                   <a:srgbClr val="111111"/>
@@ -12043,6 +18013,7 @@
           <a:lstStyle xmlns:a="http://schemas.openxmlformats.org/drawingml/2006/main"/>
           <a:p xmlns:a="http://schemas.openxmlformats.org/drawingml/2006/main">
             <a:pPr algn="ctr">
+              <a:buNone/>
               <a:defRPr sz="1350" b="1">
                 <a:solidFill>
                   <a:srgbClr val="111111"/>
@@ -12155,6 +18126,7 @@
           <a:lstStyle xmlns:a="http://schemas.openxmlformats.org/drawingml/2006/main"/>
           <a:p xmlns:a="http://schemas.openxmlformats.org/drawingml/2006/main">
             <a:pPr algn="ctr">
+              <a:buNone/>
               <a:defRPr sz="1350" b="1">
                 <a:solidFill>
                   <a:srgbClr val="111111"/>
@@ -12205,6 +18177,7 @@
           <a:lstStyle xmlns:a="http://schemas.openxmlformats.org/drawingml/2006/main"/>
           <a:p xmlns:a="http://schemas.openxmlformats.org/drawingml/2006/main">
             <a:pPr algn="ctr">
+              <a:buNone/>
               <a:defRPr sz="2325" b="1">
                 <a:solidFill>
                   <a:srgbClr val="111111"/>
@@ -12277,6 +18250,7 @@
           <a:lstStyle xmlns:a="http://schemas.openxmlformats.org/drawingml/2006/main"/>
           <a:p xmlns:a="http://schemas.openxmlformats.org/drawingml/2006/main">
             <a:pPr algn="l">
+              <a:buNone/>
               <a:defRPr sz="1050" b="1">
                 <a:solidFill>
                   <a:srgbClr val="555555"/>
@@ -12327,6 +18301,7 @@
           <a:lstStyle xmlns:a="http://schemas.openxmlformats.org/drawingml/2006/main"/>
           <a:p xmlns:a="http://schemas.openxmlformats.org/drawingml/2006/main">
             <a:pPr algn="r">
+              <a:buNone/>
               <a:defRPr sz="1050" b="1">
                 <a:solidFill>
                   <a:srgbClr val="555555"/>
@@ -12377,6 +18352,7 @@
           <a:lstStyle xmlns:a="http://schemas.openxmlformats.org/drawingml/2006/main"/>
           <a:p xmlns:a="http://schemas.openxmlformats.org/drawingml/2006/main">
             <a:pPr algn="l">
+              <a:buNone/>
               <a:defRPr sz="2850" b="1">
                 <a:solidFill>
                   <a:srgbClr val="111111"/>
@@ -12458,6 +18434,7 @@
           <a:lstStyle xmlns:a="http://schemas.openxmlformats.org/drawingml/2006/main"/>
           <a:p xmlns:a="http://schemas.openxmlformats.org/drawingml/2006/main">
             <a:pPr algn="l">
+              <a:buNone/>
               <a:defRPr sz="1875" b="1">
                 <a:solidFill>
                   <a:srgbClr val="111111"/>
@@ -12539,6 +18516,7 @@
           <a:lstStyle xmlns:a="http://schemas.openxmlformats.org/drawingml/2006/main"/>
           <a:p xmlns:a="http://schemas.openxmlformats.org/drawingml/2006/main">
             <a:pPr algn="l">
+              <a:buNone/>
               <a:defRPr sz="1575" b="0">
                 <a:solidFill>
                   <a:srgbClr val="111111"/>
@@ -12620,6 +18598,7 @@
           <a:lstStyle xmlns:a="http://schemas.openxmlformats.org/drawingml/2006/main"/>
           <a:p xmlns:a="http://schemas.openxmlformats.org/drawingml/2006/main">
             <a:pPr algn="l">
+              <a:buNone/>
               <a:defRPr sz="1575" b="0">
                 <a:solidFill>
                   <a:srgbClr val="111111"/>
@@ -12701,6 +18680,7 @@
           <a:lstStyle xmlns:a="http://schemas.openxmlformats.org/drawingml/2006/main"/>
           <a:p xmlns:a="http://schemas.openxmlformats.org/drawingml/2006/main">
             <a:pPr algn="l">
+              <a:buNone/>
               <a:defRPr sz="1575" b="0">
                 <a:solidFill>
                   <a:srgbClr val="111111"/>
@@ -12782,6 +18762,7 @@
           <a:lstStyle xmlns:a="http://schemas.openxmlformats.org/drawingml/2006/main"/>
           <a:p xmlns:a="http://schemas.openxmlformats.org/drawingml/2006/main">
             <a:pPr algn="l">
+              <a:buNone/>
               <a:defRPr sz="1575" b="0">
                 <a:solidFill>
                   <a:srgbClr val="111111"/>
@@ -12863,6 +18844,7 @@
           <a:lstStyle xmlns:a="http://schemas.openxmlformats.org/drawingml/2006/main"/>
           <a:p xmlns:a="http://schemas.openxmlformats.org/drawingml/2006/main">
             <a:pPr algn="l">
+              <a:buNone/>
               <a:defRPr sz="1875" b="1">
                 <a:solidFill>
                   <a:srgbClr val="111111"/>
@@ -12913,6 +18895,7 @@
           <a:lstStyle xmlns:a="http://schemas.openxmlformats.org/drawingml/2006/main"/>
           <a:p xmlns:a="http://schemas.openxmlformats.org/drawingml/2006/main">
             <a:pPr algn="l">
+              <a:buNone/>
               <a:defRPr sz="1650" b="0">
                 <a:solidFill>
                   <a:srgbClr val="111111"/>
@@ -12930,6 +18913,7 @@
           </a:p>
           <a:p xmlns:a="http://schemas.openxmlformats.org/drawingml/2006/main">
             <a:pPr algn="l">
+              <a:buNone/>
               <a:defRPr sz="1650" b="0">
                 <a:solidFill>
                   <a:srgbClr val="111111"/>
@@ -12947,6 +18931,7 @@
           </a:p>
           <a:p xmlns:a="http://schemas.openxmlformats.org/drawingml/2006/main">
             <a:pPr algn="l">
+              <a:buNone/>
               <a:defRPr sz="1650" b="0">
                 <a:solidFill>
                   <a:srgbClr val="111111"/>
@@ -12964,6 +18949,7 @@
           </a:p>
           <a:p xmlns:a="http://schemas.openxmlformats.org/drawingml/2006/main">
             <a:pPr algn="l">
+              <a:buNone/>
               <a:defRPr sz="1650" b="0">
                 <a:solidFill>
                   <a:srgbClr val="111111"/>
@@ -12981,6 +18967,7 @@
           </a:p>
           <a:p xmlns:a="http://schemas.openxmlformats.org/drawingml/2006/main">
             <a:pPr algn="l">
+              <a:buNone/>
               <a:defRPr sz="1650" b="0">
                 <a:solidFill>
                   <a:srgbClr val="111111"/>
@@ -12998,6 +18985,7 @@
           </a:p>
           <a:p xmlns:a="http://schemas.openxmlformats.org/drawingml/2006/main">
             <a:pPr algn="l">
+              <a:buNone/>
               <a:defRPr sz="1650" b="0">
                 <a:solidFill>
                   <a:srgbClr val="111111"/>
@@ -13015,6 +19003,7 @@
           </a:p>
           <a:p xmlns:a="http://schemas.openxmlformats.org/drawingml/2006/main">
             <a:pPr algn="l">
+              <a:buNone/>
               <a:defRPr sz="1650" b="0">
                 <a:solidFill>
                   <a:srgbClr val="111111"/>
@@ -13065,6 +19054,7 @@
           <a:lstStyle xmlns:a="http://schemas.openxmlformats.org/drawingml/2006/main"/>
           <a:p xmlns:a="http://schemas.openxmlformats.org/drawingml/2006/main">
             <a:pPr algn="l">
+              <a:buNone/>
               <a:defRPr sz="1275" b="0">
                 <a:solidFill>
                   <a:srgbClr val="555555"/>
@@ -13137,6 +19127,7 @@
           <a:lstStyle xmlns:a="http://schemas.openxmlformats.org/drawingml/2006/main"/>
           <a:p xmlns:a="http://schemas.openxmlformats.org/drawingml/2006/main">
             <a:pPr algn="l">
+              <a:buNone/>
               <a:defRPr sz="1050" b="1">
                 <a:solidFill>
                   <a:srgbClr val="555555"/>
@@ -13187,6 +19178,7 @@
           <a:lstStyle xmlns:a="http://schemas.openxmlformats.org/drawingml/2006/main"/>
           <a:p xmlns:a="http://schemas.openxmlformats.org/drawingml/2006/main">
             <a:pPr algn="r">
+              <a:buNone/>
               <a:defRPr sz="1050" b="1">
                 <a:solidFill>
                   <a:srgbClr val="555555"/>
@@ -13237,6 +19229,7 @@
           <a:lstStyle xmlns:a="http://schemas.openxmlformats.org/drawingml/2006/main"/>
           <a:p xmlns:a="http://schemas.openxmlformats.org/drawingml/2006/main">
             <a:pPr algn="l">
+              <a:buNone/>
               <a:defRPr sz="2850" b="1">
                 <a:solidFill>
                   <a:srgbClr val="111111"/>
@@ -13349,6 +19342,7 @@
           <a:lstStyle xmlns:a="http://schemas.openxmlformats.org/drawingml/2006/main"/>
           <a:p xmlns:a="http://schemas.openxmlformats.org/drawingml/2006/main">
             <a:pPr algn="l">
+              <a:buNone/>
               <a:defRPr sz="1800" b="1">
                 <a:solidFill>
                   <a:srgbClr val="111111"/>
@@ -13399,6 +19393,7 @@
           <a:lstStyle xmlns:a="http://schemas.openxmlformats.org/drawingml/2006/main"/>
           <a:p xmlns:a="http://schemas.openxmlformats.org/drawingml/2006/main">
             <a:pPr algn="l">
+              <a:buNone/>
               <a:defRPr sz="1350" b="0">
                 <a:solidFill>
                   <a:srgbClr val="555555"/>
@@ -13480,6 +19475,7 @@
           <a:lstStyle xmlns:a="http://schemas.openxmlformats.org/drawingml/2006/main"/>
           <a:p xmlns:a="http://schemas.openxmlformats.org/drawingml/2006/main">
             <a:pPr algn="l">
+              <a:buNone/>
               <a:defRPr sz="1800" b="1">
                 <a:solidFill>
                   <a:srgbClr val="111111"/>
@@ -13530,6 +19526,7 @@
           <a:lstStyle xmlns:a="http://schemas.openxmlformats.org/drawingml/2006/main"/>
           <a:p xmlns:a="http://schemas.openxmlformats.org/drawingml/2006/main">
             <a:pPr algn="l">
+              <a:buNone/>
               <a:defRPr sz="1350" b="0">
                 <a:solidFill>
                   <a:srgbClr val="555555"/>
@@ -13611,6 +19608,7 @@
           <a:lstStyle xmlns:a="http://schemas.openxmlformats.org/drawingml/2006/main"/>
           <a:p xmlns:a="http://schemas.openxmlformats.org/drawingml/2006/main">
             <a:pPr algn="l">
+              <a:buNone/>
               <a:defRPr sz="1800" b="1">
                 <a:solidFill>
                   <a:srgbClr val="111111"/>
@@ -13661,6 +19659,7 @@
           <a:lstStyle xmlns:a="http://schemas.openxmlformats.org/drawingml/2006/main"/>
           <a:p xmlns:a="http://schemas.openxmlformats.org/drawingml/2006/main">
             <a:pPr algn="l">
+              <a:buNone/>
               <a:defRPr sz="1350" b="0">
                 <a:solidFill>
                   <a:srgbClr val="555555"/>
@@ -13742,6 +19741,7 @@
           <a:lstStyle xmlns:a="http://schemas.openxmlformats.org/drawingml/2006/main"/>
           <a:p xmlns:a="http://schemas.openxmlformats.org/drawingml/2006/main">
             <a:pPr algn="l">
+              <a:buNone/>
               <a:defRPr sz="1800" b="1">
                 <a:solidFill>
                   <a:srgbClr val="111111"/>
@@ -13792,6 +19792,7 @@
           <a:lstStyle xmlns:a="http://schemas.openxmlformats.org/drawingml/2006/main"/>
           <a:p xmlns:a="http://schemas.openxmlformats.org/drawingml/2006/main">
             <a:pPr algn="l">
+              <a:buNone/>
               <a:defRPr sz="1350" b="0">
                 <a:solidFill>
                   <a:srgbClr val="555555"/>
@@ -13873,6 +19874,7 @@
           <a:lstStyle xmlns:a="http://schemas.openxmlformats.org/drawingml/2006/main"/>
           <a:p xmlns:a="http://schemas.openxmlformats.org/drawingml/2006/main">
             <a:pPr algn="l">
+              <a:buNone/>
               <a:defRPr sz="1800" b="1">
                 <a:solidFill>
                   <a:srgbClr val="111111"/>
@@ -13923,6 +19925,7 @@
           <a:lstStyle xmlns:a="http://schemas.openxmlformats.org/drawingml/2006/main"/>
           <a:p xmlns:a="http://schemas.openxmlformats.org/drawingml/2006/main">
             <a:pPr algn="l">
+              <a:buNone/>
               <a:defRPr sz="1350" b="0">
                 <a:solidFill>
                   <a:srgbClr val="555555"/>
@@ -14004,6 +20007,7 @@
           <a:lstStyle xmlns:a="http://schemas.openxmlformats.org/drawingml/2006/main"/>
           <a:p xmlns:a="http://schemas.openxmlformats.org/drawingml/2006/main">
             <a:pPr algn="l">
+              <a:buNone/>
               <a:defRPr sz="1800" b="1">
                 <a:solidFill>
                   <a:srgbClr val="111111"/>
@@ -14054,6 +20058,7 @@
           <a:lstStyle xmlns:a="http://schemas.openxmlformats.org/drawingml/2006/main"/>
           <a:p xmlns:a="http://schemas.openxmlformats.org/drawingml/2006/main">
             <a:pPr algn="l">
+              <a:buNone/>
               <a:defRPr sz="1350" b="0">
                 <a:solidFill>
                   <a:srgbClr val="555555"/>
@@ -14126,6 +20131,7 @@
           <a:lstStyle xmlns:a="http://schemas.openxmlformats.org/drawingml/2006/main"/>
           <a:p xmlns:a="http://schemas.openxmlformats.org/drawingml/2006/main">
             <a:pPr algn="l">
+              <a:buNone/>
               <a:defRPr sz="1050" b="1">
                 <a:solidFill>
                   <a:srgbClr val="555555"/>
@@ -14176,6 +20182,7 @@
           <a:lstStyle xmlns:a="http://schemas.openxmlformats.org/drawingml/2006/main"/>
           <a:p xmlns:a="http://schemas.openxmlformats.org/drawingml/2006/main">
             <a:pPr algn="r">
+              <a:buNone/>
               <a:defRPr sz="1050" b="1">
                 <a:solidFill>
                   <a:srgbClr val="555555"/>
@@ -14226,6 +20233,7 @@
           <a:lstStyle xmlns:a="http://schemas.openxmlformats.org/drawingml/2006/main"/>
           <a:p xmlns:a="http://schemas.openxmlformats.org/drawingml/2006/main">
             <a:pPr algn="l">
+              <a:buNone/>
               <a:defRPr sz="2850" b="1">
                 <a:solidFill>
                   <a:srgbClr val="111111"/>
@@ -14338,6 +20346,7 @@
           <a:lstStyle xmlns:a="http://schemas.openxmlformats.org/drawingml/2006/main"/>
           <a:p xmlns:a="http://schemas.openxmlformats.org/drawingml/2006/main">
             <a:pPr algn="l">
+              <a:buNone/>
               <a:defRPr sz="1800" b="0">
                 <a:solidFill>
                   <a:srgbClr val="111111"/>
@@ -14419,6 +20428,7 @@
           <a:lstStyle xmlns:a="http://schemas.openxmlformats.org/drawingml/2006/main"/>
           <a:p xmlns:a="http://schemas.openxmlformats.org/drawingml/2006/main">
             <a:pPr algn="l">
+              <a:buNone/>
               <a:defRPr sz="1800" b="0">
                 <a:solidFill>
                   <a:srgbClr val="111111"/>
@@ -14500,6 +20510,7 @@
           <a:lstStyle xmlns:a="http://schemas.openxmlformats.org/drawingml/2006/main"/>
           <a:p xmlns:a="http://schemas.openxmlformats.org/drawingml/2006/main">
             <a:pPr algn="l">
+              <a:buNone/>
               <a:defRPr sz="1800" b="0">
                 <a:solidFill>
                   <a:srgbClr val="111111"/>
@@ -14581,6 +20592,7 @@
           <a:lstStyle xmlns:a="http://schemas.openxmlformats.org/drawingml/2006/main"/>
           <a:p xmlns:a="http://schemas.openxmlformats.org/drawingml/2006/main">
             <a:pPr algn="l">
+              <a:buNone/>
               <a:defRPr sz="1800" b="0">
                 <a:solidFill>
                   <a:srgbClr val="111111"/>
@@ -14662,6 +20674,7 @@
           <a:lstStyle xmlns:a="http://schemas.openxmlformats.org/drawingml/2006/main"/>
           <a:p xmlns:a="http://schemas.openxmlformats.org/drawingml/2006/main">
             <a:pPr algn="l">
+              <a:buNone/>
               <a:defRPr sz="1800" b="0">
                 <a:solidFill>
                   <a:srgbClr val="111111"/>
@@ -14743,6 +20756,7 @@
           <a:lstStyle xmlns:a="http://schemas.openxmlformats.org/drawingml/2006/main"/>
           <a:p xmlns:a="http://schemas.openxmlformats.org/drawingml/2006/main">
             <a:pPr algn="l">
+              <a:buNone/>
               <a:defRPr sz="2175" b="1">
                 <a:solidFill>
                   <a:srgbClr val="111111"/>
@@ -14793,6 +20807,7 @@
           <a:lstStyle xmlns:a="http://schemas.openxmlformats.org/drawingml/2006/main"/>
           <a:p xmlns:a="http://schemas.openxmlformats.org/drawingml/2006/main">
             <a:pPr algn="l">
+              <a:buNone/>
               <a:defRPr sz="1575" b="0">
                 <a:solidFill>
                   <a:srgbClr val="111111"/>
@@ -14815,6 +20830,7 @@
           </a:p>
           <a:p xmlns:a="http://schemas.openxmlformats.org/drawingml/2006/main">
             <a:pPr algn="l">
+              <a:buNone/>
               <a:defRPr sz="1575" b="0">
                 <a:solidFill>
                   <a:srgbClr val="111111"/>
@@ -14832,6 +20848,7 @@
           </a:p>
           <a:p xmlns:a="http://schemas.openxmlformats.org/drawingml/2006/main">
             <a:pPr algn="l">
+              <a:buNone/>
               <a:defRPr sz="1575" b="0">
                 <a:solidFill>
                   <a:srgbClr val="111111"/>
@@ -14849,6 +20866,7 @@
           </a:p>
           <a:p xmlns:a="http://schemas.openxmlformats.org/drawingml/2006/main">
             <a:pPr algn="l">
+              <a:buNone/>
               <a:defRPr sz="1575" b="0">
                 <a:solidFill>
                   <a:srgbClr val="111111"/>
@@ -14866,6 +20884,7 @@
           </a:p>
           <a:p xmlns:a="http://schemas.openxmlformats.org/drawingml/2006/main">
             <a:pPr algn="l">
+              <a:buNone/>
               <a:defRPr sz="1575" b="0">
                 <a:solidFill>
                   <a:srgbClr val="111111"/>
@@ -14883,6 +20902,7 @@
           </a:p>
           <a:p xmlns:a="http://schemas.openxmlformats.org/drawingml/2006/main">
             <a:pPr algn="l">
+              <a:buNone/>
               <a:defRPr sz="1575" b="0">
                 <a:solidFill>
                   <a:srgbClr val="111111"/>
@@ -14955,6 +20975,7 @@
           <a:lstStyle xmlns:a="http://schemas.openxmlformats.org/drawingml/2006/main"/>
           <a:p xmlns:a="http://schemas.openxmlformats.org/drawingml/2006/main">
             <a:pPr algn="l">
+              <a:buNone/>
               <a:defRPr sz="1050" b="1">
                 <a:solidFill>
                   <a:srgbClr val="555555"/>
@@ -15005,6 +21026,7 @@
           <a:lstStyle xmlns:a="http://schemas.openxmlformats.org/drawingml/2006/main"/>
           <a:p xmlns:a="http://schemas.openxmlformats.org/drawingml/2006/main">
             <a:pPr algn="r">
+              <a:buNone/>
               <a:defRPr sz="1050" b="1">
                 <a:solidFill>
                   <a:srgbClr val="555555"/>
@@ -15055,6 +21077,7 @@
           <a:lstStyle xmlns:a="http://schemas.openxmlformats.org/drawingml/2006/main"/>
           <a:p xmlns:a="http://schemas.openxmlformats.org/drawingml/2006/main">
             <a:pPr algn="l">
+              <a:buNone/>
               <a:defRPr sz="2850" b="1">
                 <a:solidFill>
                   <a:srgbClr val="111111"/>
@@ -15105,7 +21128,7 @@
       </p:sp>
       <p:graphicFrame>
         <p:nvGraphicFramePr>
-          <p:cNvPr id="12" name="Chart"/>
+          <p:cNvPr id="13" name="Chart"/>
           <p:cNvGraphicFramePr/>
           <p:nvPr/>
         </p:nvGraphicFramePr>
@@ -15115,7 +21138,7 @@
         </p:xfrm>
         <a:graphic xmlns:a="http://schemas.openxmlformats.org/drawingml/2006/main">
           <a:graphicData uri="http://schemas.openxmlformats.org/drawingml/2006/chart">
-            <c:chart xmlns:r="http://schemas.openxmlformats.org/officeDocument/2006/relationships" xmlns:c="http://schemas.openxmlformats.org/drawingml/2006/chart" r:id="R1723700958de4002"/>
+            <c:chart xmlns:r="http://schemas.openxmlformats.org/officeDocument/2006/relationships" xmlns:c="http://schemas.openxmlformats.org/drawingml/2006/chart" r:id="R0f7640863d074752"/>
           </a:graphicData>
         </a:graphic>
       </p:graphicFrame>
@@ -15152,6 +21175,7 @@
           <a:lstStyle xmlns:a="http://schemas.openxmlformats.org/drawingml/2006/main"/>
           <a:p xmlns:a="http://schemas.openxmlformats.org/drawingml/2006/main">
             <a:pPr algn="l">
+              <a:buNone/>
               <a:defRPr sz="2100" b="1">
                 <a:solidFill>
                   <a:srgbClr val="111111"/>
@@ -15202,6 +21226,7 @@
           <a:lstStyle xmlns:a="http://schemas.openxmlformats.org/drawingml/2006/main"/>
           <a:p xmlns:a="http://schemas.openxmlformats.org/drawingml/2006/main">
             <a:pPr algn="l">
+              <a:buNone/>
               <a:defRPr sz="1125" b="0">
                 <a:solidFill>
                   <a:srgbClr val="555555"/>
@@ -15219,6 +21244,7 @@
           </a:p>
           <a:p xmlns:a="http://schemas.openxmlformats.org/drawingml/2006/main">
             <a:pPr algn="l">
+              <a:buNone/>
               <a:defRPr sz="1125" b="0">
                 <a:solidFill>
                   <a:srgbClr val="555555"/>
@@ -15291,6 +21317,7 @@
           <a:lstStyle xmlns:a="http://schemas.openxmlformats.org/drawingml/2006/main"/>
           <a:p xmlns:a="http://schemas.openxmlformats.org/drawingml/2006/main">
             <a:pPr algn="l">
+              <a:buNone/>
               <a:defRPr sz="1050" b="1">
                 <a:solidFill>
                   <a:srgbClr val="555555"/>
@@ -15341,6 +21368,7 @@
           <a:lstStyle xmlns:a="http://schemas.openxmlformats.org/drawingml/2006/main"/>
           <a:p xmlns:a="http://schemas.openxmlformats.org/drawingml/2006/main">
             <a:pPr algn="r">
+              <a:buNone/>
               <a:defRPr sz="1050" b="1">
                 <a:solidFill>
                   <a:srgbClr val="555555"/>
@@ -15391,6 +21419,7 @@
           <a:lstStyle xmlns:a="http://schemas.openxmlformats.org/drawingml/2006/main"/>
           <a:p xmlns:a="http://schemas.openxmlformats.org/drawingml/2006/main">
             <a:pPr algn="l">
+              <a:buNone/>
               <a:defRPr sz="2850" b="1">
                 <a:solidFill>
                   <a:srgbClr val="111111"/>
@@ -15503,6 +21532,7 @@
           <a:lstStyle xmlns:a="http://schemas.openxmlformats.org/drawingml/2006/main"/>
           <a:p xmlns:a="http://schemas.openxmlformats.org/drawingml/2006/main">
             <a:pPr algn="l">
+              <a:buNone/>
               <a:defRPr sz="1350" b="1">
                 <a:solidFill>
                   <a:srgbClr val="555555"/>
@@ -15553,6 +21583,7 @@
           <a:lstStyle xmlns:a="http://schemas.openxmlformats.org/drawingml/2006/main"/>
           <a:p xmlns:a="http://schemas.openxmlformats.org/drawingml/2006/main">
             <a:pPr algn="l">
+              <a:buNone/>
               <a:defRPr sz="1875" b="1">
                 <a:solidFill>
                   <a:srgbClr val="111111"/>
@@ -15603,6 +21634,7 @@
           <a:lstStyle xmlns:a="http://schemas.openxmlformats.org/drawingml/2006/main"/>
           <a:p xmlns:a="http://schemas.openxmlformats.org/drawingml/2006/main">
             <a:pPr algn="l">
+              <a:buNone/>
               <a:defRPr sz="1350" b="0">
                 <a:solidFill>
                   <a:srgbClr val="555555"/>
@@ -15684,6 +21716,7 @@
           <a:lstStyle xmlns:a="http://schemas.openxmlformats.org/drawingml/2006/main"/>
           <a:p xmlns:a="http://schemas.openxmlformats.org/drawingml/2006/main">
             <a:pPr algn="l">
+              <a:buNone/>
               <a:defRPr sz="1350" b="1">
                 <a:solidFill>
                   <a:srgbClr val="555555"/>
@@ -15734,6 +21767,7 @@
           <a:lstStyle xmlns:a="http://schemas.openxmlformats.org/drawingml/2006/main"/>
           <a:p xmlns:a="http://schemas.openxmlformats.org/drawingml/2006/main">
             <a:pPr algn="l">
+              <a:buNone/>
               <a:defRPr sz="1875" b="1">
                 <a:solidFill>
                   <a:srgbClr val="111111"/>
@@ -15784,6 +21818,7 @@
           <a:lstStyle xmlns:a="http://schemas.openxmlformats.org/drawingml/2006/main"/>
           <a:p xmlns:a="http://schemas.openxmlformats.org/drawingml/2006/main">
             <a:pPr algn="l">
+              <a:buNone/>
               <a:defRPr sz="1350" b="0">
                 <a:solidFill>
                   <a:srgbClr val="555555"/>
@@ -15865,6 +21900,7 @@
           <a:lstStyle xmlns:a="http://schemas.openxmlformats.org/drawingml/2006/main"/>
           <a:p xmlns:a="http://schemas.openxmlformats.org/drawingml/2006/main">
             <a:pPr algn="l">
+              <a:buNone/>
               <a:defRPr sz="1350" b="1">
                 <a:solidFill>
                   <a:srgbClr val="555555"/>
@@ -15915,6 +21951,7 @@
           <a:lstStyle xmlns:a="http://schemas.openxmlformats.org/drawingml/2006/main"/>
           <a:p xmlns:a="http://schemas.openxmlformats.org/drawingml/2006/main">
             <a:pPr algn="l">
+              <a:buNone/>
               <a:defRPr sz="1875" b="1">
                 <a:solidFill>
                   <a:srgbClr val="111111"/>
@@ -15965,6 +22002,7 @@
           <a:lstStyle xmlns:a="http://schemas.openxmlformats.org/drawingml/2006/main"/>
           <a:p xmlns:a="http://schemas.openxmlformats.org/drawingml/2006/main">
             <a:pPr algn="l">
+              <a:buNone/>
               <a:defRPr sz="1350" b="0">
                 <a:solidFill>
                   <a:srgbClr val="555555"/>
@@ -16046,6 +22084,7 @@
           <a:lstStyle xmlns:a="http://schemas.openxmlformats.org/drawingml/2006/main"/>
           <a:p xmlns:a="http://schemas.openxmlformats.org/drawingml/2006/main">
             <a:pPr algn="l">
+              <a:buNone/>
               <a:defRPr sz="1350" b="1">
                 <a:solidFill>
                   <a:srgbClr val="FFFFFF"/>
@@ -16096,6 +22135,7 @@
           <a:lstStyle xmlns:a="http://schemas.openxmlformats.org/drawingml/2006/main"/>
           <a:p xmlns:a="http://schemas.openxmlformats.org/drawingml/2006/main">
             <a:pPr algn="l">
+              <a:buNone/>
               <a:defRPr sz="1875" b="1">
                 <a:solidFill>
                   <a:srgbClr val="FFFFFF"/>
@@ -16146,6 +22186,7 @@
           <a:lstStyle xmlns:a="http://schemas.openxmlformats.org/drawingml/2006/main"/>
           <a:p xmlns:a="http://schemas.openxmlformats.org/drawingml/2006/main">
             <a:pPr algn="l">
+              <a:buNone/>
               <a:defRPr sz="1350" b="0">
                 <a:solidFill>
                   <a:srgbClr val="FFFFFF"/>
@@ -16227,6 +22268,7 @@
           <a:lstStyle xmlns:a="http://schemas.openxmlformats.org/drawingml/2006/main"/>
           <a:p xmlns:a="http://schemas.openxmlformats.org/drawingml/2006/main">
             <a:pPr algn="l">
+              <a:buNone/>
               <a:defRPr sz="1350" b="1">
                 <a:solidFill>
                   <a:srgbClr val="555555"/>
@@ -16277,6 +22319,7 @@
           <a:lstStyle xmlns:a="http://schemas.openxmlformats.org/drawingml/2006/main"/>
           <a:p xmlns:a="http://schemas.openxmlformats.org/drawingml/2006/main">
             <a:pPr algn="l">
+              <a:buNone/>
               <a:defRPr sz="1875" b="1">
                 <a:solidFill>
                   <a:srgbClr val="111111"/>
@@ -16327,6 +22370,7 @@
           <a:lstStyle xmlns:a="http://schemas.openxmlformats.org/drawingml/2006/main"/>
           <a:p xmlns:a="http://schemas.openxmlformats.org/drawingml/2006/main">
             <a:pPr algn="l">
+              <a:buNone/>
               <a:defRPr sz="1350" b="0">
                 <a:solidFill>
                   <a:srgbClr val="555555"/>
@@ -16377,6 +22421,7 @@
           <a:lstStyle xmlns:a="http://schemas.openxmlformats.org/drawingml/2006/main"/>
           <a:p xmlns:a="http://schemas.openxmlformats.org/drawingml/2006/main">
             <a:pPr algn="ctr">
+              <a:buNone/>
               <a:defRPr sz="2025" b="1">
                 <a:solidFill>
                   <a:srgbClr val="111111"/>
@@ -16449,6 +22494,7 @@
           <a:lstStyle xmlns:a="http://schemas.openxmlformats.org/drawingml/2006/main"/>
           <a:p xmlns:a="http://schemas.openxmlformats.org/drawingml/2006/main">
             <a:pPr algn="l">
+              <a:buNone/>
               <a:defRPr sz="1050" b="1">
                 <a:solidFill>
                   <a:srgbClr val="555555"/>
@@ -16499,6 +22545,7 @@
           <a:lstStyle xmlns:a="http://schemas.openxmlformats.org/drawingml/2006/main"/>
           <a:p xmlns:a="http://schemas.openxmlformats.org/drawingml/2006/main">
             <a:pPr algn="r">
+              <a:buNone/>
               <a:defRPr sz="1050" b="1">
                 <a:solidFill>
                   <a:srgbClr val="555555"/>
@@ -16549,6 +22596,7 @@
           <a:lstStyle xmlns:a="http://schemas.openxmlformats.org/drawingml/2006/main"/>
           <a:p xmlns:a="http://schemas.openxmlformats.org/drawingml/2006/main">
             <a:pPr algn="l">
+              <a:buNone/>
               <a:defRPr sz="2850" b="1">
                 <a:solidFill>
                   <a:srgbClr val="111111"/>
@@ -16630,6 +22678,7 @@
           <a:lstStyle xmlns:a="http://schemas.openxmlformats.org/drawingml/2006/main"/>
           <a:p xmlns:a="http://schemas.openxmlformats.org/drawingml/2006/main">
             <a:pPr algn="ctr">
+              <a:buNone/>
               <a:defRPr sz="2850" b="1">
                 <a:solidFill>
                   <a:srgbClr val="111111"/>
@@ -16711,6 +22760,7 @@
           <a:lstStyle xmlns:a="http://schemas.openxmlformats.org/drawingml/2006/main"/>
           <a:p xmlns:a="http://schemas.openxmlformats.org/drawingml/2006/main">
             <a:pPr algn="ctr">
+              <a:buNone/>
               <a:defRPr sz="2100" b="0">
                 <a:solidFill>
                   <a:srgbClr val="555555"/>
@@ -16761,6 +22811,7 @@
           <a:lstStyle xmlns:a="http://schemas.openxmlformats.org/drawingml/2006/main"/>
           <a:p xmlns:a="http://schemas.openxmlformats.org/drawingml/2006/main">
             <a:pPr algn="ctr">
+              <a:buNone/>
               <a:defRPr sz="1275" b="1">
                 <a:solidFill>
                   <a:srgbClr val="E95D2A"/>
